--- a/docs/Presentacion_Sustentacion_DSP_BT_Analyzer.pptx
+++ b/docs/Presentacion_Sustentacion_DSP_BT_Analyzer.pptx
@@ -1358,7 +1358,7 @@
           <a:lstStyle/>
           <a:p>
             <a:r>
-              <a:t>≈1.5 min. Camina las tres tarjetas de izquierda a derecha: muestreo, cuantización, compresión. La anécdota del 0xFF demuestra que el código es de ustedes: el relleno con ceros sonaba como un clic fortísimo.</a:t>
+              <a:t>≈1.5 min. Camina las tres tarjetas de izquierda a derecha: muestreo, cuantización, compresión. OJO: esto se detectó por cálculo al escribir el código, NO se escuchó fallar en una prueba. Si preguntan 'como lo notaron', la respuesta honesta es: revisando la aritmética antes de que sonara mal.</a:t>
             </a:r>
           </a:p>
         </p:txBody>
@@ -9873,7 +9873,7 @@
                 </a:solidFill>
                 <a:latin typeface="Segoe UI"/>
               </a:rPr>
-              <a:t>Dato curioso ganado a las malas: el silencio en μ-law es 0xFF. El byte 0x00 es un estallido a casi fondo de escala.</a:t>
+              <a:t>Detalle que delata el dominio del formato: el silencio en μ-law es 0xFF, no 0x00 — ese decodifica a casi fondo de escala.</a:t>
             </a:r>
           </a:p>
         </p:txBody>

--- a/docs/Presentacion_Sustentacion_DSP_BT_Analyzer.pptx
+++ b/docs/Presentacion_Sustentacion_DSP_BT_Analyzer.pptx
@@ -518,7 +518,7 @@
           <a:lstStyle/>
           <a:p>
             <a:r>
-              <a:t>≈1.5 min. AQUÍ VA TU ABREBOCAS (no está en la lámina a propósito): entregas el celular, confirmas el modo avión, preguntas '¿cómo cree que me está escuchando?'. Deja que responda. Cuando diga Bluetooth, pasas a la siguiente lámina y arrancas con la banda de 2.4 GHz.</a:t>
+              <a:t>ABREBOCAS (esta lámina no revela la tecnología a propósito): entrégale el celular al profesor, confirma que está en modo avión, y pregúntale '¿cómo cree que me está escuchando en este momento?'. Deja que responda. Cuando llegue a Bluetooth, avanzas. Si no cae, tú lo revelas en la lámina 3.</a:t>
             </a:r>
           </a:p>
         </p:txBody>
@@ -588,7 +588,7 @@
           <a:lstStyle/>
           <a:p>
             <a:r>
-              <a:t>≈1.5 min. Esta lámina es la columna metodológica: cada retiro tiene diagnóstico y medición detrás. A los profesores les gusta más esto que diez features.</a:t>
+              <a:t>≈1 min. La pista fue que todo se recuperaba al silenciar mi propio micrófono. El detector de voz es el VAD; los reenvíos, el ARQ (los explico en la siguiente).</a:t>
             </a:r>
           </a:p>
         </p:txBody>
@@ -658,7 +658,7 @@
           <a:lstStyle/>
           <a:p>
             <a:r>
-              <a:t>≈1.5 min. La moraleja: el eco no se resolvió con más matemática sino usando la infraestructura correcta del sistema. Las radios lo evitan por diseño (half-dúplex); las llamadas lo cancelan en hardware.</a:t>
+              <a:t>≈1.5 min. Esta lámina muestra el método: cada retiro tiene diagnóstico y medición detrás. NLMS, ARQ y semi-dúplex — nombres técnicos que puedes soltar si preguntan.</a:t>
             </a:r>
           </a:p>
         </p:txBody>
@@ -728,7 +728,7 @@
           <a:lstStyle/>
           <a:p>
             <a:r>
-              <a:t>≈1 min. Si hay tablero cerca y sobra tiempo en preguntas, el ejemplo de Hamming a mano (datos 1011) está en la guía de sustentación, sección 7.4.</a:t>
+              <a:t>≈1.5 min. Nuestro filtro fallaba porque no tenía la información de tiempo alineada; el chip del teléfono sí la tiene. La lección: a veces la solución es usar la herramienta correcta del sistema, no más matemática.</a:t>
             </a:r>
           </a:p>
         </p:txBody>
@@ -798,7 +798,7 @@
           <a:lstStyle/>
           <a:p>
             <a:r>
-              <a:t>≈1 min. Pregunta trampa esperada: '¿su C no contradice el throughput real?'. Respuesta: C es el límite de un canal ideal; la brecha mide el costo de la implementación práctica.</a:t>
+              <a:t>≈1.5 min. Los tres nombres técnicos: PLC (rellenar pérdidas), filtros IIR/FIR (limpiar ruido), Hamming 7,4 (corregir bits). Si hay tablero, el ejemplo de Hamming a mano está en la guía escrita.</a:t>
             </a:r>
           </a:p>
         </p:txBody>
@@ -868,7 +868,7 @@
           <a:lstStyle/>
           <a:p>
             <a:r>
-              <a:t>≈3 min. GUION: (1) conversar 20 s sin optimizar, señalar el eco y el VAD en el log. (2) Activar AEC en plena frase: el eco muere — pausa dramática. (3) 'Simular canal degradado': estática y clics; encender Filtro (baja el silbido), FEC (el log cuenta bits corregidos), PLC. (4) Recorrer métricas: RSSI real/simulado, pérdida 0% y por qué, RTT, H(X) subiendo con el ruido. Si el BT falla: capturas de respaldo.</a:t>
+              <a:t>≈1 min. No las recitamos de un libro: la app las calcula con el audio que está pasando. Si preguntan por qué C es alta frente a lo real: C es el techo ideal; la diferencia mide el costo de la práctica.</a:t>
             </a:r>
           </a:p>
         </p:txBody>
@@ -938,7 +938,7 @@
           <a:lstStyle/>
           <a:p>
             <a:r>
-              <a:t>≈1 min. Cuatro números, cuatro historias ya contadas. No leas las tarjetas: señálalas.</a:t>
+              <a:t>≈3 min. GUION: (1) conversar 20 s sin optimizar, señalar el eco. (2) Activar el cancelador en plena frase: el eco desaparece. (3) 'Simular canal degradado': se oye el ruido; encender filtro (baja el silbido), corrección (el registro cuenta los bits arreglados), y el relleno de pérdidas. (4) Recorrer las medidas: señal, pérdida 0% y por qué, retraso, entropía subiendo con el ruido. Plan B: el video de la lámina 2 si el Bluetooth falla.</a:t>
             </a:r>
           </a:p>
         </p:txBody>
@@ -1008,7 +1008,7 @@
           <a:lstStyle/>
           <a:p>
             <a:r>
-              <a:t>≈1 min. Cierre con calma. La frase 5 es la que resume el método del equipo.</a:t>
+              <a:t>≈1 min. Cuatro números, cada uno con su historia ya contada. Señálalos, no los leas.</a:t>
             </a:r>
           </a:p>
         </p:txBody>
@@ -1078,7 +1078,7 @@
           <a:lstStyle/>
           <a:p>
             <a:r>
-              <a:t>Total ≈ 15 min con demo incluida. Respira: el banco de 30 preguntas con respuesta está en la guía de sustentación.</a:t>
+              <a:t>Total ≈ 15 min con demo. El banco de 30 preguntas con respuesta está en la guía escrita.</a:t>
             </a:r>
           </a:p>
         </p:txBody>
@@ -1148,7 +1148,7 @@
           <a:lstStyle/>
           <a:p>
             <a:r>
-              <a:t>≈1 min. Enlaza con el truco: 'en efecto, Bluetooth. Todos lo usamos para audífonos y olvidamos que es un canal de comunicación completo'. Menciona la banda compartida y que RFCOMM se comporta como un puerto serial: nosotros construimos TODO lo demás encima.</a:t>
+              <a:t>Aquí va un video corto (30-45 s) de la app funcionando entre los dos teléfonos, o haces la demo en vivo. En PowerPoint: Insertar &gt; Video &gt; Este dispositivo, y lo encajas en el marco. Si haces demo en vivo, usa esta lámina como respaldo por si el Bluetooth falla.</a:t>
             </a:r>
           </a:p>
         </p:txBody>
@@ -1218,7 +1218,7 @@
           <a:lstStyle/>
           <a:p>
             <a:r>
-              <a:t>≈1 min. Esta es la justificación. Frase clave: 'la teoría se pone a prueba donde el canal no pide permiso'. Aclara el doble valor: académico (medir lo que el curso enseña) y práctico (comunicación sin infraestructura).</a:t>
+              <a:t>≈1 min. 'En efecto, Bluetooth.' Menciona que comparte banda con el Wi-Fi y el microondas, y que el chip esquiva la interferencia saltando de frecuencia 1600 veces por segundo, solo. Nosotros no controlamos eso; construimos todo lo demás encima.</a:t>
             </a:r>
           </a:p>
         </p:txBody>
@@ -1288,7 +1288,7 @@
           <a:lstStyle/>
           <a:p>
             <a:r>
-              <a:t>≈1 min. Recorre las cinco cajas con la mano. Remata: 'si me preguntan dónde está la teoría de la información en la app, la respuesta es: en su estructura'.</a:t>
+              <a:t>≈1 min. La justificación. Doble valor: académico (medir lo que el curso enseña sobre un canal físico) y práctico (voz sin internet ni antenas; funciona en modo avión, como acabas de mostrar).</a:t>
             </a:r>
           </a:p>
         </p:txBody>
@@ -1358,7 +1358,7 @@
           <a:lstStyle/>
           <a:p>
             <a:r>
-              <a:t>≈1.5 min. Camina las tres tarjetas de izquierda a derecha: muestreo, cuantización, compresión. OJO: esto se detectó por cálculo al escribir el código, NO se escuchó fallar en una prueba. Si preguntan 'como lo notaron', la respuesta honesta es: revisando la aritmética antes de que sonara mal.</a:t>
+              <a:t>≈1 min. Recorre las cinco cajas. Esas dos ideas (comprimir la fuente / proteger el canal) son la estructura de Shannon; si el profe pregunta dónde está la teoría, está en cómo está organizado todo.</a:t>
             </a:r>
           </a:p>
         </p:txBody>
@@ -1428,7 +1428,7 @@
           <a:lstStyle/>
           <a:p>
             <a:r>
-              <a:t>≈1.5 min. Aquí está el corazón del diseño v2. Si alguien pregunta por qué 'frames' y no ráfagas, sonríe: esa historia viene en las próximas tres láminas.</a:t>
+              <a:t>≈1.5 min. Muestreo (cada cuánto medís) y bits (con cuánta precisión) son cosas distintas: uno es el eje del tiempo, otro el de la altura. μ-law comprime imitando al oído.</a:t>
             </a:r>
           </a:p>
         </p:txBody>
@@ -1498,7 +1498,7 @@
           <a:lstStyle/>
           <a:p>
             <a:r>
-              <a:t>≈1 min. Lección: cuando el rastro no está en tu código, el log del sistema da la causa exacta. Y a veces la librería ES el bug.</a:t>
+              <a:t>≈1.5 min. Antes mandábamos bloques de 2 segundos (lento). Ahora pedacitos de 128 ms = conversación fluida. El número de orden se llama SEQ; el detector de silencio, VAD.</a:t>
             </a:r>
           </a:p>
         </p:txBody>
@@ -1568,7 +1568,7 @@
           <a:lstStyle/>
           <a:p>
             <a:r>
-              <a:t>≈1.5 min. El número 11 s es real, medido. Explica productor/consumidor con calma: es la lección de sistemas más importante del proyecto.</a:t>
+              <a:t>≈1 min. La herramienta para leer el registro se llama adb logcat. El fallo era de 'concurrencia': varias partes escribían el audio a la vez y chocaban; con un solo hilo escritor se acabó.</a:t>
             </a:r>
           </a:p>
         </p:txBody>
@@ -1638,7 +1638,7 @@
           <a:lstStyle/>
           <a:p>
             <a:r>
-              <a:t>≈1 min. El colapso por congestión del ARQ es el mismo fenómeno que motivó el control de congestión de TCP — decirlo así conecta con redes y suena bien.</a:t>
+              <a:t>≈1.5 min. El 11 s es real, medido. La regla: en tiempo real el que reproduce debe ir al menos tan rápido como el que graba. Preferimos perder un pedacito a acumular retraso.</a:t>
             </a:r>
           </a:p>
         </p:txBody>
@@ -4690,23 +4690,23 @@
       </p:sp>
       <p:sp>
         <p:nvSpPr>
-          <p:cNvPr id="3" name="orb"/>
+          <p:cNvPr id="3" name="ic"/>
           <p:cNvSpPr/>
           <p:nvPr/>
         </p:nvSpPr>
         <p:spPr>
           <a:xfrm>
-            <a:off x="7863840" y="1280160"/>
-            <a:ext cx="4206240" cy="4206240"/>
-          </a:xfrm>
-          <a:prstGeom prst="ellipse">
-            <a:avLst/>
-          </a:prstGeom>
-          <a:noFill/>
-          <a:ln w="44450">
-            <a:solidFill>
-              <a:srgbClr val="58A6FF"/>
-            </a:solidFill>
+            <a:off x="5097779" y="1725930"/>
+            <a:ext cx="137160" cy="480059"/>
+          </a:xfrm>
+          <a:prstGeom prst="roundRect">
+            <a:avLst/>
+          </a:prstGeom>
+          <a:solidFill>
+            <a:srgbClr val="58A6FF"/>
+          </a:solidFill>
+          <a:ln>
+            <a:noFill/>
           </a:ln>
           <a:effectLst/>
         </p:spPr>
@@ -4734,20 +4734,20 @@
       </p:sp>
       <p:sp>
         <p:nvSpPr>
-          <p:cNvPr id="4" name="orb2"/>
+          <p:cNvPr id="4" name="ic"/>
           <p:cNvSpPr/>
           <p:nvPr/>
         </p:nvSpPr>
         <p:spPr>
           <a:xfrm>
-            <a:off x="8869680" y="2286000"/>
-            <a:ext cx="2194560" cy="2194560"/>
-          </a:xfrm>
-          <a:prstGeom prst="ellipse">
+            <a:off x="5330951" y="1554480"/>
+            <a:ext cx="137160" cy="822959"/>
+          </a:xfrm>
+          <a:prstGeom prst="roundRect">
             <a:avLst/>
           </a:prstGeom>
           <a:solidFill>
-            <a:srgbClr val="1B2638"/>
+            <a:srgbClr val="58A6FF"/>
           </a:solidFill>
           <a:ln>
             <a:noFill/>
@@ -4778,14 +4778,322 @@
       </p:sp>
       <p:sp>
         <p:nvSpPr>
-          <p:cNvPr id="5" name="kicker"/>
+          <p:cNvPr id="5" name="ic"/>
+          <p:cNvSpPr/>
+          <p:nvPr/>
+        </p:nvSpPr>
+        <p:spPr>
+          <a:xfrm>
+            <a:off x="5564123" y="1348739"/>
+            <a:ext cx="137160" cy="1234440"/>
+          </a:xfrm>
+          <a:prstGeom prst="roundRect">
+            <a:avLst/>
+          </a:prstGeom>
+          <a:solidFill>
+            <a:srgbClr val="58A6FF"/>
+          </a:solidFill>
+          <a:ln>
+            <a:noFill/>
+          </a:ln>
+          <a:effectLst/>
+        </p:spPr>
+        <p:style>
+          <a:lnRef idx="1">
+            <a:schemeClr val="accent1"/>
+          </a:lnRef>
+          <a:fillRef idx="3">
+            <a:schemeClr val="accent1"/>
+          </a:fillRef>
+          <a:effectRef idx="2">
+            <a:schemeClr val="accent1"/>
+          </a:effectRef>
+          <a:fontRef idx="minor">
+            <a:schemeClr val="lt1"/>
+          </a:fontRef>
+        </p:style>
+        <p:txBody>
+          <a:bodyPr rtlCol="0" anchor="ctr"/>
+          <a:lstStyle/>
+          <a:p>
+            <a:pPr algn="ctr"/>
+          </a:p>
+        </p:txBody>
+      </p:sp>
+      <p:sp>
+        <p:nvSpPr>
+          <p:cNvPr id="6" name="ic"/>
+          <p:cNvSpPr/>
+          <p:nvPr/>
+        </p:nvSpPr>
+        <p:spPr>
+          <a:xfrm>
+            <a:off x="5797295" y="1623060"/>
+            <a:ext cx="137160" cy="685800"/>
+          </a:xfrm>
+          <a:prstGeom prst="roundRect">
+            <a:avLst/>
+          </a:prstGeom>
+          <a:solidFill>
+            <a:srgbClr val="58A6FF"/>
+          </a:solidFill>
+          <a:ln>
+            <a:noFill/>
+          </a:ln>
+          <a:effectLst/>
+        </p:spPr>
+        <p:style>
+          <a:lnRef idx="1">
+            <a:schemeClr val="accent1"/>
+          </a:lnRef>
+          <a:fillRef idx="3">
+            <a:schemeClr val="accent1"/>
+          </a:fillRef>
+          <a:effectRef idx="2">
+            <a:schemeClr val="accent1"/>
+          </a:effectRef>
+          <a:fontRef idx="minor">
+            <a:schemeClr val="lt1"/>
+          </a:fontRef>
+        </p:style>
+        <p:txBody>
+          <a:bodyPr rtlCol="0" anchor="ctr"/>
+          <a:lstStyle/>
+          <a:p>
+            <a:pPr algn="ctr"/>
+          </a:p>
+        </p:txBody>
+      </p:sp>
+      <p:sp>
+        <p:nvSpPr>
+          <p:cNvPr id="7" name="ic"/>
+          <p:cNvSpPr/>
+          <p:nvPr/>
+        </p:nvSpPr>
+        <p:spPr>
+          <a:xfrm>
+            <a:off x="6030467" y="1280160"/>
+            <a:ext cx="137160" cy="1371600"/>
+          </a:xfrm>
+          <a:prstGeom prst="roundRect">
+            <a:avLst/>
+          </a:prstGeom>
+          <a:solidFill>
+            <a:srgbClr val="58A6FF"/>
+          </a:solidFill>
+          <a:ln>
+            <a:noFill/>
+          </a:ln>
+          <a:effectLst/>
+        </p:spPr>
+        <p:style>
+          <a:lnRef idx="1">
+            <a:schemeClr val="accent1"/>
+          </a:lnRef>
+          <a:fillRef idx="3">
+            <a:schemeClr val="accent1"/>
+          </a:fillRef>
+          <a:effectRef idx="2">
+            <a:schemeClr val="accent1"/>
+          </a:effectRef>
+          <a:fontRef idx="minor">
+            <a:schemeClr val="lt1"/>
+          </a:fontRef>
+        </p:style>
+        <p:txBody>
+          <a:bodyPr rtlCol="0" anchor="ctr"/>
+          <a:lstStyle/>
+          <a:p>
+            <a:pPr algn="ctr"/>
+          </a:p>
+        </p:txBody>
+      </p:sp>
+      <p:sp>
+        <p:nvSpPr>
+          <p:cNvPr id="8" name="ic"/>
+          <p:cNvSpPr/>
+          <p:nvPr/>
+        </p:nvSpPr>
+        <p:spPr>
+          <a:xfrm>
+            <a:off x="6263640" y="1657350"/>
+            <a:ext cx="137160" cy="617220"/>
+          </a:xfrm>
+          <a:prstGeom prst="roundRect">
+            <a:avLst/>
+          </a:prstGeom>
+          <a:solidFill>
+            <a:srgbClr val="58A6FF"/>
+          </a:solidFill>
+          <a:ln>
+            <a:noFill/>
+          </a:ln>
+          <a:effectLst/>
+        </p:spPr>
+        <p:style>
+          <a:lnRef idx="1">
+            <a:schemeClr val="accent1"/>
+          </a:lnRef>
+          <a:fillRef idx="3">
+            <a:schemeClr val="accent1"/>
+          </a:fillRef>
+          <a:effectRef idx="2">
+            <a:schemeClr val="accent1"/>
+          </a:effectRef>
+          <a:fontRef idx="minor">
+            <a:schemeClr val="lt1"/>
+          </a:fontRef>
+        </p:style>
+        <p:txBody>
+          <a:bodyPr rtlCol="0" anchor="ctr"/>
+          <a:lstStyle/>
+          <a:p>
+            <a:pPr algn="ctr"/>
+          </a:p>
+        </p:txBody>
+      </p:sp>
+      <p:sp>
+        <p:nvSpPr>
+          <p:cNvPr id="9" name="ic"/>
+          <p:cNvSpPr/>
+          <p:nvPr/>
+        </p:nvSpPr>
+        <p:spPr>
+          <a:xfrm>
+            <a:off x="6496812" y="1383030"/>
+            <a:ext cx="137160" cy="1165860"/>
+          </a:xfrm>
+          <a:prstGeom prst="roundRect">
+            <a:avLst/>
+          </a:prstGeom>
+          <a:solidFill>
+            <a:srgbClr val="58A6FF"/>
+          </a:solidFill>
+          <a:ln>
+            <a:noFill/>
+          </a:ln>
+          <a:effectLst/>
+        </p:spPr>
+        <p:style>
+          <a:lnRef idx="1">
+            <a:schemeClr val="accent1"/>
+          </a:lnRef>
+          <a:fillRef idx="3">
+            <a:schemeClr val="accent1"/>
+          </a:fillRef>
+          <a:effectRef idx="2">
+            <a:schemeClr val="accent1"/>
+          </a:effectRef>
+          <a:fontRef idx="minor">
+            <a:schemeClr val="lt1"/>
+          </a:fontRef>
+        </p:style>
+        <p:txBody>
+          <a:bodyPr rtlCol="0" anchor="ctr"/>
+          <a:lstStyle/>
+          <a:p>
+            <a:pPr algn="ctr"/>
+          </a:p>
+        </p:txBody>
+      </p:sp>
+      <p:sp>
+        <p:nvSpPr>
+          <p:cNvPr id="10" name="ic"/>
+          <p:cNvSpPr/>
+          <p:nvPr/>
+        </p:nvSpPr>
+        <p:spPr>
+          <a:xfrm>
+            <a:off x="6729983" y="1554480"/>
+            <a:ext cx="137160" cy="822959"/>
+          </a:xfrm>
+          <a:prstGeom prst="roundRect">
+            <a:avLst/>
+          </a:prstGeom>
+          <a:solidFill>
+            <a:srgbClr val="58A6FF"/>
+          </a:solidFill>
+          <a:ln>
+            <a:noFill/>
+          </a:ln>
+          <a:effectLst/>
+        </p:spPr>
+        <p:style>
+          <a:lnRef idx="1">
+            <a:schemeClr val="accent1"/>
+          </a:lnRef>
+          <a:fillRef idx="3">
+            <a:schemeClr val="accent1"/>
+          </a:fillRef>
+          <a:effectRef idx="2">
+            <a:schemeClr val="accent1"/>
+          </a:effectRef>
+          <a:fontRef idx="minor">
+            <a:schemeClr val="lt1"/>
+          </a:fontRef>
+        </p:style>
+        <p:txBody>
+          <a:bodyPr rtlCol="0" anchor="ctr"/>
+          <a:lstStyle/>
+          <a:p>
+            <a:pPr algn="ctr"/>
+          </a:p>
+        </p:txBody>
+      </p:sp>
+      <p:sp>
+        <p:nvSpPr>
+          <p:cNvPr id="11" name="ic"/>
+          <p:cNvSpPr/>
+          <p:nvPr/>
+        </p:nvSpPr>
+        <p:spPr>
+          <a:xfrm>
+            <a:off x="6963155" y="1725930"/>
+            <a:ext cx="137160" cy="480059"/>
+          </a:xfrm>
+          <a:prstGeom prst="roundRect">
+            <a:avLst/>
+          </a:prstGeom>
+          <a:solidFill>
+            <a:srgbClr val="58A6FF"/>
+          </a:solidFill>
+          <a:ln>
+            <a:noFill/>
+          </a:ln>
+          <a:effectLst/>
+        </p:spPr>
+        <p:style>
+          <a:lnRef idx="1">
+            <a:schemeClr val="accent1"/>
+          </a:lnRef>
+          <a:fillRef idx="3">
+            <a:schemeClr val="accent1"/>
+          </a:fillRef>
+          <a:effectRef idx="2">
+            <a:schemeClr val="accent1"/>
+          </a:effectRef>
+          <a:fontRef idx="minor">
+            <a:schemeClr val="lt1"/>
+          </a:fontRef>
+        </p:style>
+        <p:txBody>
+          <a:bodyPr rtlCol="0" anchor="ctr"/>
+          <a:lstStyle/>
+          <a:p>
+            <a:pPr algn="ctr"/>
+          </a:p>
+        </p:txBody>
+      </p:sp>
+      <p:sp>
+        <p:nvSpPr>
+          <p:cNvPr id="12" name="tx"/>
           <p:cNvSpPr txBox="1"/>
           <p:nvPr/>
         </p:nvSpPr>
         <p:spPr>
           <a:xfrm>
-            <a:off x="640080" y="1828800"/>
-            <a:ext cx="7315200" cy="457200"/>
+            <a:off x="685800" y="2788920"/>
+            <a:ext cx="10789920" cy="1737360"/>
           </a:xfrm>
           <a:prstGeom prst="rect">
             <a:avLst/>
@@ -4798,72 +5106,49 @@
           </a:bodyPr>
           <a:lstStyle/>
           <a:p>
-            <a:pPr algn="l">
+            <a:pPr algn="ctr">
               <a:spcAft>
                 <a:spcPts val="600"/>
               </a:spcAft>
             </a:pPr>
             <a:r>
-              <a:rPr sz="1200" b="1">
-                <a:solidFill>
-                  <a:srgbClr val="58A6FF"/>
+              <a:rPr sz="4000" b="1">
+                <a:solidFill>
+                  <a:srgbClr val="E6EDF3"/>
                 </a:solidFill>
                 <a:latin typeface="Segoe UI"/>
               </a:rPr>
-              <a:t>TEORÍA DE LA INFORMACIÓN Y SISTEMAS DE COMUNICACIÓN · UNAL</a:t>
-            </a:r>
-          </a:p>
-        </p:txBody>
-      </p:sp>
-      <p:sp>
-        <p:nvSpPr>
-          <p:cNvPr id="6" name="title"/>
-          <p:cNvSpPr txBox="1"/>
-          <p:nvPr/>
-        </p:nvSpPr>
-        <p:spPr>
-          <a:xfrm>
-            <a:off x="640080" y="2240280"/>
-            <a:ext cx="7863840" cy="1554480"/>
-          </a:xfrm>
-          <a:prstGeom prst="rect">
-            <a:avLst/>
-          </a:prstGeom>
-          <a:noFill/>
-        </p:spPr>
-        <p:txBody>
-          <a:bodyPr wrap="square" anchor="t">
-            <a:spAutoFit/>
-          </a:bodyPr>
-          <a:lstStyle/>
-          <a:p>
-            <a:pPr algn="l">
+              <a:t>Comunicación de voz en tiempo real,</a:t>
+            </a:r>
+          </a:p>
+          <a:p>
+            <a:pPr algn="ctr">
               <a:spcAft>
                 <a:spcPts val="600"/>
               </a:spcAft>
             </a:pPr>
             <a:r>
-              <a:rPr sz="5400" b="1">
+              <a:rPr sz="4000" b="1">
                 <a:solidFill>
                   <a:srgbClr val="E6EDF3"/>
                 </a:solidFill>
                 <a:latin typeface="Segoe UI"/>
               </a:rPr>
-              <a:t>DSP · BT Analyzer</a:t>
-            </a:r>
-          </a:p>
-        </p:txBody>
-      </p:sp>
-      <p:sp>
-        <p:nvSpPr>
-          <p:cNvPr id="7" name="body"/>
+              <a:t>punto a punto, entre dos teléfonos</a:t>
+            </a:r>
+          </a:p>
+        </p:txBody>
+      </p:sp>
+      <p:sp>
+        <p:nvSpPr>
+          <p:cNvPr id="13" name="tx"/>
           <p:cNvSpPr txBox="1"/>
           <p:nvPr/>
         </p:nvSpPr>
         <p:spPr>
           <a:xfrm>
-            <a:off x="640080" y="3429000"/>
-            <a:ext cx="7315200" cy="1005840"/>
+            <a:off x="685800" y="4800600"/>
+            <a:ext cx="10789920" cy="1097280"/>
           </a:xfrm>
           <a:prstGeom prst="rect">
             <a:avLst/>
@@ -4876,97 +5161,35 @@
           </a:bodyPr>
           <a:lstStyle/>
           <a:p>
-            <a:pPr algn="l">
+            <a:pPr algn="ctr">
+              <a:spcAft>
+                <a:spcPts val="400"/>
+              </a:spcAft>
+            </a:pPr>
+            <a:r>
+              <a:rPr sz="1800" b="1">
+                <a:solidFill>
+                  <a:srgbClr val="58A6FF"/>
+                </a:solidFill>
+                <a:latin typeface="Segoe UI"/>
+              </a:rPr>
+              <a:t>Oscar Javier Saavedra Montero</a:t>
+            </a:r>
+          </a:p>
+          <a:p>
+            <a:pPr algn="ctr">
               <a:spcAft>
                 <a:spcPts val="600"/>
               </a:spcAft>
             </a:pPr>
             <a:r>
-              <a:rPr sz="2000" b="0">
+              <a:rPr sz="1400" b="0">
                 <a:solidFill>
                   <a:srgbClr val="8B949E"/>
                 </a:solidFill>
                 <a:latin typeface="Segoe UI"/>
               </a:rPr>
-              <a:t>Una radio entre dos celulares. Sin internet. Sin infraestructura.</a:t>
-            </a:r>
-          </a:p>
-        </p:txBody>
-      </p:sp>
-      <p:sp>
-        <p:nvSpPr>
-          <p:cNvPr id="8" name="meta"/>
-          <p:cNvSpPr txBox="1"/>
-          <p:nvPr/>
-        </p:nvSpPr>
-        <p:spPr>
-          <a:xfrm>
-            <a:off x="640080" y="5120640"/>
-            <a:ext cx="7315200" cy="914400"/>
-          </a:xfrm>
-          <a:prstGeom prst="rect">
-            <a:avLst/>
-          </a:prstGeom>
-          <a:noFill/>
-        </p:spPr>
-        <p:txBody>
-          <a:bodyPr wrap="square" anchor="t">
-            <a:spAutoFit/>
-          </a:bodyPr>
-          <a:lstStyle/>
-          <a:p>
-            <a:pPr algn="l">
-              <a:spcAft>
-                <a:spcPts val="600"/>
-              </a:spcAft>
-            </a:pPr>
-            <a:r>
-              <a:rPr sz="1400" b="0">
-                <a:solidFill>
-                  <a:srgbClr val="8B949E"/>
-                </a:solidFill>
-                <a:latin typeface="Segoe UI"/>
-              </a:rPr>
-              <a:t>Integrantes: [nombres]   ·   Grupo [ ]   ·   Julio de 2026</a:t>
-            </a:r>
-          </a:p>
-        </p:txBody>
-      </p:sp>
-      <p:sp>
-        <p:nvSpPr>
-          <p:cNvPr id="9" name="foot"/>
-          <p:cNvSpPr txBox="1"/>
-          <p:nvPr/>
-        </p:nvSpPr>
-        <p:spPr>
-          <a:xfrm>
-            <a:off x="640080" y="6419088"/>
-            <a:ext cx="10881360" cy="365760"/>
-          </a:xfrm>
-          <a:prstGeom prst="rect">
-            <a:avLst/>
-          </a:prstGeom>
-          <a:noFill/>
-        </p:spPr>
-        <p:txBody>
-          <a:bodyPr wrap="square" anchor="t">
-            <a:spAutoFit/>
-          </a:bodyPr>
-          <a:lstStyle/>
-          <a:p>
-            <a:pPr algn="l">
-              <a:spcAft>
-                <a:spcPts val="600"/>
-              </a:spcAft>
-            </a:pPr>
-            <a:r>
-              <a:rPr sz="1000" b="0">
-                <a:solidFill>
-                  <a:srgbClr val="8B949E"/>
-                </a:solidFill>
-                <a:latin typeface="Segoe UI"/>
-              </a:rPr>
-              <a:t>DSP · BT Analyzer  —  Teoría de la Información y Sistemas de Comunicación · UNAL</a:t>
+              <a:t>Teoría de la Información y Sistemas de Comunicación · Universidad Nacional de Colombia · 2026</a:t>
             </a:r>
           </a:p>
         </p:txBody>
@@ -5035,23 +5258,23 @@
       </p:sp>
       <p:sp>
         <p:nvSpPr>
-          <p:cNvPr id="3" name="orb"/>
+          <p:cNvPr id="3" name="ic"/>
           <p:cNvSpPr/>
           <p:nvPr/>
         </p:nvSpPr>
         <p:spPr>
           <a:xfrm>
-            <a:off x="5074920" y="320040"/>
-            <a:ext cx="2011680" cy="2011680"/>
-          </a:xfrm>
-          <a:prstGeom prst="ellipse">
-            <a:avLst/>
-          </a:prstGeom>
-          <a:noFill/>
-          <a:ln w="44450">
-            <a:solidFill>
-              <a:srgbClr val="D29922"/>
-            </a:solidFill>
+            <a:off x="10078516" y="1188720"/>
+            <a:ext cx="691286" cy="1020470"/>
+          </a:xfrm>
+          <a:prstGeom prst="roundRect">
+            <a:avLst/>
+          </a:prstGeom>
+          <a:solidFill>
+            <a:srgbClr val="F85149"/>
+          </a:solidFill>
+          <a:ln>
+            <a:noFill/>
           </a:ln>
           <a:effectLst/>
         </p:spPr>
@@ -5079,14 +5302,146 @@
       </p:sp>
       <p:sp>
         <p:nvSpPr>
-          <p:cNvPr id="4" name="kicker"/>
+          <p:cNvPr id="4" name="ic"/>
+          <p:cNvSpPr/>
+          <p:nvPr/>
+        </p:nvSpPr>
+        <p:spPr>
+          <a:xfrm>
+            <a:off x="9905695" y="1909632"/>
+            <a:ext cx="1036929" cy="918423"/>
+          </a:xfrm>
+          <a:prstGeom prst="blockArc">
+            <a:avLst/>
+          </a:prstGeom>
+          <a:solidFill>
+            <a:srgbClr val="F85149"/>
+          </a:solidFill>
+          <a:ln>
+            <a:noFill/>
+          </a:ln>
+          <a:effectLst/>
+        </p:spPr>
+        <p:style>
+          <a:lnRef idx="1">
+            <a:schemeClr val="accent1"/>
+          </a:lnRef>
+          <a:fillRef idx="3">
+            <a:schemeClr val="accent1"/>
+          </a:fillRef>
+          <a:effectRef idx="2">
+            <a:schemeClr val="accent1"/>
+          </a:effectRef>
+          <a:fontRef idx="minor">
+            <a:schemeClr val="lt1"/>
+          </a:fontRef>
+        </p:style>
+        <p:txBody>
+          <a:bodyPr rtlCol="0" anchor="ctr"/>
+          <a:lstStyle/>
+          <a:p>
+            <a:pPr algn="ctr"/>
+          </a:p>
+        </p:txBody>
+      </p:sp>
+      <p:sp>
+        <p:nvSpPr>
+          <p:cNvPr id="5" name="ic"/>
+          <p:cNvSpPr/>
+          <p:nvPr/>
+        </p:nvSpPr>
+        <p:spPr>
+          <a:xfrm>
+            <a:off x="10374782" y="2440277"/>
+            <a:ext cx="98755" cy="362102"/>
+          </a:xfrm>
+          <a:prstGeom prst="rect">
+            <a:avLst/>
+          </a:prstGeom>
+          <a:solidFill>
+            <a:srgbClr val="F85149"/>
+          </a:solidFill>
+          <a:ln>
+            <a:noFill/>
+          </a:ln>
+          <a:effectLst/>
+        </p:spPr>
+        <p:style>
+          <a:lnRef idx="1">
+            <a:schemeClr val="accent1"/>
+          </a:lnRef>
+          <a:fillRef idx="3">
+            <a:schemeClr val="accent1"/>
+          </a:fillRef>
+          <a:effectRef idx="2">
+            <a:schemeClr val="accent1"/>
+          </a:effectRef>
+          <a:fontRef idx="minor">
+            <a:schemeClr val="lt1"/>
+          </a:fontRef>
+        </p:style>
+        <p:txBody>
+          <a:bodyPr rtlCol="0" anchor="ctr"/>
+          <a:lstStyle/>
+          <a:p>
+            <a:pPr algn="ctr"/>
+          </a:p>
+        </p:txBody>
+      </p:sp>
+      <p:sp>
+        <p:nvSpPr>
+          <p:cNvPr id="6" name="ic"/>
+          <p:cNvSpPr/>
+          <p:nvPr/>
+        </p:nvSpPr>
+        <p:spPr>
+          <a:xfrm>
+            <a:off x="10094976" y="2623962"/>
+            <a:ext cx="658368" cy="98755"/>
+          </a:xfrm>
+          <a:prstGeom prst="roundRect">
+            <a:avLst/>
+          </a:prstGeom>
+          <a:solidFill>
+            <a:srgbClr val="F85149"/>
+          </a:solidFill>
+          <a:ln>
+            <a:noFill/>
+          </a:ln>
+          <a:effectLst/>
+        </p:spPr>
+        <p:style>
+          <a:lnRef idx="1">
+            <a:schemeClr val="accent1"/>
+          </a:lnRef>
+          <a:fillRef idx="3">
+            <a:schemeClr val="accent1"/>
+          </a:fillRef>
+          <a:effectRef idx="2">
+            <a:schemeClr val="accent1"/>
+          </a:effectRef>
+          <a:fontRef idx="minor">
+            <a:schemeClr val="lt1"/>
+          </a:fontRef>
+        </p:style>
+        <p:txBody>
+          <a:bodyPr rtlCol="0" anchor="ctr"/>
+          <a:lstStyle/>
+          <a:p>
+            <a:pPr algn="ctr"/>
+          </a:p>
+        </p:txBody>
+      </p:sp>
+      <p:sp>
+        <p:nvSpPr>
+          <p:cNvPr id="7" name="kick"/>
           <p:cNvSpPr txBox="1"/>
           <p:nvPr/>
         </p:nvSpPr>
         <p:spPr>
           <a:xfrm>
-            <a:off x="640080" y="411480"/>
-            <a:ext cx="10881360" cy="457200"/>
+            <a:off x="685800" y="457200"/>
+            <a:ext cx="10789920" cy="457200"/>
           </a:xfrm>
           <a:prstGeom prst="rect">
             <a:avLst/>
@@ -5107,25 +5462,25 @@
             <a:r>
               <a:rPr sz="1300" b="1">
                 <a:solidFill>
-                  <a:srgbClr val="D29922"/>
+                  <a:srgbClr val="F85149"/>
                 </a:solidFill>
                 <a:latin typeface="Segoe UI"/>
               </a:rPr>
-              <a:t>MÉTODO</a:t>
-            </a:r>
-          </a:p>
-        </p:txBody>
-      </p:sp>
-      <p:sp>
-        <p:nvSpPr>
-          <p:cNvPr id="5" name="title"/>
+              <a:t>LO QUE SALIÓ MAL, Y CÓMO SE RESOLVIÓ</a:t>
+            </a:r>
+          </a:p>
+        </p:txBody>
+      </p:sp>
+      <p:sp>
+        <p:nvSpPr>
+          <p:cNvPr id="8" name="title"/>
           <p:cNvSpPr txBox="1"/>
           <p:nvPr/>
         </p:nvSpPr>
         <p:spPr>
           <a:xfrm>
-            <a:off x="640080" y="960120"/>
-            <a:ext cx="10881360" cy="1463040"/>
+            <a:off x="685800" y="932688"/>
+            <a:ext cx="10789920" cy="1554480"/>
           </a:xfrm>
           <a:prstGeom prst="rect">
             <a:avLst/>
@@ -5144,320 +5499,27 @@
               </a:spcAft>
             </a:pPr>
             <a:r>
-              <a:rPr sz="3600" b="1">
+              <a:rPr sz="3000" b="1">
                 <a:solidFill>
                   <a:srgbClr val="E6EDF3"/>
                 </a:solidFill>
                 <a:latin typeface="Segoe UI"/>
               </a:rPr>
-              <a:t>Tres técnicas retiradas — con evidencia</a:t>
-            </a:r>
-          </a:p>
-        </p:txBody>
-      </p:sp>
-      <p:sp>
-        <p:nvSpPr>
-          <p:cNvPr id="6" name="cardA"/>
-          <p:cNvSpPr/>
-          <p:nvPr/>
-        </p:nvSpPr>
-        <p:spPr>
-          <a:xfrm>
-            <a:off x="640080" y="2286000"/>
-            <a:ext cx="3566160" cy="2651760"/>
-          </a:xfrm>
-          <a:prstGeom prst="roundRect">
-            <a:avLst/>
-          </a:prstGeom>
-          <a:solidFill>
-            <a:srgbClr val="161B22"/>
-          </a:solidFill>
-          <a:ln w="15875">
-            <a:solidFill>
-              <a:srgbClr val="F85149"/>
-            </a:solidFill>
-          </a:ln>
-          <a:effectLst/>
-        </p:spPr>
-        <p:style>
-          <a:lnRef idx="1">
-            <a:schemeClr val="accent1"/>
-          </a:lnRef>
-          <a:fillRef idx="3">
-            <a:schemeClr val="accent1"/>
-          </a:fillRef>
-          <a:effectRef idx="2">
-            <a:schemeClr val="accent1"/>
-          </a:effectRef>
-          <a:fontRef idx="minor">
-            <a:schemeClr val="lt1"/>
-          </a:fontRef>
-        </p:style>
-        <p:txBody>
-          <a:bodyPr rtlCol="0" anchor="ctr" wrap="square" lIns="201168" rIns="201168" tIns="146304"/>
-          <a:lstStyle/>
-          <a:p>
-            <a:pPr algn="l"/>
-            <a:r>
-              <a:rPr sz="1700" b="1">
-                <a:solidFill>
-                  <a:srgbClr val="F85149"/>
-                </a:solidFill>
-                <a:latin typeface="Segoe UI"/>
-              </a:rPr>
-              <a:t>NLMS</a:t>
-            </a:r>
-          </a:p>
-          <a:p>
-            <a:pPr algn="l">
-              <a:spcBef>
-                <a:spcPts val="400"/>
-              </a:spcBef>
-            </a:pPr>
-            <a:r>
-              <a:rPr sz="1300">
-                <a:solidFill>
-                  <a:srgbClr val="E6EDF3"/>
-                </a:solidFill>
-                <a:latin typeface="Segoe UI"/>
-              </a:rPr>
-              <a:t>El filtro cubría 16 ms de historia.</a:t>
-            </a:r>
-          </a:p>
-          <a:p>
-            <a:pPr algn="l">
-              <a:spcBef>
-                <a:spcPts val="400"/>
-              </a:spcBef>
-            </a:pPr>
-            <a:r>
-              <a:rPr sz="1300">
-                <a:solidFill>
-                  <a:srgbClr val="E6EDF3"/>
-                </a:solidFill>
-                <a:latin typeface="Segoe UI"/>
-              </a:rPr>
-              <a:t>El retardo real: 300–600 ms, variable.</a:t>
-            </a:r>
-          </a:p>
-          <a:p>
-            <a:pPr algn="l">
-              <a:spcBef>
-                <a:spcPts val="400"/>
-              </a:spcBef>
-            </a:pPr>
-            <a:r>
-              <a:rPr sz="1300">
-                <a:solidFill>
-                  <a:srgbClr val="E6EDF3"/>
-                </a:solidFill>
-                <a:latin typeface="Segoe UI"/>
-              </a:rPr>
-              <a:t>No cancelaba; ensuciaba la voz.</a:t>
-            </a:r>
-          </a:p>
-        </p:txBody>
-      </p:sp>
-      <p:sp>
-        <p:nvSpPr>
-          <p:cNvPr id="7" name="cardB"/>
-          <p:cNvSpPr/>
-          <p:nvPr/>
-        </p:nvSpPr>
-        <p:spPr>
-          <a:xfrm>
-            <a:off x="4343400" y="2286000"/>
-            <a:ext cx="3566160" cy="2651760"/>
-          </a:xfrm>
-          <a:prstGeom prst="roundRect">
-            <a:avLst/>
-          </a:prstGeom>
-          <a:solidFill>
-            <a:srgbClr val="161B22"/>
-          </a:solidFill>
-          <a:ln w="15875">
-            <a:solidFill>
-              <a:srgbClr val="F85149"/>
-            </a:solidFill>
-          </a:ln>
-          <a:effectLst/>
-        </p:spPr>
-        <p:style>
-          <a:lnRef idx="1">
-            <a:schemeClr val="accent1"/>
-          </a:lnRef>
-          <a:fillRef idx="3">
-            <a:schemeClr val="accent1"/>
-          </a:fillRef>
-          <a:effectRef idx="2">
-            <a:schemeClr val="accent1"/>
-          </a:effectRef>
-          <a:fontRef idx="minor">
-            <a:schemeClr val="lt1"/>
-          </a:fontRef>
-        </p:style>
-        <p:txBody>
-          <a:bodyPr rtlCol="0" anchor="ctr" wrap="square" lIns="201168" rIns="201168" tIns="146304"/>
-          <a:lstStyle/>
-          <a:p>
-            <a:pPr algn="l"/>
-            <a:r>
-              <a:rPr sz="1700" b="1">
-                <a:solidFill>
-                  <a:srgbClr val="F85149"/>
-                </a:solidFill>
-                <a:latin typeface="Segoe UI"/>
-              </a:rPr>
-              <a:t>ARQ</a:t>
-            </a:r>
-          </a:p>
-          <a:p>
-            <a:pPr algn="l">
-              <a:spcBef>
-                <a:spcPts val="400"/>
-              </a:spcBef>
-            </a:pPr>
-            <a:r>
-              <a:rPr sz="1300">
-                <a:solidFill>
-                  <a:srgbClr val="E6EDF3"/>
-                </a:solidFill>
-                <a:latin typeface="Segoe UI"/>
-              </a:rPr>
-              <a:t>Reenviar sobre canal saturado</a:t>
-            </a:r>
-          </a:p>
-          <a:p>
-            <a:pPr algn="l">
-              <a:spcBef>
-                <a:spcPts val="400"/>
-              </a:spcBef>
-            </a:pPr>
-            <a:r>
-              <a:rPr sz="1300">
-                <a:solidFill>
-                  <a:srgbClr val="E6EDF3"/>
-                </a:solidFill>
-                <a:latin typeface="Segoe UI"/>
-              </a:rPr>
-              <a:t>= espiral de congestión.</a:t>
-            </a:r>
-          </a:p>
-          <a:p>
-            <a:pPr algn="l">
-              <a:spcBef>
-                <a:spcPts val="400"/>
-              </a:spcBef>
-            </a:pPr>
-            <a:r>
-              <a:rPr sz="1300">
-                <a:solidFill>
-                  <a:srgbClr val="E6EDF3"/>
-                </a:solidFill>
-                <a:latin typeface="Segoe UI"/>
-              </a:rPr>
-              <a:t>La voz en vivo usa FEC + PLC. Nosotros también, ahora.</a:t>
-            </a:r>
-          </a:p>
-        </p:txBody>
-      </p:sp>
-      <p:sp>
-        <p:nvSpPr>
-          <p:cNvPr id="8" name="cardC"/>
-          <p:cNvSpPr/>
-          <p:nvPr/>
-        </p:nvSpPr>
-        <p:spPr>
-          <a:xfrm>
-            <a:off x="8046720" y="2286000"/>
-            <a:ext cx="3566160" cy="2651760"/>
-          </a:xfrm>
-          <a:prstGeom prst="roundRect">
-            <a:avLst/>
-          </a:prstGeom>
-          <a:solidFill>
-            <a:srgbClr val="161B22"/>
-          </a:solidFill>
-          <a:ln w="15875">
-            <a:solidFill>
-              <a:srgbClr val="F85149"/>
-            </a:solidFill>
-          </a:ln>
-          <a:effectLst/>
-        </p:spPr>
-        <p:style>
-          <a:lnRef idx="1">
-            <a:schemeClr val="accent1"/>
-          </a:lnRef>
-          <a:fillRef idx="3">
-            <a:schemeClr val="accent1"/>
-          </a:fillRef>
-          <a:effectRef idx="2">
-            <a:schemeClr val="accent1"/>
-          </a:effectRef>
-          <a:fontRef idx="minor">
-            <a:schemeClr val="lt1"/>
-          </a:fontRef>
-        </p:style>
-        <p:txBody>
-          <a:bodyPr rtlCol="0" anchor="ctr" wrap="square" lIns="201168" rIns="201168" tIns="146304"/>
-          <a:lstStyle/>
-          <a:p>
-            <a:pPr algn="l"/>
-            <a:r>
-              <a:rPr sz="1700" b="1">
-                <a:solidFill>
-                  <a:srgbClr val="F85149"/>
-                </a:solidFill>
-                <a:latin typeface="Segoe UI"/>
-              </a:rPr>
-              <a:t>Gate semi-dúplex</a:t>
-            </a:r>
-          </a:p>
-          <a:p>
-            <a:pPr algn="l">
-              <a:spcBef>
-                <a:spcPts val="400"/>
-              </a:spcBef>
-            </a:pPr>
-            <a:r>
-              <a:rPr sz="1300">
-                <a:solidFill>
-                  <a:srgbClr val="E6EDF3"/>
-                </a:solidFill>
-                <a:latin typeface="Segoe UI"/>
-              </a:rPr>
-              <a:t>Mataba el eco… y sus transiciones fabricaban uno nuevo.</a:t>
-            </a:r>
-          </a:p>
-          <a:p>
-            <a:pPr algn="l">
-              <a:spcBef>
-                <a:spcPts val="400"/>
-              </a:spcBef>
-            </a:pPr>
-            <a:r>
-              <a:rPr sz="1300">
-                <a:solidFill>
-                  <a:srgbClr val="E6EDF3"/>
-                </a:solidFill>
-                <a:latin typeface="Segoe UI"/>
-              </a:rPr>
-              <a:t>Retirado al llegar el AEC de hardware.</a:t>
-            </a:r>
-          </a:p>
-        </p:txBody>
-      </p:sp>
-      <p:sp>
-        <p:nvSpPr>
-          <p:cNvPr id="9" name="body"/>
+              <a:t>Se enviaba silencio todo el tiempo</a:t>
+            </a:r>
+          </a:p>
+        </p:txBody>
+      </p:sp>
+      <p:sp>
+        <p:nvSpPr>
+          <p:cNvPr id="9" name="tx"/>
           <p:cNvSpPr txBox="1"/>
           <p:nvPr/>
         </p:nvSpPr>
         <p:spPr>
           <a:xfrm>
-            <a:off x="640080" y="5212080"/>
-            <a:ext cx="10881360" cy="731520"/>
+            <a:off x="685800" y="2423160"/>
+            <a:ext cx="9418320" cy="3291840"/>
           </a:xfrm>
           <a:prstGeom prst="rect">
             <a:avLst/>
@@ -5469,6 +5531,38 @@
             <a:spAutoFit/>
           </a:bodyPr>
           <a:lstStyle/>
+          <a:p>
+            <a:pPr algn="l">
+              <a:spcAft>
+                <a:spcPts val="1000"/>
+              </a:spcAft>
+            </a:pPr>
+            <a:r>
+              <a:rPr sz="1800" b="1">
+                <a:solidFill>
+                  <a:srgbClr val="E6EDF3"/>
+                </a:solidFill>
+                <a:latin typeface="Segoe UI"/>
+              </a:rPr>
+              <a:t>Qué pasaba:  el canal se saturaba aunque nadie estuviera hablando.</a:t>
+            </a:r>
+          </a:p>
+          <a:p>
+            <a:pPr algn="l">
+              <a:spcAft>
+                <a:spcPts val="1000"/>
+              </a:spcAft>
+            </a:pPr>
+            <a:r>
+              <a:rPr sz="1800" b="0">
+                <a:solidFill>
+                  <a:srgbClr val="E6EDF3"/>
+                </a:solidFill>
+                <a:latin typeface="Segoe UI"/>
+              </a:rPr>
+              <a:t>Por qué:  sin el detector de voz, el micrófono mandaba datos las 24 horas. Y encima, pedir de nuevo los paquetes perdidos saturaba todavía más un canal ya lleno.</a:t>
+            </a:r>
+          </a:p>
           <a:p>
             <a:pPr algn="l">
               <a:spcAft>
@@ -5476,52 +5570,13 @@
               </a:spcAft>
             </a:pPr>
             <a:r>
-              <a:rPr sz="1900" b="1">
-                <a:solidFill>
-                  <a:srgbClr val="D29922"/>
+              <a:rPr sz="1800" b="0">
+                <a:solidFill>
+                  <a:srgbClr val="3FB950"/>
                 </a:solidFill>
                 <a:latin typeface="Segoe UI"/>
               </a:rPr>
-              <a:t>Saber quitar, con mediciones de campo, vale tanto como saber poner.</a:t>
-            </a:r>
-          </a:p>
-        </p:txBody>
-      </p:sp>
-      <p:sp>
-        <p:nvSpPr>
-          <p:cNvPr id="10" name="foot"/>
-          <p:cNvSpPr txBox="1"/>
-          <p:nvPr/>
-        </p:nvSpPr>
-        <p:spPr>
-          <a:xfrm>
-            <a:off x="640080" y="6419088"/>
-            <a:ext cx="10881360" cy="365760"/>
-          </a:xfrm>
-          <a:prstGeom prst="rect">
-            <a:avLst/>
-          </a:prstGeom>
-          <a:noFill/>
-        </p:spPr>
-        <p:txBody>
-          <a:bodyPr wrap="square" anchor="t">
-            <a:spAutoFit/>
-          </a:bodyPr>
-          <a:lstStyle/>
-          <a:p>
-            <a:pPr algn="l">
-              <a:spcAft>
-                <a:spcPts val="600"/>
-              </a:spcAft>
-            </a:pPr>
-            <a:r>
-              <a:rPr sz="1000" b="0">
-                <a:solidFill>
-                  <a:srgbClr val="8B949E"/>
-                </a:solidFill>
-                <a:latin typeface="Segoe UI"/>
-              </a:rPr>
-              <a:t>DSP · BT Analyzer  —  Teoría de la Información y Sistemas de Comunicación · UNAL</a:t>
+              <a:t>Cómo se resolvió:  no enviar el silencio, quitar esos reenvíos, y comprimir los datos 4 veces más (8 kHz + μ-law).</a:t>
             </a:r>
           </a:p>
         </p:txBody>
@@ -5602,22 +5657,102 @@
       </p:sp>
       <p:sp>
         <p:nvSpPr>
-          <p:cNvPr id="3" name="orb"/>
+          <p:cNvPr id="3" name="kick"/>
+          <p:cNvSpPr txBox="1"/>
+          <p:nvPr/>
+        </p:nvSpPr>
+        <p:spPr>
+          <a:xfrm>
+            <a:off x="685800" y="457200"/>
+            <a:ext cx="10789920" cy="457200"/>
+          </a:xfrm>
+          <a:prstGeom prst="rect">
+            <a:avLst/>
+          </a:prstGeom>
+          <a:noFill/>
+        </p:spPr>
+        <p:txBody>
+          <a:bodyPr wrap="square" anchor="t">
+            <a:spAutoFit/>
+          </a:bodyPr>
+          <a:lstStyle/>
+          <a:p>
+            <a:pPr algn="l">
+              <a:spcAft>
+                <a:spcPts val="600"/>
+              </a:spcAft>
+            </a:pPr>
+            <a:r>
+              <a:rPr sz="1300" b="1">
+                <a:solidFill>
+                  <a:srgbClr val="D29922"/>
+                </a:solidFill>
+                <a:latin typeface="Segoe UI"/>
+              </a:rPr>
+              <a:t>DECISIONES CON MEDICIÓN, NO CON INTUICIÓN</a:t>
+            </a:r>
+          </a:p>
+        </p:txBody>
+      </p:sp>
+      <p:sp>
+        <p:nvSpPr>
+          <p:cNvPr id="4" name="title"/>
+          <p:cNvSpPr txBox="1"/>
+          <p:nvPr/>
+        </p:nvSpPr>
+        <p:spPr>
+          <a:xfrm>
+            <a:off x="685800" y="932688"/>
+            <a:ext cx="10789920" cy="1554480"/>
+          </a:xfrm>
+          <a:prstGeom prst="rect">
+            <a:avLst/>
+          </a:prstGeom>
+          <a:noFill/>
+        </p:spPr>
+        <p:txBody>
+          <a:bodyPr wrap="square" anchor="t">
+            <a:spAutoFit/>
+          </a:bodyPr>
+          <a:lstStyle/>
+          <a:p>
+            <a:pPr algn="l">
+              <a:spcAft>
+                <a:spcPts val="600"/>
+              </a:spcAft>
+            </a:pPr>
+            <a:r>
+              <a:rPr sz="3000" b="1">
+                <a:solidFill>
+                  <a:srgbClr val="E6EDF3"/>
+                </a:solidFill>
+                <a:latin typeface="Segoe UI"/>
+              </a:rPr>
+              <a:t>Tres técnicas que quitamos a propósito</a:t>
+            </a:r>
+          </a:p>
+        </p:txBody>
+      </p:sp>
+      <p:sp>
+        <p:nvSpPr>
+          <p:cNvPr id="5" name="card"/>
           <p:cNvSpPr/>
           <p:nvPr/>
         </p:nvSpPr>
         <p:spPr>
           <a:xfrm>
-            <a:off x="8595360" y="3566160"/>
-            <a:ext cx="2926080" cy="2926080"/>
-          </a:xfrm>
-          <a:prstGeom prst="ellipse">
-            <a:avLst/>
-          </a:prstGeom>
-          <a:noFill/>
-          <a:ln w="44450">
+            <a:off x="685800" y="2286000"/>
+            <a:ext cx="3520440" cy="2926080"/>
+          </a:xfrm>
+          <a:prstGeom prst="roundRect">
+            <a:avLst/>
+          </a:prstGeom>
+          <a:solidFill>
+            <a:srgbClr val="161B22"/>
+          </a:solidFill>
+          <a:ln w="15875">
             <a:solidFill>
-              <a:srgbClr val="3FB950"/>
+              <a:srgbClr val="F85149"/>
             </a:solidFill>
           </a:ln>
           <a:effectLst/>
@@ -5637,23 +5772,238 @@
           </a:fontRef>
         </p:style>
         <p:txBody>
-          <a:bodyPr rtlCol="0" anchor="ctr"/>
+          <a:bodyPr rtlCol="0" anchor="ctr" wrap="square" lIns="182880" rIns="182880" tIns="146304"/>
           <a:lstStyle/>
           <a:p>
             <a:pPr algn="ctr"/>
-          </a:p>
-        </p:txBody>
-      </p:sp>
-      <p:sp>
-        <p:nvSpPr>
-          <p:cNvPr id="4" name="kicker"/>
+            <a:r>
+              <a:rPr sz="1600" b="1">
+                <a:solidFill>
+                  <a:srgbClr val="F85149"/>
+                </a:solidFill>
+                <a:latin typeface="Segoe UI"/>
+              </a:rPr>
+              <a:t>Cancelar eco con un filtro que aprende</a:t>
+            </a:r>
+          </a:p>
+          <a:p>
+            <a:pPr>
+              <a:spcBef>
+                <a:spcPts val="400"/>
+              </a:spcBef>
+            </a:pPr>
+            <a:r>
+              <a:rPr sz="1250">
+                <a:solidFill>
+                  <a:srgbClr val="E6EDF3"/>
+                </a:solidFill>
+                <a:latin typeface="Segoe UI"/>
+              </a:rPr>
+              <a:t>Un filtro que se ajusta solo para restar el eco (NLMS).</a:t>
+            </a:r>
+          </a:p>
+          <a:p>
+            <a:pPr>
+              <a:spcBef>
+                <a:spcPts val="400"/>
+              </a:spcBef>
+            </a:pPr>
+            <a:r>
+              <a:rPr sz="1250">
+                <a:solidFill>
+                  <a:srgbClr val="E6EDF3"/>
+                </a:solidFill>
+                <a:latin typeface="Segoe UI"/>
+              </a:rPr>
+              <a:t>No lograba saber cuándo exactamente había sonado cada cosa. No cancelaba; ensuciaba la voz.</a:t>
+            </a:r>
+          </a:p>
+        </p:txBody>
+      </p:sp>
+      <p:sp>
+        <p:nvSpPr>
+          <p:cNvPr id="6" name="card"/>
+          <p:cNvSpPr/>
+          <p:nvPr/>
+        </p:nvSpPr>
+        <p:spPr>
+          <a:xfrm>
+            <a:off x="4343400" y="2286000"/>
+            <a:ext cx="3520440" cy="2926080"/>
+          </a:xfrm>
+          <a:prstGeom prst="roundRect">
+            <a:avLst/>
+          </a:prstGeom>
+          <a:solidFill>
+            <a:srgbClr val="161B22"/>
+          </a:solidFill>
+          <a:ln w="15875">
+            <a:solidFill>
+              <a:srgbClr val="F85149"/>
+            </a:solidFill>
+          </a:ln>
+          <a:effectLst/>
+        </p:spPr>
+        <p:style>
+          <a:lnRef idx="1">
+            <a:schemeClr val="accent1"/>
+          </a:lnRef>
+          <a:fillRef idx="3">
+            <a:schemeClr val="accent1"/>
+          </a:fillRef>
+          <a:effectRef idx="2">
+            <a:schemeClr val="accent1"/>
+          </a:effectRef>
+          <a:fontRef idx="minor">
+            <a:schemeClr val="lt1"/>
+          </a:fontRef>
+        </p:style>
+        <p:txBody>
+          <a:bodyPr rtlCol="0" anchor="ctr" wrap="square" lIns="182880" rIns="182880" tIns="146304"/>
+          <a:lstStyle/>
+          <a:p>
+            <a:pPr algn="ctr"/>
+            <a:r>
+              <a:rPr sz="1600" b="1">
+                <a:solidFill>
+                  <a:srgbClr val="F85149"/>
+                </a:solidFill>
+                <a:latin typeface="Segoe UI"/>
+              </a:rPr>
+              <a:t>Pedir reenvíos</a:t>
+            </a:r>
+          </a:p>
+          <a:p>
+            <a:pPr>
+              <a:spcBef>
+                <a:spcPts val="400"/>
+              </a:spcBef>
+            </a:pPr>
+            <a:r>
+              <a:rPr sz="1250">
+                <a:solidFill>
+                  <a:srgbClr val="E6EDF3"/>
+                </a:solidFill>
+                <a:latin typeface="Segoe UI"/>
+              </a:rPr>
+              <a:t>Si se pierde un paquete, pedir que lo manden otra vez (ARQ).</a:t>
+            </a:r>
+          </a:p>
+          <a:p>
+            <a:pPr>
+              <a:spcBef>
+                <a:spcPts val="400"/>
+              </a:spcBef>
+            </a:pPr>
+            <a:r>
+              <a:rPr sz="1250">
+                <a:solidFill>
+                  <a:srgbClr val="E6EDF3"/>
+                </a:solidFill>
+                <a:latin typeface="Segoe UI"/>
+              </a:rPr>
+              <a:t>En un canal ya lleno, cada reenvío lo llenaba más: peor, no mejor.</a:t>
+            </a:r>
+          </a:p>
+        </p:txBody>
+      </p:sp>
+      <p:sp>
+        <p:nvSpPr>
+          <p:cNvPr id="7" name="card"/>
+          <p:cNvSpPr/>
+          <p:nvPr/>
+        </p:nvSpPr>
+        <p:spPr>
+          <a:xfrm>
+            <a:off x="8001000" y="2286000"/>
+            <a:ext cx="3520440" cy="2926080"/>
+          </a:xfrm>
+          <a:prstGeom prst="roundRect">
+            <a:avLst/>
+          </a:prstGeom>
+          <a:solidFill>
+            <a:srgbClr val="161B22"/>
+          </a:solidFill>
+          <a:ln w="15875">
+            <a:solidFill>
+              <a:srgbClr val="F85149"/>
+            </a:solidFill>
+          </a:ln>
+          <a:effectLst/>
+        </p:spPr>
+        <p:style>
+          <a:lnRef idx="1">
+            <a:schemeClr val="accent1"/>
+          </a:lnRef>
+          <a:fillRef idx="3">
+            <a:schemeClr val="accent1"/>
+          </a:fillRef>
+          <a:effectRef idx="2">
+            <a:schemeClr val="accent1"/>
+          </a:effectRef>
+          <a:fontRef idx="minor">
+            <a:schemeClr val="lt1"/>
+          </a:fontRef>
+        </p:style>
+        <p:txBody>
+          <a:bodyPr rtlCol="0" anchor="ctr" wrap="square" lIns="182880" rIns="182880" tIns="146304"/>
+          <a:lstStyle/>
+          <a:p>
+            <a:pPr algn="ctr"/>
+            <a:r>
+              <a:rPr sz="1600" b="1">
+                <a:solidFill>
+                  <a:srgbClr val="F85149"/>
+                </a:solidFill>
+                <a:latin typeface="Segoe UI"/>
+              </a:rPr>
+              <a:t>Cerrar el micrófono por turnos</a:t>
+            </a:r>
+          </a:p>
+          <a:p>
+            <a:pPr>
+              <a:spcBef>
+                <a:spcPts val="400"/>
+              </a:spcBef>
+            </a:pPr>
+            <a:r>
+              <a:rPr sz="1250">
+                <a:solidFill>
+                  <a:srgbClr val="E6EDF3"/>
+                </a:solidFill>
+                <a:latin typeface="Segoe UI"/>
+              </a:rPr>
+              <a:t>Silenciar el micrófono mientras suena el parlante propio, como un walkie-talkie.</a:t>
+            </a:r>
+          </a:p>
+          <a:p>
+            <a:pPr>
+              <a:spcBef>
+                <a:spcPts val="400"/>
+              </a:spcBef>
+            </a:pPr>
+            <a:r>
+              <a:rPr sz="1250">
+                <a:solidFill>
+                  <a:srgbClr val="E6EDF3"/>
+                </a:solidFill>
+                <a:latin typeface="Segoe UI"/>
+              </a:rPr>
+              <a:t>Funcionaba, pero cortaba pedazos de voz al abrir y cerrar.</a:t>
+            </a:r>
+          </a:p>
+        </p:txBody>
+      </p:sp>
+      <p:sp>
+        <p:nvSpPr>
+          <p:cNvPr id="8" name="tx"/>
           <p:cNvSpPr txBox="1"/>
           <p:nvPr/>
         </p:nvSpPr>
         <p:spPr>
           <a:xfrm>
-            <a:off x="640080" y="411480"/>
-            <a:ext cx="10881360" cy="457200"/>
+            <a:off x="685800" y="5394960"/>
+            <a:ext cx="10789920" cy="640080"/>
           </a:xfrm>
           <a:prstGeom prst="rect">
             <a:avLst/>
@@ -5672,201 +6022,13 @@
               </a:spcAft>
             </a:pPr>
             <a:r>
-              <a:rPr sz="1300" b="1">
-                <a:solidFill>
-                  <a:srgbClr val="58A6FF"/>
+              <a:rPr sz="1800" b="1">
+                <a:solidFill>
+                  <a:srgbClr val="D29922"/>
                 </a:solidFill>
                 <a:latin typeface="Segoe UI"/>
               </a:rPr>
-              <a:t>EL JEFE FINAL: EL ECO</a:t>
-            </a:r>
-          </a:p>
-        </p:txBody>
-      </p:sp>
-      <p:sp>
-        <p:nvSpPr>
-          <p:cNvPr id="5" name="title"/>
-          <p:cNvSpPr txBox="1"/>
-          <p:nvPr/>
-        </p:nvSpPr>
-        <p:spPr>
-          <a:xfrm>
-            <a:off x="640080" y="914400"/>
-            <a:ext cx="10881360" cy="1463040"/>
-          </a:xfrm>
-          <a:prstGeom prst="rect">
-            <a:avLst/>
-          </a:prstGeom>
-          <a:noFill/>
-        </p:spPr>
-        <p:txBody>
-          <a:bodyPr wrap="square" anchor="t">
-            <a:spAutoFit/>
-          </a:bodyPr>
-          <a:lstStyle/>
-          <a:p>
-            <a:pPr algn="l">
-              <a:spcAft>
-                <a:spcPts val="600"/>
-              </a:spcAft>
-            </a:pPr>
-            <a:r>
-              <a:rPr sz="4000" b="1">
-                <a:solidFill>
-                  <a:srgbClr val="E6EDF3"/>
-                </a:solidFill>
-                <a:latin typeface="Segoe UI"/>
-              </a:rPr>
-              <a:t>¿Cómo lo hace WhatsApp?</a:t>
-            </a:r>
-          </a:p>
-        </p:txBody>
-      </p:sp>
-      <p:sp>
-        <p:nvSpPr>
-          <p:cNvPr id="6" name="body"/>
-          <p:cNvSpPr txBox="1"/>
-          <p:nvPr/>
-        </p:nvSpPr>
-        <p:spPr>
-          <a:xfrm>
-            <a:off x="640080" y="2286000"/>
-            <a:ext cx="7589520" cy="2926080"/>
-          </a:xfrm>
-          <a:prstGeom prst="rect">
-            <a:avLst/>
-          </a:prstGeom>
-          <a:noFill/>
-        </p:spPr>
-        <p:txBody>
-          <a:bodyPr wrap="square" anchor="t">
-            <a:spAutoFit/>
-          </a:bodyPr>
-          <a:lstStyle/>
-          <a:p>
-            <a:pPr algn="l">
-              <a:spcAft>
-                <a:spcPts val="600"/>
-              </a:spcAft>
-            </a:pPr>
-            <a:r>
-              <a:rPr sz="1900" b="0">
-                <a:solidFill>
-                  <a:srgbClr val="E6EDF3"/>
-                </a:solidFill>
-                <a:latin typeface="Segoe UI"/>
-              </a:rPr>
-              <a:t>El cancelador de eco real no vive en la app: vive dentro del chip de audio, donde parlante y micrófono están alineados muestra a muestra.</a:t>
-            </a:r>
-          </a:p>
-          <a:p>
-            <a:pPr algn="l">
-              <a:spcAft>
-                <a:spcPts val="600"/>
-              </a:spcAft>
-            </a:pPr>
-            <a:r>
-              <a:rPr sz="1900" b="0">
-                <a:solidFill>
-                  <a:srgbClr val="E6EDF3"/>
-                </a:solidFill>
-                <a:latin typeface="Segoe UI"/>
-              </a:rPr>
-              <a:t>Nosotros usábamos el camino de audio de la MÚSICA. Ahí ese cancelador no existe.</a:t>
-            </a:r>
-          </a:p>
-          <a:p>
-            <a:pPr algn="l">
-              <a:spcAft>
-                <a:spcPts val="600"/>
-              </a:spcAft>
-            </a:pPr>
-            <a:r>
-              <a:rPr sz="1900" b="1">
-                <a:solidFill>
-                  <a:srgbClr val="3FB950"/>
-                </a:solidFill>
-                <a:latin typeface="Segoe UI"/>
-              </a:rPr>
-              <a:t>Migramos al camino de comunicación de Android (VOICE_COMMUNICATION): eco muerto, conversación full-dúplex.</a:t>
-            </a:r>
-          </a:p>
-        </p:txBody>
-      </p:sp>
-      <p:sp>
-        <p:nvSpPr>
-          <p:cNvPr id="7" name="accent"/>
-          <p:cNvSpPr txBox="1"/>
-          <p:nvPr/>
-        </p:nvSpPr>
-        <p:spPr>
-          <a:xfrm>
-            <a:off x="640080" y="5303520"/>
-            <a:ext cx="10881360" cy="731520"/>
-          </a:xfrm>
-          <a:prstGeom prst="rect">
-            <a:avLst/>
-          </a:prstGeom>
-          <a:noFill/>
-        </p:spPr>
-        <p:txBody>
-          <a:bodyPr wrap="square" anchor="t">
-            <a:spAutoFit/>
-          </a:bodyPr>
-          <a:lstStyle/>
-          <a:p>
-            <a:pPr algn="l">
-              <a:spcAft>
-                <a:spcPts val="600"/>
-              </a:spcAft>
-            </a:pPr>
-            <a:r>
-              <a:rPr sz="1800" b="1">
-                <a:solidFill>
-                  <a:srgbClr val="58A6FF"/>
-                </a:solidFill>
-                <a:latin typeface="Segoe UI"/>
-              </a:rPr>
-              <a:t>Un algoritmo adaptativo solo puede compensar lo que puede observar.</a:t>
-            </a:r>
-          </a:p>
-        </p:txBody>
-      </p:sp>
-      <p:sp>
-        <p:nvSpPr>
-          <p:cNvPr id="8" name="foot"/>
-          <p:cNvSpPr txBox="1"/>
-          <p:nvPr/>
-        </p:nvSpPr>
-        <p:spPr>
-          <a:xfrm>
-            <a:off x="640080" y="6419088"/>
-            <a:ext cx="10881360" cy="365760"/>
-          </a:xfrm>
-          <a:prstGeom prst="rect">
-            <a:avLst/>
-          </a:prstGeom>
-          <a:noFill/>
-        </p:spPr>
-        <p:txBody>
-          <a:bodyPr wrap="square" anchor="t">
-            <a:spAutoFit/>
-          </a:bodyPr>
-          <a:lstStyle/>
-          <a:p>
-            <a:pPr algn="l">
-              <a:spcAft>
-                <a:spcPts val="600"/>
-              </a:spcAft>
-            </a:pPr>
-            <a:r>
-              <a:rPr sz="1000" b="0">
-                <a:solidFill>
-                  <a:srgbClr val="8B949E"/>
-                </a:solidFill>
-                <a:latin typeface="Segoe UI"/>
-              </a:rPr>
-              <a:t>DSP · BT Analyzer  —  Teoría de la Información y Sistemas de Comunicación · UNAL</a:t>
+              <a:t>Quitar algo con evidencia de campo también es un resultado.</a:t>
             </a:r>
           </a:p>
         </p:txBody>
@@ -5947,23 +6109,23 @@
       </p:sp>
       <p:sp>
         <p:nvSpPr>
-          <p:cNvPr id="3" name="orb"/>
+          <p:cNvPr id="3" name="ic"/>
           <p:cNvSpPr/>
           <p:nvPr/>
         </p:nvSpPr>
         <p:spPr>
           <a:xfrm>
-            <a:off x="-1280160" y="-1463040"/>
-            <a:ext cx="4572000" cy="4572000"/>
-          </a:xfrm>
-          <a:prstGeom prst="ellipse">
-            <a:avLst/>
-          </a:prstGeom>
-          <a:noFill/>
-          <a:ln w="44450">
-            <a:solidFill>
-              <a:srgbClr val="3FB950"/>
-            </a:solidFill>
+            <a:off x="9326880" y="1188719"/>
+            <a:ext cx="1828800" cy="1828800"/>
+          </a:xfrm>
+          <a:prstGeom prst="blockArc">
+            <a:avLst/>
+          </a:prstGeom>
+          <a:solidFill>
+            <a:srgbClr val="3FB950"/>
+          </a:solidFill>
+          <a:ln>
+            <a:noFill/>
           </a:ln>
           <a:effectLst/>
         </p:spPr>
@@ -5991,14 +6153,14 @@
       </p:sp>
       <p:sp>
         <p:nvSpPr>
-          <p:cNvPr id="4" name="kicker"/>
+          <p:cNvPr id="4" name="kick"/>
           <p:cNvSpPr txBox="1"/>
           <p:nvPr/>
         </p:nvSpPr>
         <p:spPr>
           <a:xfrm>
-            <a:off x="640080" y="411480"/>
-            <a:ext cx="10881360" cy="457200"/>
+            <a:off x="685800" y="457200"/>
+            <a:ext cx="10789920" cy="457200"/>
           </a:xfrm>
           <a:prstGeom prst="rect">
             <a:avLst/>
@@ -6023,7 +6185,7 @@
                 </a:solidFill>
                 <a:latin typeface="Segoe UI"/>
               </a:rPr>
-              <a:t>EL RECEPTOR</a:t>
+              <a:t>EL PROBLEMA MÁS DIFÍCIL</a:t>
             </a:r>
           </a:p>
         </p:txBody>
@@ -6036,8 +6198,8 @@
         </p:nvSpPr>
         <p:spPr>
           <a:xfrm>
-            <a:off x="640080" y="914400"/>
-            <a:ext cx="10881360" cy="1463040"/>
+            <a:off x="685800" y="932688"/>
+            <a:ext cx="10789920" cy="1554480"/>
           </a:xfrm>
           <a:prstGeom prst="rect">
             <a:avLst/>
@@ -6056,27 +6218,27 @@
               </a:spcAft>
             </a:pPr>
             <a:r>
-              <a:rPr sz="4000" b="1">
+              <a:rPr sz="3000" b="1">
                 <a:solidFill>
                   <a:srgbClr val="E6EDF3"/>
                 </a:solidFill>
                 <a:latin typeface="Segoe UI"/>
               </a:rPr>
-              <a:t>DSP al rescate</a:t>
-            </a:r>
-          </a:p>
-        </p:txBody>
-      </p:sp>
-      <p:sp>
-        <p:nvSpPr>
-          <p:cNvPr id="6" name="body"/>
+              <a:t>¿Cómo quita el eco una llamada de verdad?</a:t>
+            </a:r>
+          </a:p>
+        </p:txBody>
+      </p:sp>
+      <p:sp>
+        <p:nvSpPr>
+          <p:cNvPr id="6" name="tx"/>
           <p:cNvSpPr txBox="1"/>
           <p:nvPr/>
         </p:nvSpPr>
         <p:spPr>
           <a:xfrm>
-            <a:off x="640080" y="2286000"/>
-            <a:ext cx="10607040" cy="3108960"/>
+            <a:off x="685800" y="2468880"/>
+            <a:ext cx="9326880" cy="3108960"/>
           </a:xfrm>
           <a:prstGeom prst="rect">
             <a:avLst/>
@@ -6088,6 +6250,38 @@
             <a:spAutoFit/>
           </a:bodyPr>
           <a:lstStyle/>
+          <a:p>
+            <a:pPr algn="l">
+              <a:spcAft>
+                <a:spcPts val="1200"/>
+              </a:spcAft>
+            </a:pPr>
+            <a:r>
+              <a:rPr sz="1900" b="0">
+                <a:solidFill>
+                  <a:srgbClr val="E6EDF3"/>
+                </a:solidFill>
+                <a:latin typeface="Segoe UI"/>
+              </a:rPr>
+              <a:t>El eco es el micrófono captando lo que suena en el propio parlante, y devolviéndolo con retraso.</a:t>
+            </a:r>
+          </a:p>
+          <a:p>
+            <a:pPr algn="l">
+              <a:spcAft>
+                <a:spcPts val="1200"/>
+              </a:spcAft>
+            </a:pPr>
+            <a:r>
+              <a:rPr sz="1900" b="0">
+                <a:solidFill>
+                  <a:srgbClr val="E6EDF3"/>
+                </a:solidFill>
+                <a:latin typeface="Segoe UI"/>
+              </a:rPr>
+              <a:t>La solución no está en la aplicación: está en el chip de audio del teléfono, que sí sabe exactamente qué sonó y cuándo.</a:t>
+            </a:r>
+          </a:p>
           <a:p>
             <a:pPr algn="l">
               <a:spcAft>
@@ -6097,82 +6291,11 @@
             <a:r>
               <a:rPr sz="1900" b="0">
                 <a:solidFill>
-                  <a:srgbClr val="E6EDF3"/>
+                  <a:srgbClr val="3FB950"/>
                 </a:solidFill>
                 <a:latin typeface="Segoe UI"/>
               </a:rPr>
-              <a:t>PLC — el hueco se rellena repitiendo el último bloque, cada vez 3 dB más bajito: la pérdida se desvanece, no zumba.</a:t>
-            </a:r>
-          </a:p>
-          <a:p>
-            <a:pPr algn="l">
-              <a:spcAft>
-                <a:spcPts val="600"/>
-              </a:spcAft>
-            </a:pPr>
-            <a:r>
-              <a:rPr sz="1900" b="0">
-                <a:solidFill>
-                  <a:srgbClr val="E6EDF3"/>
-                </a:solidFill>
-                <a:latin typeface="Segoe UI"/>
-              </a:rPr>
-              <a:t>Filtros IIR + FIR — recalibrados para 8 kHz (α = 0.85, corte ≈ 2.4 kHz). El α viejo, calculado a 44.1 kHz, cortaba en plena banda de la voz.</a:t>
-            </a:r>
-          </a:p>
-          <a:p>
-            <a:pPr algn="l">
-              <a:spcAft>
-                <a:spcPts val="600"/>
-              </a:spcAft>
-            </a:pPr>
-            <a:r>
-              <a:rPr sz="1900" b="0">
-                <a:solidFill>
-                  <a:srgbClr val="E6EDF3"/>
-                </a:solidFill>
-                <a:latin typeface="Segoe UI"/>
-              </a:rPr>
-              <a:t>Hamming (7,4) — 4 bits de datos, 3 de paridad; el síndrome apunta directo al bit dañado y se corrige sin pedir reenvío.</a:t>
-            </a:r>
-          </a:p>
-        </p:txBody>
-      </p:sp>
-      <p:sp>
-        <p:nvSpPr>
-          <p:cNvPr id="7" name="foot"/>
-          <p:cNvSpPr txBox="1"/>
-          <p:nvPr/>
-        </p:nvSpPr>
-        <p:spPr>
-          <a:xfrm>
-            <a:off x="640080" y="6419088"/>
-            <a:ext cx="10881360" cy="365760"/>
-          </a:xfrm>
-          <a:prstGeom prst="rect">
-            <a:avLst/>
-          </a:prstGeom>
-          <a:noFill/>
-        </p:spPr>
-        <p:txBody>
-          <a:bodyPr wrap="square" anchor="t">
-            <a:spAutoFit/>
-          </a:bodyPr>
-          <a:lstStyle/>
-          <a:p>
-            <a:pPr algn="l">
-              <a:spcAft>
-                <a:spcPts val="600"/>
-              </a:spcAft>
-            </a:pPr>
-            <a:r>
-              <a:rPr sz="1000" b="0">
-                <a:solidFill>
-                  <a:srgbClr val="8B949E"/>
-                </a:solidFill>
-                <a:latin typeface="Segoe UI"/>
-              </a:rPr>
-              <a:t>DSP · BT Analyzer  —  Teoría de la Información y Sistemas de Comunicación · UNAL</a:t>
+              <a:t>Basta usar el modo llamada de Android — el mismo de WhatsApp — para que ese cancelador trabaje para nosotros. El eco desaparece, y se puede hablar sin turnos.</a:t>
             </a:r>
           </a:p>
         </p:txBody>
@@ -6253,22 +6376,49 @@
       </p:sp>
       <p:sp>
         <p:nvSpPr>
-          <p:cNvPr id="3" name="orb"/>
+          <p:cNvPr id="3" name="ic"/>
           <p:cNvSpPr/>
           <p:nvPr/>
         </p:nvSpPr>
         <p:spPr>
           <a:xfrm>
-            <a:off x="9692640" y="548640"/>
-            <a:ext cx="2377440" cy="2377440"/>
-          </a:xfrm>
-          <a:prstGeom prst="ellipse">
-            <a:avLst/>
-          </a:prstGeom>
+            <a:off x="9601200" y="1188719"/>
+            <a:ext cx="1463040" cy="1828801"/>
+          </a:xfrm>
+          <a:custGeom>
+            <a:avLst/>
+            <a:gdLst/>
+            <a:ahLst/>
+            <a:cxnLst/>
+            <a:rect l="l" t="t" r="r" b="b"/>
+            <a:pathLst>
+              <a:path w="1463040" h="1828801">
+                <a:moveTo>
+                  <a:pt x="731520" y="0"/>
+                </a:moveTo>
+                <a:lnTo>
+                  <a:pt x="1463040" y="329184"/>
+                </a:lnTo>
+                <a:lnTo>
+                  <a:pt x="1463040" y="1005841"/>
+                </a:lnTo>
+                <a:lnTo>
+                  <a:pt x="731520" y="1828801"/>
+                </a:lnTo>
+                <a:lnTo>
+                  <a:pt x="0" y="1005841"/>
+                </a:lnTo>
+                <a:lnTo>
+                  <a:pt x="0" y="329184"/>
+                </a:lnTo>
+                <a:close/>
+              </a:path>
+            </a:pathLst>
+          </a:custGeom>
           <a:noFill/>
-          <a:ln w="44450">
+          <a:ln w="57150">
             <a:solidFill>
-              <a:srgbClr val="58A6FF"/>
+              <a:srgbClr val="3FB950"/>
             </a:solidFill>
           </a:ln>
           <a:effectLst/>
@@ -6297,14 +6447,75 @@
       </p:sp>
       <p:sp>
         <p:nvSpPr>
-          <p:cNvPr id="4" name="kicker"/>
+          <p:cNvPr id="4" name="ic"/>
+          <p:cNvSpPr/>
+          <p:nvPr/>
+        </p:nvSpPr>
+        <p:spPr>
+          <a:xfrm>
+            <a:off x="10040112" y="1828799"/>
+            <a:ext cx="614476" cy="603505"/>
+          </a:xfrm>
+          <a:custGeom>
+            <a:avLst/>
+            <a:gdLst/>
+            <a:ahLst/>
+            <a:cxnLst/>
+            <a:rect l="l" t="t" r="r" b="b"/>
+            <a:pathLst>
+              <a:path w="614476" h="603505">
+                <a:moveTo>
+                  <a:pt x="0" y="310897"/>
+                </a:moveTo>
+                <a:lnTo>
+                  <a:pt x="219456" y="603505"/>
+                </a:lnTo>
+                <a:lnTo>
+                  <a:pt x="614476" y="0"/>
+                </a:lnTo>
+              </a:path>
+            </a:pathLst>
+          </a:custGeom>
+          <a:noFill/>
+          <a:ln w="57150">
+            <a:solidFill>
+              <a:srgbClr val="3FB950"/>
+            </a:solidFill>
+          </a:ln>
+          <a:effectLst/>
+        </p:spPr>
+        <p:style>
+          <a:lnRef idx="1">
+            <a:schemeClr val="accent1"/>
+          </a:lnRef>
+          <a:fillRef idx="3">
+            <a:schemeClr val="accent1"/>
+          </a:fillRef>
+          <a:effectRef idx="2">
+            <a:schemeClr val="accent1"/>
+          </a:effectRef>
+          <a:fontRef idx="minor">
+            <a:schemeClr val="lt1"/>
+          </a:fontRef>
+        </p:style>
+        <p:txBody>
+          <a:bodyPr rtlCol="0" anchor="ctr"/>
+          <a:lstStyle/>
+          <a:p>
+            <a:pPr algn="ctr"/>
+          </a:p>
+        </p:txBody>
+      </p:sp>
+      <p:sp>
+        <p:nvSpPr>
+          <p:cNvPr id="5" name="kick"/>
           <p:cNvSpPr txBox="1"/>
           <p:nvPr/>
         </p:nvSpPr>
         <p:spPr>
           <a:xfrm>
-            <a:off x="640080" y="411480"/>
-            <a:ext cx="10881360" cy="457200"/>
+            <a:off x="685800" y="457200"/>
+            <a:ext cx="10789920" cy="457200"/>
           </a:xfrm>
           <a:prstGeom prst="rect">
             <a:avLst/>
@@ -6329,21 +6540,21 @@
                 </a:solidFill>
                 <a:latin typeface="Segoe UI"/>
               </a:rPr>
-              <a:t>SHANNON, EN VIVO</a:t>
-            </a:r>
-          </a:p>
-        </p:txBody>
-      </p:sp>
-      <p:sp>
-        <p:nvSpPr>
-          <p:cNvPr id="5" name="title"/>
+              <a:t>PASO 3 · LIMPIAR Y PROTEGER LO QUE LLEGA</a:t>
+            </a:r>
+          </a:p>
+        </p:txBody>
+      </p:sp>
+      <p:sp>
+        <p:nvSpPr>
+          <p:cNvPr id="6" name="title"/>
           <p:cNvSpPr txBox="1"/>
           <p:nvPr/>
         </p:nvSpPr>
         <p:spPr>
           <a:xfrm>
-            <a:off x="640080" y="914400"/>
-            <a:ext cx="10881360" cy="1463040"/>
+            <a:off x="685800" y="932688"/>
+            <a:ext cx="10789920" cy="1554480"/>
           </a:xfrm>
           <a:prstGeom prst="rect">
             <a:avLst/>
@@ -6362,233 +6573,27 @@
               </a:spcAft>
             </a:pPr>
             <a:r>
-              <a:rPr sz="3800" b="1">
+              <a:rPr sz="3000" b="1">
                 <a:solidFill>
                   <a:srgbClr val="E6EDF3"/>
                 </a:solidFill>
                 <a:latin typeface="Segoe UI"/>
               </a:rPr>
-              <a:t>H(X) y C: medidas, no recitadas</a:t>
-            </a:r>
-          </a:p>
-        </p:txBody>
-      </p:sp>
-      <p:sp>
-        <p:nvSpPr>
-          <p:cNvPr id="6" name="cardA"/>
-          <p:cNvSpPr/>
-          <p:nvPr/>
-        </p:nvSpPr>
-        <p:spPr>
-          <a:xfrm>
-            <a:off x="640080" y="2286000"/>
-            <a:ext cx="5394960" cy="2468880"/>
-          </a:xfrm>
-          <a:prstGeom prst="roundRect">
-            <a:avLst/>
-          </a:prstGeom>
-          <a:solidFill>
-            <a:srgbClr val="161B22"/>
-          </a:solidFill>
-          <a:ln w="15875">
-            <a:solidFill>
-              <a:srgbClr val="58A6FF"/>
-            </a:solidFill>
-          </a:ln>
-          <a:effectLst/>
-        </p:spPr>
-        <p:style>
-          <a:lnRef idx="1">
-            <a:schemeClr val="accent1"/>
-          </a:lnRef>
-          <a:fillRef idx="3">
-            <a:schemeClr val="accent1"/>
-          </a:fillRef>
-          <a:effectRef idx="2">
-            <a:schemeClr val="accent1"/>
-          </a:effectRef>
-          <a:fontRef idx="minor">
-            <a:schemeClr val="lt1"/>
-          </a:fontRef>
-        </p:style>
-        <p:txBody>
-          <a:bodyPr rtlCol="0" anchor="ctr" wrap="square" lIns="201168" rIns="201168" tIns="146304"/>
-          <a:lstStyle/>
-          <a:p>
-            <a:pPr algn="l"/>
-            <a:r>
-              <a:rPr sz="1700" b="1">
-                <a:solidFill>
-                  <a:srgbClr val="58A6FF"/>
-                </a:solidFill>
-                <a:latin typeface="Segoe UI"/>
-              </a:rPr>
-              <a:t>Entropía H(X)</a:t>
-            </a:r>
-          </a:p>
-          <a:p>
-            <a:pPr algn="l">
-              <a:spcBef>
-                <a:spcPts val="400"/>
-              </a:spcBef>
-            </a:pPr>
-            <a:r>
-              <a:rPr sz="1300">
-                <a:solidFill>
-                  <a:srgbClr val="E6EDF3"/>
-                </a:solidFill>
-                <a:latin typeface="Segoe UI"/>
-              </a:rPr>
-              <a:t>Silencio ≈ 0–1 bit/muestra. Voz: 3 a 6, de 8 posibles.</a:t>
-            </a:r>
-          </a:p>
-          <a:p>
-            <a:pPr algn="l">
-              <a:spcBef>
-                <a:spcPts val="400"/>
-              </a:spcBef>
-            </a:pPr>
-            <a:r>
-              <a:rPr sz="1300">
-                <a:solidFill>
-                  <a:srgbClr val="E6EDF3"/>
-                </a:solidFill>
-                <a:latin typeface="Segoe UI"/>
-              </a:rPr>
-              <a:t>Con ruido sube hacia 8: la entropía delata al ruido.</a:t>
-            </a:r>
-          </a:p>
-          <a:p>
-            <a:pPr algn="l">
-              <a:spcBef>
-                <a:spcPts val="400"/>
-              </a:spcBef>
-            </a:pPr>
-            <a:r>
-              <a:rPr sz="1300">
-                <a:solidFill>
-                  <a:srgbClr val="E6EDF3"/>
-                </a:solidFill>
-                <a:latin typeface="Segoe UI"/>
-              </a:rPr>
-              <a:t>Voz en 8 bits con ~4 de información: por eso se puede comprimir.</a:t>
-            </a:r>
-          </a:p>
-        </p:txBody>
-      </p:sp>
-      <p:sp>
-        <p:nvSpPr>
-          <p:cNvPr id="7" name="cardB"/>
-          <p:cNvSpPr/>
-          <p:nvPr/>
-        </p:nvSpPr>
-        <p:spPr>
-          <a:xfrm>
-            <a:off x="6217920" y="2286000"/>
-            <a:ext cx="5394960" cy="2468880"/>
-          </a:xfrm>
-          <a:prstGeom prst="roundRect">
-            <a:avLst/>
-          </a:prstGeom>
-          <a:solidFill>
-            <a:srgbClr val="161B22"/>
-          </a:solidFill>
-          <a:ln w="15875">
-            <a:solidFill>
-              <a:srgbClr val="3FB950"/>
-            </a:solidFill>
-          </a:ln>
-          <a:effectLst/>
-        </p:spPr>
-        <p:style>
-          <a:lnRef idx="1">
-            <a:schemeClr val="accent1"/>
-          </a:lnRef>
-          <a:fillRef idx="3">
-            <a:schemeClr val="accent1"/>
-          </a:fillRef>
-          <a:effectRef idx="2">
-            <a:schemeClr val="accent1"/>
-          </a:effectRef>
-          <a:fontRef idx="minor">
-            <a:schemeClr val="lt1"/>
-          </a:fontRef>
-        </p:style>
-        <p:txBody>
-          <a:bodyPr rtlCol="0" anchor="ctr" wrap="square" lIns="201168" rIns="201168" tIns="146304"/>
-          <a:lstStyle/>
-          <a:p>
-            <a:pPr algn="l"/>
-            <a:r>
-              <a:rPr sz="1700" b="1">
-                <a:solidFill>
-                  <a:srgbClr val="3FB950"/>
-                </a:solidFill>
-                <a:latin typeface="Segoe UI"/>
-              </a:rPr>
-              <a:t>Capacidad C = B·log₂(1+SNR)</a:t>
-            </a:r>
-          </a:p>
-          <a:p>
-            <a:pPr algn="l">
-              <a:spcBef>
-                <a:spcPts val="400"/>
-              </a:spcBef>
-            </a:pPr>
-            <a:r>
-              <a:rPr sz="1300">
-                <a:solidFill>
-                  <a:srgbClr val="E6EDF3"/>
-                </a:solidFill>
-                <a:latin typeface="Segoe UI"/>
-              </a:rPr>
-              <a:t>El techo teórico del canal, calculado del RSSI en vivo.</a:t>
-            </a:r>
-          </a:p>
-          <a:p>
-            <a:pPr algn="l">
-              <a:spcBef>
-                <a:spcPts val="400"/>
-              </a:spcBef>
-            </a:pPr>
-            <a:r>
-              <a:rPr sz="1300">
-                <a:solidFill>
-                  <a:srgbClr val="E6EDF3"/>
-                </a:solidFill>
-                <a:latin typeface="Segoe UI"/>
-              </a:rPr>
-              <a:t>El throughput real queda muy por debajo.</a:t>
-            </a:r>
-          </a:p>
-          <a:p>
-            <a:pPr algn="l">
-              <a:spcBef>
-                <a:spcPts val="400"/>
-              </a:spcBef>
-            </a:pPr>
-            <a:r>
-              <a:rPr sz="1300">
-                <a:solidFill>
-                  <a:srgbClr val="E6EDF3"/>
-                </a:solidFill>
-                <a:latin typeface="Segoe UI"/>
-              </a:rPr>
-              <a:t>Esa brecha no es un error: es un resultado.</a:t>
-            </a:r>
-          </a:p>
-        </p:txBody>
-      </p:sp>
-      <p:sp>
-        <p:nvSpPr>
-          <p:cNvPr id="8" name="foot"/>
+              <a:t>Cómo se recupera la voz al otro lado</a:t>
+            </a:r>
+          </a:p>
+        </p:txBody>
+      </p:sp>
+      <p:sp>
+        <p:nvSpPr>
+          <p:cNvPr id="7" name="tx"/>
           <p:cNvSpPr txBox="1"/>
           <p:nvPr/>
         </p:nvSpPr>
         <p:spPr>
           <a:xfrm>
-            <a:off x="640080" y="6419088"/>
-            <a:ext cx="10881360" cy="365760"/>
+            <a:off x="685800" y="2423160"/>
+            <a:ext cx="9418320" cy="3291840"/>
           </a:xfrm>
           <a:prstGeom prst="rect">
             <a:avLst/>
@@ -6600,6 +6605,38 @@
             <a:spAutoFit/>
           </a:bodyPr>
           <a:lstStyle/>
+          <a:p>
+            <a:pPr algn="l">
+              <a:spcAft>
+                <a:spcPts val="1100"/>
+              </a:spcAft>
+            </a:pPr>
+            <a:r>
+              <a:rPr sz="1800" b="0">
+                <a:solidFill>
+                  <a:srgbClr val="E6EDF3"/>
+                </a:solidFill>
+                <a:latin typeface="Segoe UI"/>
+              </a:rPr>
+              <a:t>Si se pierde un paquete, se repite el último fragmento bajándole el volumen poco a poco, para que no quede un silencio seco ni un ruido molesto.</a:t>
+            </a:r>
+          </a:p>
+          <a:p>
+            <a:pPr algn="l">
+              <a:spcAft>
+                <a:spcPts val="1100"/>
+              </a:spcAft>
+            </a:pPr>
+            <a:r>
+              <a:rPr sz="1800" b="0">
+                <a:solidFill>
+                  <a:srgbClr val="E6EDF3"/>
+                </a:solidFill>
+                <a:latin typeface="Segoe UI"/>
+              </a:rPr>
+              <a:t>Un filtro deja pasar la voz y corta el silbido del ruido de fondo.</a:t>
+            </a:r>
+          </a:p>
           <a:p>
             <a:pPr algn="l">
               <a:spcAft>
@@ -6607,13 +6644,13 @@
               </a:spcAft>
             </a:pPr>
             <a:r>
-              <a:rPr sz="1000" b="0">
-                <a:solidFill>
-                  <a:srgbClr val="8B949E"/>
+              <a:rPr sz="1800" b="0">
+                <a:solidFill>
+                  <a:srgbClr val="E6EDF3"/>
                 </a:solidFill>
                 <a:latin typeface="Segoe UI"/>
               </a:rPr>
-              <a:t>DSP · BT Analyzer  —  Teoría de la Información y Sistemas de Comunicación · UNAL</a:t>
+              <a:t>Y un código de corrección: por cada 4 bits de datos se mandan 3 de control; si uno se daña en el camino, el receptor lo arregla sin pedir que lo reenvíen.</a:t>
             </a:r>
           </a:p>
         </p:txBody>
@@ -6694,20 +6731,276 @@
       </p:sp>
       <p:sp>
         <p:nvSpPr>
-          <p:cNvPr id="3" name="orb"/>
+          <p:cNvPr id="3" name="ic"/>
           <p:cNvSpPr/>
           <p:nvPr/>
         </p:nvSpPr>
         <p:spPr>
           <a:xfrm>
-            <a:off x="3840480" y="1463040"/>
-            <a:ext cx="4572000" cy="4572000"/>
-          </a:xfrm>
-          <a:prstGeom prst="ellipse">
+            <a:off x="9481413" y="2276856"/>
+            <a:ext cx="295351" cy="694944"/>
+          </a:xfrm>
+          <a:prstGeom prst="roundRect">
+            <a:avLst/>
+          </a:prstGeom>
+          <a:solidFill>
+            <a:srgbClr val="8B949E"/>
+          </a:solidFill>
+          <a:ln>
+            <a:noFill/>
+          </a:ln>
+          <a:effectLst/>
+        </p:spPr>
+        <p:style>
+          <a:lnRef idx="1">
+            <a:schemeClr val="accent1"/>
+          </a:lnRef>
+          <a:fillRef idx="3">
+            <a:schemeClr val="accent1"/>
+          </a:fillRef>
+          <a:effectRef idx="2">
+            <a:schemeClr val="accent1"/>
+          </a:effectRef>
+          <a:fontRef idx="minor">
+            <a:schemeClr val="lt1"/>
+          </a:fontRef>
+        </p:style>
+        <p:txBody>
+          <a:bodyPr rtlCol="0" anchor="ctr"/>
+          <a:lstStyle/>
+          <a:p>
+            <a:pPr algn="ctr"/>
+          </a:p>
+        </p:txBody>
+      </p:sp>
+      <p:sp>
+        <p:nvSpPr>
+          <p:cNvPr id="4" name="ic"/>
+          <p:cNvSpPr/>
+          <p:nvPr/>
+        </p:nvSpPr>
+        <p:spPr>
+          <a:xfrm>
+            <a:off x="9950500" y="1755648"/>
+            <a:ext cx="295351" cy="1216151"/>
+          </a:xfrm>
+          <a:prstGeom prst="roundRect">
+            <a:avLst/>
+          </a:prstGeom>
+          <a:solidFill>
+            <a:srgbClr val="58A6FF"/>
+          </a:solidFill>
+          <a:ln>
+            <a:noFill/>
+          </a:ln>
+          <a:effectLst/>
+        </p:spPr>
+        <p:style>
+          <a:lnRef idx="1">
+            <a:schemeClr val="accent1"/>
+          </a:lnRef>
+          <a:fillRef idx="3">
+            <a:schemeClr val="accent1"/>
+          </a:fillRef>
+          <a:effectRef idx="2">
+            <a:schemeClr val="accent1"/>
+          </a:effectRef>
+          <a:fontRef idx="minor">
+            <a:schemeClr val="lt1"/>
+          </a:fontRef>
+        </p:style>
+        <p:txBody>
+          <a:bodyPr rtlCol="0" anchor="ctr"/>
+          <a:lstStyle/>
+          <a:p>
+            <a:pPr algn="ctr"/>
+          </a:p>
+        </p:txBody>
+      </p:sp>
+      <p:sp>
+        <p:nvSpPr>
+          <p:cNvPr id="5" name="ic"/>
+          <p:cNvSpPr/>
+          <p:nvPr/>
+        </p:nvSpPr>
+        <p:spPr>
+          <a:xfrm>
+            <a:off x="10419588" y="2016252"/>
+            <a:ext cx="295351" cy="955547"/>
+          </a:xfrm>
+          <a:prstGeom prst="roundRect">
+            <a:avLst/>
+          </a:prstGeom>
+          <a:solidFill>
+            <a:srgbClr val="3FB950"/>
+          </a:solidFill>
+          <a:ln>
+            <a:noFill/>
+          </a:ln>
+          <a:effectLst/>
+        </p:spPr>
+        <p:style>
+          <a:lnRef idx="1">
+            <a:schemeClr val="accent1"/>
+          </a:lnRef>
+          <a:fillRef idx="3">
+            <a:schemeClr val="accent1"/>
+          </a:fillRef>
+          <a:effectRef idx="2">
+            <a:schemeClr val="accent1"/>
+          </a:effectRef>
+          <a:fontRef idx="minor">
+            <a:schemeClr val="lt1"/>
+          </a:fontRef>
+        </p:style>
+        <p:txBody>
+          <a:bodyPr rtlCol="0" anchor="ctr"/>
+          <a:lstStyle/>
+          <a:p>
+            <a:pPr algn="ctr"/>
+          </a:p>
+        </p:txBody>
+      </p:sp>
+      <p:sp>
+        <p:nvSpPr>
+          <p:cNvPr id="6" name="ic"/>
+          <p:cNvSpPr/>
+          <p:nvPr/>
+        </p:nvSpPr>
+        <p:spPr>
+          <a:xfrm>
+            <a:off x="10888675" y="1234440"/>
+            <a:ext cx="295351" cy="1737360"/>
+          </a:xfrm>
+          <a:prstGeom prst="roundRect">
+            <a:avLst/>
+          </a:prstGeom>
+          <a:solidFill>
+            <a:srgbClr val="D29922"/>
+          </a:solidFill>
+          <a:ln>
+            <a:noFill/>
+          </a:ln>
+          <a:effectLst/>
+        </p:spPr>
+        <p:style>
+          <a:lnRef idx="1">
+            <a:schemeClr val="accent1"/>
+          </a:lnRef>
+          <a:fillRef idx="3">
+            <a:schemeClr val="accent1"/>
+          </a:fillRef>
+          <a:effectRef idx="2">
+            <a:schemeClr val="accent1"/>
+          </a:effectRef>
+          <a:fontRef idx="minor">
+            <a:schemeClr val="lt1"/>
+          </a:fontRef>
+        </p:style>
+        <p:txBody>
+          <a:bodyPr rtlCol="0" anchor="ctr"/>
+          <a:lstStyle/>
+          <a:p>
+            <a:pPr algn="ctr"/>
+          </a:p>
+        </p:txBody>
+      </p:sp>
+      <p:sp>
+        <p:nvSpPr>
+          <p:cNvPr id="7" name="kick"/>
+          <p:cNvSpPr txBox="1"/>
+          <p:nvPr/>
+        </p:nvSpPr>
+        <p:spPr>
+          <a:xfrm>
+            <a:off x="685800" y="457200"/>
+            <a:ext cx="10789920" cy="457200"/>
+          </a:xfrm>
+          <a:prstGeom prst="rect">
             <a:avLst/>
           </a:prstGeom>
           <a:noFill/>
-          <a:ln w="44450">
+        </p:spPr>
+        <p:txBody>
+          <a:bodyPr wrap="square" anchor="t">
+            <a:spAutoFit/>
+          </a:bodyPr>
+          <a:lstStyle/>
+          <a:p>
+            <a:pPr algn="l">
+              <a:spcAft>
+                <a:spcPts val="600"/>
+              </a:spcAft>
+            </a:pPr>
+            <a:r>
+              <a:rPr sz="1300" b="1">
+                <a:solidFill>
+                  <a:srgbClr val="58A6FF"/>
+                </a:solidFill>
+                <a:latin typeface="Segoe UI"/>
+              </a:rPr>
+              <a:t>LO QUE LA APP CALCULA EN VIVO</a:t>
+            </a:r>
+          </a:p>
+        </p:txBody>
+      </p:sp>
+      <p:sp>
+        <p:nvSpPr>
+          <p:cNvPr id="8" name="title"/>
+          <p:cNvSpPr txBox="1"/>
+          <p:nvPr/>
+        </p:nvSpPr>
+        <p:spPr>
+          <a:xfrm>
+            <a:off x="685800" y="932688"/>
+            <a:ext cx="10789920" cy="1554480"/>
+          </a:xfrm>
+          <a:prstGeom prst="rect">
+            <a:avLst/>
+          </a:prstGeom>
+          <a:noFill/>
+        </p:spPr>
+        <p:txBody>
+          <a:bodyPr wrap="square" anchor="t">
+            <a:spAutoFit/>
+          </a:bodyPr>
+          <a:lstStyle/>
+          <a:p>
+            <a:pPr algn="l">
+              <a:spcAft>
+                <a:spcPts val="600"/>
+              </a:spcAft>
+            </a:pPr>
+            <a:r>
+              <a:rPr sz="3000" b="1">
+                <a:solidFill>
+                  <a:srgbClr val="E6EDF3"/>
+                </a:solidFill>
+                <a:latin typeface="Segoe UI"/>
+              </a:rPr>
+              <a:t>Entropía y capacidad, con el audio real</a:t>
+            </a:r>
+          </a:p>
+        </p:txBody>
+      </p:sp>
+      <p:sp>
+        <p:nvSpPr>
+          <p:cNvPr id="9" name="card"/>
+          <p:cNvSpPr/>
+          <p:nvPr/>
+        </p:nvSpPr>
+        <p:spPr>
+          <a:xfrm>
+            <a:off x="685800" y="2377440"/>
+            <a:ext cx="5349240" cy="2834640"/>
+          </a:xfrm>
+          <a:prstGeom prst="roundRect">
+            <a:avLst/>
+          </a:prstGeom>
+          <a:solidFill>
+            <a:srgbClr val="161B22"/>
+          </a:solidFill>
+          <a:ln w="15875">
             <a:solidFill>
               <a:srgbClr val="58A6FF"/>
             </a:solidFill>
@@ -6729,32 +7022,91 @@
           </a:fontRef>
         </p:style>
         <p:txBody>
-          <a:bodyPr rtlCol="0" anchor="ctr"/>
+          <a:bodyPr rtlCol="0" anchor="ctr" wrap="square" lIns="182880" rIns="182880" tIns="146304"/>
           <a:lstStyle/>
           <a:p>
             <a:pPr algn="ctr"/>
-          </a:p>
-        </p:txBody>
-      </p:sp>
-      <p:sp>
-        <p:nvSpPr>
-          <p:cNvPr id="4" name="orb2"/>
+            <a:r>
+              <a:rPr sz="1600" b="1">
+                <a:solidFill>
+                  <a:srgbClr val="58A6FF"/>
+                </a:solidFill>
+                <a:latin typeface="Segoe UI"/>
+              </a:rPr>
+              <a:t>Entropía  H(X)</a:t>
+            </a:r>
+          </a:p>
+          <a:p>
+            <a:pPr>
+              <a:spcBef>
+                <a:spcPts val="400"/>
+              </a:spcBef>
+            </a:pPr>
+            <a:r>
+              <a:rPr sz="1250">
+                <a:solidFill>
+                  <a:srgbClr val="E6EDF3"/>
+                </a:solidFill>
+                <a:latin typeface="Segoe UI"/>
+              </a:rPr>
+              <a:t>Cuánta información trae cada muestra, en bits.</a:t>
+            </a:r>
+          </a:p>
+          <a:p>
+            <a:pPr>
+              <a:spcBef>
+                <a:spcPts val="400"/>
+              </a:spcBef>
+            </a:pPr>
+            <a:r>
+              <a:rPr sz="1250">
+                <a:solidFill>
+                  <a:srgbClr val="E6EDF3"/>
+                </a:solidFill>
+                <a:latin typeface="Segoe UI"/>
+              </a:rPr>
+              <a:t>Silencio: casi 0.   Voz: entre 3 y 6.   Ruido: cerca de 8.</a:t>
+            </a:r>
+          </a:p>
+          <a:p>
+            <a:pPr>
+              <a:spcBef>
+                <a:spcPts val="400"/>
+              </a:spcBef>
+            </a:pPr>
+            <a:r>
+              <a:rPr sz="1250">
+                <a:solidFill>
+                  <a:srgbClr val="E6EDF3"/>
+                </a:solidFill>
+                <a:latin typeface="Segoe UI"/>
+              </a:rPr>
+              <a:t>Sube cuando el canal se ensucia: sirve de detector de ruido.</a:t>
+            </a:r>
+          </a:p>
+        </p:txBody>
+      </p:sp>
+      <p:sp>
+        <p:nvSpPr>
+          <p:cNvPr id="10" name="card"/>
           <p:cNvSpPr/>
           <p:nvPr/>
         </p:nvSpPr>
         <p:spPr>
           <a:xfrm>
-            <a:off x="4754880" y="2377440"/>
-            <a:ext cx="2743200" cy="2743200"/>
-          </a:xfrm>
-          <a:prstGeom prst="ellipse">
+            <a:off x="6217920" y="2377440"/>
+            <a:ext cx="5349240" cy="2834640"/>
+          </a:xfrm>
+          <a:prstGeom prst="roundRect">
             <a:avLst/>
           </a:prstGeom>
           <a:solidFill>
-            <a:srgbClr val="1B2638"/>
+            <a:srgbClr val="161B22"/>
           </a:solidFill>
-          <a:ln>
-            <a:noFill/>
+          <a:ln w="15875">
+            <a:solidFill>
+              <a:srgbClr val="3FB950"/>
+            </a:solidFill>
           </a:ln>
           <a:effectLst/>
         </p:spPr>
@@ -6773,126 +7125,66 @@
           </a:fontRef>
         </p:style>
         <p:txBody>
-          <a:bodyPr rtlCol="0" anchor="ctr"/>
+          <a:bodyPr rtlCol="0" anchor="ctr" wrap="square" lIns="182880" rIns="182880" tIns="146304"/>
           <a:lstStyle/>
           <a:p>
             <a:pPr algn="ctr"/>
-          </a:p>
-        </p:txBody>
-      </p:sp>
-      <p:sp>
-        <p:nvSpPr>
-          <p:cNvPr id="5" name="title"/>
-          <p:cNvSpPr txBox="1"/>
-          <p:nvPr/>
-        </p:nvSpPr>
-        <p:spPr>
-          <a:xfrm>
-            <a:off x="640080" y="2651760"/>
-            <a:ext cx="10881360" cy="1280160"/>
-          </a:xfrm>
-          <a:prstGeom prst="rect">
-            <a:avLst/>
-          </a:prstGeom>
-          <a:noFill/>
-        </p:spPr>
-        <p:txBody>
-          <a:bodyPr wrap="square" anchor="t">
-            <a:spAutoFit/>
-          </a:bodyPr>
-          <a:lstStyle/>
-          <a:p>
-            <a:pPr algn="ctr">
-              <a:spcAft>
-                <a:spcPts val="600"/>
-              </a:spcAft>
-            </a:pPr>
-            <a:r>
-              <a:rPr sz="6000" b="1">
-                <a:solidFill>
-                  <a:srgbClr val="E6EDF3"/>
+            <a:r>
+              <a:rPr sz="1600" b="1">
+                <a:solidFill>
+                  <a:srgbClr val="3FB950"/>
                 </a:solidFill>
                 <a:latin typeface="Segoe UI"/>
               </a:rPr>
-              <a:t>Demo en vivo</a:t>
-            </a:r>
-          </a:p>
-        </p:txBody>
-      </p:sp>
-      <p:sp>
-        <p:nvSpPr>
-          <p:cNvPr id="6" name="body"/>
-          <p:cNvSpPr txBox="1"/>
-          <p:nvPr/>
-        </p:nvSpPr>
-        <p:spPr>
-          <a:xfrm>
-            <a:off x="640080" y="4114800"/>
-            <a:ext cx="10881360" cy="1463040"/>
-          </a:xfrm>
-          <a:prstGeom prst="rect">
-            <a:avLst/>
-          </a:prstGeom>
-          <a:noFill/>
-        </p:spPr>
-        <p:txBody>
-          <a:bodyPr wrap="square" anchor="t">
-            <a:spAutoFit/>
-          </a:bodyPr>
-          <a:lstStyle/>
-          <a:p>
-            <a:pPr algn="ctr">
-              <a:spcAft>
-                <a:spcPts val="600"/>
-              </a:spcAft>
+              <a:t>Capacidad  C = B · log₂(1 + SNR)</a:t>
+            </a:r>
+          </a:p>
+          <a:p>
+            <a:pPr>
+              <a:spcBef>
+                <a:spcPts val="400"/>
+              </a:spcBef>
             </a:pPr>
             <a:r>
-              <a:rPr sz="1600" b="0">
-                <a:solidFill>
-                  <a:srgbClr val="8B949E"/>
+              <a:rPr sz="1250">
+                <a:solidFill>
+                  <a:srgbClr val="E6EDF3"/>
                 </a:solidFill>
                 <a:latin typeface="Segoe UI"/>
               </a:rPr>
-              <a:t>sin optimizar (se oye el eco y el canal crudo)   →   AEC encendido (el eco muere)   →   canal degradado (filtro y Hamming trabajando, en el log)</a:t>
-            </a:r>
-          </a:p>
-        </p:txBody>
-      </p:sp>
-      <p:sp>
-        <p:nvSpPr>
-          <p:cNvPr id="7" name="foot"/>
-          <p:cNvSpPr txBox="1"/>
-          <p:nvPr/>
-        </p:nvSpPr>
-        <p:spPr>
-          <a:xfrm>
-            <a:off x="640080" y="6419088"/>
-            <a:ext cx="10881360" cy="365760"/>
-          </a:xfrm>
-          <a:prstGeom prst="rect">
-            <a:avLst/>
-          </a:prstGeom>
-          <a:noFill/>
-        </p:spPr>
-        <p:txBody>
-          <a:bodyPr wrap="square" anchor="t">
-            <a:spAutoFit/>
-          </a:bodyPr>
-          <a:lstStyle/>
-          <a:p>
-            <a:pPr algn="l">
-              <a:spcAft>
-                <a:spcPts val="600"/>
-              </a:spcAft>
+              <a:t>El máximo de datos por segundo que aguanta el canal.</a:t>
+            </a:r>
+          </a:p>
+          <a:p>
+            <a:pPr>
+              <a:spcBef>
+                <a:spcPts val="400"/>
+              </a:spcBef>
             </a:pPr>
             <a:r>
-              <a:rPr sz="1000" b="0">
-                <a:solidFill>
-                  <a:srgbClr val="8B949E"/>
+              <a:rPr sz="1250">
+                <a:solidFill>
+                  <a:srgbClr val="E6EDF3"/>
                 </a:solidFill>
                 <a:latin typeface="Segoe UI"/>
               </a:rPr>
-              <a:t>DSP · BT Analyzer  —  Teoría de la Información y Sistemas de Comunicación · UNAL</a:t>
+              <a:t>Ejemplo: 4 000 Hz y señal 1000 veces más fuerte que el ruido → unos 40 kbps.</a:t>
+            </a:r>
+          </a:p>
+          <a:p>
+            <a:pPr>
+              <a:spcBef>
+                <a:spcPts val="400"/>
+              </a:spcBef>
+            </a:pPr>
+            <a:r>
+              <a:rPr sz="1250">
+                <a:solidFill>
+                  <a:srgbClr val="E6EDF3"/>
+                </a:solidFill>
+                <a:latin typeface="Segoe UI"/>
+              </a:rPr>
+              <a:t>El canal real da menos: esa diferencia también es un resultado.</a:t>
             </a:r>
           </a:p>
         </p:txBody>
@@ -6973,23 +7265,41 @@
       </p:sp>
       <p:sp>
         <p:nvSpPr>
-          <p:cNvPr id="3" name="orb"/>
+          <p:cNvPr id="3" name="ic"/>
           <p:cNvSpPr/>
           <p:nvPr/>
         </p:nvSpPr>
         <p:spPr>
           <a:xfrm>
-            <a:off x="-1645920" y="3291840"/>
-            <a:ext cx="3657600" cy="3657600"/>
-          </a:xfrm>
-          <a:prstGeom prst="ellipse">
-            <a:avLst/>
-          </a:prstGeom>
-          <a:noFill/>
-          <a:ln w="44450">
-            <a:solidFill>
-              <a:srgbClr val="3FB950"/>
-            </a:solidFill>
+            <a:off x="5645505" y="1371600"/>
+            <a:ext cx="1088136" cy="1280160"/>
+          </a:xfrm>
+          <a:custGeom>
+            <a:avLst/>
+            <a:gdLst/>
+            <a:ahLst/>
+            <a:cxnLst/>
+            <a:rect l="l" t="t" r="r" b="b"/>
+            <a:pathLst>
+              <a:path w="1088136" h="1280160">
+                <a:moveTo>
+                  <a:pt x="0" y="0"/>
+                </a:moveTo>
+                <a:lnTo>
+                  <a:pt x="1088136" y="640080"/>
+                </a:lnTo>
+                <a:lnTo>
+                  <a:pt x="0" y="1280160"/>
+                </a:lnTo>
+                <a:close/>
+              </a:path>
+            </a:pathLst>
+          </a:custGeom>
+          <a:solidFill>
+            <a:srgbClr val="58A6FF"/>
+          </a:solidFill>
+          <a:ln>
+            <a:noFill/>
           </a:ln>
           <a:effectLst/>
         </p:spPr>
@@ -7017,14 +7327,14 @@
       </p:sp>
       <p:sp>
         <p:nvSpPr>
-          <p:cNvPr id="4" name="kicker"/>
+          <p:cNvPr id="4" name="tx"/>
           <p:cNvSpPr txBox="1"/>
           <p:nvPr/>
         </p:nvSpPr>
         <p:spPr>
           <a:xfrm>
-            <a:off x="640080" y="411480"/>
-            <a:ext cx="10881360" cy="457200"/>
+            <a:off x="685800" y="2926080"/>
+            <a:ext cx="10789920" cy="914400"/>
           </a:xfrm>
           <a:prstGeom prst="rect">
             <a:avLst/>
@@ -7037,33 +7347,33 @@
           </a:bodyPr>
           <a:lstStyle/>
           <a:p>
-            <a:pPr algn="l">
+            <a:pPr algn="ctr">
               <a:spcAft>
                 <a:spcPts val="600"/>
               </a:spcAft>
             </a:pPr>
             <a:r>
-              <a:rPr sz="1300" b="1">
-                <a:solidFill>
-                  <a:srgbClr val="58A6FF"/>
+              <a:rPr sz="4400" b="1">
+                <a:solidFill>
+                  <a:srgbClr val="E6EDF3"/>
                 </a:solidFill>
                 <a:latin typeface="Segoe UI"/>
               </a:rPr>
-              <a:t>NÚMEROS FINALES</a:t>
-            </a:r>
-          </a:p>
-        </p:txBody>
-      </p:sp>
-      <p:sp>
-        <p:nvSpPr>
-          <p:cNvPr id="5" name="title"/>
+              <a:t>Demostración en vivo</a:t>
+            </a:r>
+          </a:p>
+        </p:txBody>
+      </p:sp>
+      <p:sp>
+        <p:nvSpPr>
+          <p:cNvPr id="5" name="tx"/>
           <p:cNvSpPr txBox="1"/>
           <p:nvPr/>
         </p:nvSpPr>
         <p:spPr>
           <a:xfrm>
-            <a:off x="640080" y="914400"/>
-            <a:ext cx="10881360" cy="1463040"/>
+            <a:off x="1280160" y="4114800"/>
+            <a:ext cx="9601200" cy="1645920"/>
           </a:xfrm>
           <a:prstGeom prst="rect">
             <a:avLst/>
@@ -7076,342 +7386,51 @@
           </a:bodyPr>
           <a:lstStyle/>
           <a:p>
-            <a:pPr algn="l">
+            <a:pPr algn="ctr">
               <a:spcAft>
                 <a:spcPts val="600"/>
               </a:spcAft>
             </a:pPr>
             <a:r>
-              <a:rPr sz="3600" b="1">
-                <a:solidFill>
-                  <a:srgbClr val="E6EDF3"/>
+              <a:rPr sz="1700" b="0">
+                <a:solidFill>
+                  <a:srgbClr val="8B949E"/>
                 </a:solidFill>
                 <a:latin typeface="Segoe UI"/>
               </a:rPr>
-              <a:t>¿Funcionó? Sí — y sabemos cuánto</a:t>
-            </a:r>
-          </a:p>
-        </p:txBody>
-      </p:sp>
-      <p:sp>
-        <p:nvSpPr>
-          <p:cNvPr id="6" name="cardA"/>
-          <p:cNvSpPr/>
-          <p:nvPr/>
-        </p:nvSpPr>
-        <p:spPr>
-          <a:xfrm>
-            <a:off x="640080" y="2240280"/>
-            <a:ext cx="5394960" cy="1600200"/>
-          </a:xfrm>
-          <a:prstGeom prst="roundRect">
-            <a:avLst/>
-          </a:prstGeom>
-          <a:solidFill>
-            <a:srgbClr val="161B22"/>
-          </a:solidFill>
-          <a:ln w="15875">
-            <a:solidFill>
-              <a:srgbClr val="3FB950"/>
-            </a:solidFill>
-          </a:ln>
-          <a:effectLst/>
-        </p:spPr>
-        <p:style>
-          <a:lnRef idx="1">
-            <a:schemeClr val="accent1"/>
-          </a:lnRef>
-          <a:fillRef idx="3">
-            <a:schemeClr val="accent1"/>
-          </a:fillRef>
-          <a:effectRef idx="2">
-            <a:schemeClr val="accent1"/>
-          </a:effectRef>
-          <a:fontRef idx="minor">
-            <a:schemeClr val="lt1"/>
-          </a:fontRef>
-        </p:style>
-        <p:txBody>
-          <a:bodyPr rtlCol="0" anchor="ctr" wrap="square" lIns="201168" rIns="201168" tIns="146304"/>
-          <a:lstStyle/>
-          <a:p>
-            <a:pPr algn="l"/>
-            <a:r>
-              <a:rPr sz="1700" b="1">
-                <a:solidFill>
-                  <a:srgbClr val="3FB950"/>
-                </a:solidFill>
-                <a:latin typeface="Segoe UI"/>
-              </a:rPr>
-              <a:t>0.5 – 1 s de latencia, estable</a:t>
-            </a:r>
-          </a:p>
-          <a:p>
-            <a:pPr algn="l">
-              <a:spcBef>
-                <a:spcPts val="400"/>
-              </a:spcBef>
-            </a:pPr>
-            <a:r>
-              <a:rPr sz="1300">
-                <a:solidFill>
-                  <a:srgbClr val="E6EDF3"/>
-                </a:solidFill>
-                <a:latin typeface="Segoe UI"/>
-              </a:rPr>
-              <a:t>Antes: crecía sin tope hasta 11 s. Ahora está acotada por construcción.</a:t>
-            </a:r>
-          </a:p>
-        </p:txBody>
-      </p:sp>
-      <p:sp>
-        <p:nvSpPr>
-          <p:cNvPr id="7" name="cardB"/>
-          <p:cNvSpPr/>
-          <p:nvPr/>
-        </p:nvSpPr>
-        <p:spPr>
-          <a:xfrm>
-            <a:off x="6217920" y="2240280"/>
-            <a:ext cx="5394960" cy="1600200"/>
-          </a:xfrm>
-          <a:prstGeom prst="roundRect">
-            <a:avLst/>
-          </a:prstGeom>
-          <a:solidFill>
-            <a:srgbClr val="161B22"/>
-          </a:solidFill>
-          <a:ln w="15875">
-            <a:solidFill>
-              <a:srgbClr val="58A6FF"/>
-            </a:solidFill>
-          </a:ln>
-          <a:effectLst/>
-        </p:spPr>
-        <p:style>
-          <a:lnRef idx="1">
-            <a:schemeClr val="accent1"/>
-          </a:lnRef>
-          <a:fillRef idx="3">
-            <a:schemeClr val="accent1"/>
-          </a:fillRef>
-          <a:effectRef idx="2">
-            <a:schemeClr val="accent1"/>
-          </a:effectRef>
-          <a:fontRef idx="minor">
-            <a:schemeClr val="lt1"/>
-          </a:fontRef>
-        </p:style>
-        <p:txBody>
-          <a:bodyPr rtlCol="0" anchor="ctr" wrap="square" lIns="201168" rIns="201168" tIns="146304"/>
-          <a:lstStyle/>
-          <a:p>
-            <a:pPr algn="l"/>
-            <a:r>
-              <a:rPr sz="1700" b="1">
-                <a:solidFill>
-                  <a:srgbClr val="58A6FF"/>
-                </a:solidFill>
-                <a:latin typeface="Segoe UI"/>
-              </a:rPr>
-              <a:t>0 % de pérdida en canal sano</a:t>
-            </a:r>
-          </a:p>
-          <a:p>
-            <a:pPr algn="l">
-              <a:spcBef>
-                <a:spcPts val="400"/>
-              </a:spcBef>
-            </a:pPr>
-            <a:r>
-              <a:rPr sz="1300">
-                <a:solidFill>
-                  <a:srgbClr val="E6EDF3"/>
-                </a:solidFill>
-                <a:latin typeface="Segoe UI"/>
-              </a:rPr>
-              <a:t>Y sabemos por qué: RFCOMM retransmite solo. La pérdida real aparece con distancia.</a:t>
-            </a:r>
-          </a:p>
-        </p:txBody>
-      </p:sp>
-      <p:sp>
-        <p:nvSpPr>
-          <p:cNvPr id="8" name="cardC"/>
-          <p:cNvSpPr/>
-          <p:nvPr/>
-        </p:nvSpPr>
-        <p:spPr>
-          <a:xfrm>
-            <a:off x="640080" y="4023360"/>
-            <a:ext cx="5394960" cy="1600200"/>
-          </a:xfrm>
-          <a:prstGeom prst="roundRect">
-            <a:avLst/>
-          </a:prstGeom>
-          <a:solidFill>
-            <a:srgbClr val="161B22"/>
-          </a:solidFill>
-          <a:ln w="15875">
-            <a:solidFill>
-              <a:srgbClr val="D29922"/>
-            </a:solidFill>
-          </a:ln>
-          <a:effectLst/>
-        </p:spPr>
-        <p:style>
-          <a:lnRef idx="1">
-            <a:schemeClr val="accent1"/>
-          </a:lnRef>
-          <a:fillRef idx="3">
-            <a:schemeClr val="accent1"/>
-          </a:fillRef>
-          <a:effectRef idx="2">
-            <a:schemeClr val="accent1"/>
-          </a:effectRef>
-          <a:fontRef idx="minor">
-            <a:schemeClr val="lt1"/>
-          </a:fontRef>
-        </p:style>
-        <p:txBody>
-          <a:bodyPr rtlCol="0" anchor="ctr" wrap="square" lIns="201168" rIns="201168" tIns="146304"/>
-          <a:lstStyle/>
-          <a:p>
-            <a:pPr algn="l"/>
-            <a:r>
-              <a:rPr sz="1700" b="1">
-                <a:solidFill>
-                  <a:srgbClr val="D29922"/>
-                </a:solidFill>
-                <a:latin typeface="Segoe UI"/>
-              </a:rPr>
-              <a:t>8 000 B/s por dirección</a:t>
-            </a:r>
-          </a:p>
-          <a:p>
-            <a:pPr algn="l">
-              <a:spcBef>
-                <a:spcPts val="400"/>
-              </a:spcBef>
-            </a:pPr>
-            <a:r>
-              <a:rPr sz="1300">
-                <a:solidFill>
-                  <a:srgbClr val="E6EDF3"/>
-                </a:solidFill>
-                <a:latin typeface="Segoe UI"/>
-              </a:rPr>
-              <a:t>4× menos que el diseño inicial. Y en silencio: cero — cortesía del VAD.</a:t>
-            </a:r>
-          </a:p>
-        </p:txBody>
-      </p:sp>
-      <p:sp>
-        <p:nvSpPr>
-          <p:cNvPr id="9" name="cardD"/>
-          <p:cNvSpPr/>
-          <p:nvPr/>
-        </p:nvSpPr>
-        <p:spPr>
-          <a:xfrm>
-            <a:off x="6217920" y="4023360"/>
-            <a:ext cx="5394960" cy="1600200"/>
-          </a:xfrm>
-          <a:prstGeom prst="roundRect">
-            <a:avLst/>
-          </a:prstGeom>
-          <a:solidFill>
-            <a:srgbClr val="161B22"/>
-          </a:solidFill>
-          <a:ln w="15875">
-            <a:solidFill>
-              <a:srgbClr val="3FB950"/>
-            </a:solidFill>
-          </a:ln>
-          <a:effectLst/>
-        </p:spPr>
-        <p:style>
-          <a:lnRef idx="1">
-            <a:schemeClr val="accent1"/>
-          </a:lnRef>
-          <a:fillRef idx="3">
-            <a:schemeClr val="accent1"/>
-          </a:fillRef>
-          <a:effectRef idx="2">
-            <a:schemeClr val="accent1"/>
-          </a:effectRef>
-          <a:fontRef idx="minor">
-            <a:schemeClr val="lt1"/>
-          </a:fontRef>
-        </p:style>
-        <p:txBody>
-          <a:bodyPr rtlCol="0" anchor="ctr" wrap="square" lIns="201168" rIns="201168" tIns="146304"/>
-          <a:lstStyle/>
-          <a:p>
-            <a:pPr algn="l"/>
-            <a:r>
-              <a:rPr sz="1700" b="1">
-                <a:solidFill>
-                  <a:srgbClr val="3FB950"/>
-                </a:solidFill>
-                <a:latin typeface="Segoe UI"/>
-              </a:rPr>
-              <a:t>Eco: eliminado en full-dúplex</a:t>
-            </a:r>
-          </a:p>
-          <a:p>
-            <a:pPr algn="l">
-              <a:spcBef>
-                <a:spcPts val="400"/>
-              </a:spcBef>
-            </a:pPr>
-            <a:r>
-              <a:rPr sz="1300">
-                <a:solidFill>
-                  <a:srgbClr val="E6EDF3"/>
-                </a:solidFill>
-                <a:latin typeface="Segoe UI"/>
-              </a:rPr>
-              <a:t>AEC de hardware por el camino de comunicación. Como una llamada.</a:t>
-            </a:r>
-          </a:p>
-        </p:txBody>
-      </p:sp>
-      <p:sp>
-        <p:nvSpPr>
-          <p:cNvPr id="10" name="foot"/>
-          <p:cNvSpPr txBox="1"/>
-          <p:nvPr/>
-        </p:nvSpPr>
-        <p:spPr>
-          <a:xfrm>
-            <a:off x="640080" y="6419088"/>
-            <a:ext cx="10881360" cy="365760"/>
-          </a:xfrm>
-          <a:prstGeom prst="rect">
-            <a:avLst/>
-          </a:prstGeom>
-          <a:noFill/>
-        </p:spPr>
-        <p:txBody>
-          <a:bodyPr wrap="square" anchor="t">
-            <a:spAutoFit/>
-          </a:bodyPr>
-          <a:lstStyle/>
-          <a:p>
-            <a:pPr algn="l">
+              <a:t>Sin optimizar: se escucha el canal tal cual, con eco.</a:t>
+            </a:r>
+          </a:p>
+          <a:p>
+            <a:pPr algn="ctr">
               <a:spcAft>
                 <a:spcPts val="600"/>
               </a:spcAft>
             </a:pPr>
             <a:r>
-              <a:rPr sz="1000" b="0">
+              <a:rPr sz="1700" b="0">
                 <a:solidFill>
                   <a:srgbClr val="8B949E"/>
                 </a:solidFill>
                 <a:latin typeface="Segoe UI"/>
               </a:rPr>
-              <a:t>DSP · BT Analyzer  —  Teoría de la Información y Sistemas de Comunicación · UNAL</a:t>
+              <a:t>Con el cancelador: el eco desaparece.</a:t>
+            </a:r>
+          </a:p>
+          <a:p>
+            <a:pPr algn="ctr">
+              <a:spcAft>
+                <a:spcPts val="600"/>
+              </a:spcAft>
+            </a:pPr>
+            <a:r>
+              <a:rPr sz="1700" b="0">
+                <a:solidFill>
+                  <a:srgbClr val="8B949E"/>
+                </a:solidFill>
+                <a:latin typeface="Segoe UI"/>
+              </a:rPr>
+              <a:t>Canal degradado: aparece el ruido; el filtro lo baja y la corrección arregla los bits, y todo queda en el registro en vivo.</a:t>
             </a:r>
           </a:p>
         </p:txBody>
@@ -7492,20 +7511,347 @@
       </p:sp>
       <p:sp>
         <p:nvSpPr>
-          <p:cNvPr id="3" name="orb"/>
+          <p:cNvPr id="3" name="ic"/>
           <p:cNvSpPr/>
           <p:nvPr/>
         </p:nvSpPr>
         <p:spPr>
           <a:xfrm>
-            <a:off x="9875520" y="4389120"/>
-            <a:ext cx="2560320" cy="2560320"/>
-          </a:xfrm>
-          <a:prstGeom prst="ellipse">
+            <a:off x="9481413" y="2185416"/>
+            <a:ext cx="295351" cy="694944"/>
+          </a:xfrm>
+          <a:prstGeom prst="roundRect">
+            <a:avLst/>
+          </a:prstGeom>
+          <a:solidFill>
+            <a:srgbClr val="8B949E"/>
+          </a:solidFill>
+          <a:ln>
+            <a:noFill/>
+          </a:ln>
+          <a:effectLst/>
+        </p:spPr>
+        <p:style>
+          <a:lnRef idx="1">
+            <a:schemeClr val="accent1"/>
+          </a:lnRef>
+          <a:fillRef idx="3">
+            <a:schemeClr val="accent1"/>
+          </a:fillRef>
+          <a:effectRef idx="2">
+            <a:schemeClr val="accent1"/>
+          </a:effectRef>
+          <a:fontRef idx="minor">
+            <a:schemeClr val="lt1"/>
+          </a:fontRef>
+        </p:style>
+        <p:txBody>
+          <a:bodyPr rtlCol="0" anchor="ctr"/>
+          <a:lstStyle/>
+          <a:p>
+            <a:pPr algn="ctr"/>
+          </a:p>
+        </p:txBody>
+      </p:sp>
+      <p:sp>
+        <p:nvSpPr>
+          <p:cNvPr id="4" name="ic"/>
+          <p:cNvSpPr/>
+          <p:nvPr/>
+        </p:nvSpPr>
+        <p:spPr>
+          <a:xfrm>
+            <a:off x="9950500" y="1664208"/>
+            <a:ext cx="295351" cy="1216151"/>
+          </a:xfrm>
+          <a:prstGeom prst="roundRect">
+            <a:avLst/>
+          </a:prstGeom>
+          <a:solidFill>
+            <a:srgbClr val="58A6FF"/>
+          </a:solidFill>
+          <a:ln>
+            <a:noFill/>
+          </a:ln>
+          <a:effectLst/>
+        </p:spPr>
+        <p:style>
+          <a:lnRef idx="1">
+            <a:schemeClr val="accent1"/>
+          </a:lnRef>
+          <a:fillRef idx="3">
+            <a:schemeClr val="accent1"/>
+          </a:fillRef>
+          <a:effectRef idx="2">
+            <a:schemeClr val="accent1"/>
+          </a:effectRef>
+          <a:fontRef idx="minor">
+            <a:schemeClr val="lt1"/>
+          </a:fontRef>
+        </p:style>
+        <p:txBody>
+          <a:bodyPr rtlCol="0" anchor="ctr"/>
+          <a:lstStyle/>
+          <a:p>
+            <a:pPr algn="ctr"/>
+          </a:p>
+        </p:txBody>
+      </p:sp>
+      <p:sp>
+        <p:nvSpPr>
+          <p:cNvPr id="5" name="ic"/>
+          <p:cNvSpPr/>
+          <p:nvPr/>
+        </p:nvSpPr>
+        <p:spPr>
+          <a:xfrm>
+            <a:off x="10419588" y="1924812"/>
+            <a:ext cx="295351" cy="955547"/>
+          </a:xfrm>
+          <a:prstGeom prst="roundRect">
+            <a:avLst/>
+          </a:prstGeom>
+          <a:solidFill>
+            <a:srgbClr val="3FB950"/>
+          </a:solidFill>
+          <a:ln>
+            <a:noFill/>
+          </a:ln>
+          <a:effectLst/>
+        </p:spPr>
+        <p:style>
+          <a:lnRef idx="1">
+            <a:schemeClr val="accent1"/>
+          </a:lnRef>
+          <a:fillRef idx="3">
+            <a:schemeClr val="accent1"/>
+          </a:fillRef>
+          <a:effectRef idx="2">
+            <a:schemeClr val="accent1"/>
+          </a:effectRef>
+          <a:fontRef idx="minor">
+            <a:schemeClr val="lt1"/>
+          </a:fontRef>
+        </p:style>
+        <p:txBody>
+          <a:bodyPr rtlCol="0" anchor="ctr"/>
+          <a:lstStyle/>
+          <a:p>
+            <a:pPr algn="ctr"/>
+          </a:p>
+        </p:txBody>
+      </p:sp>
+      <p:sp>
+        <p:nvSpPr>
+          <p:cNvPr id="6" name="ic"/>
+          <p:cNvSpPr/>
+          <p:nvPr/>
+        </p:nvSpPr>
+        <p:spPr>
+          <a:xfrm>
+            <a:off x="10888675" y="1143000"/>
+            <a:ext cx="295351" cy="1737360"/>
+          </a:xfrm>
+          <a:prstGeom prst="roundRect">
+            <a:avLst/>
+          </a:prstGeom>
+          <a:solidFill>
+            <a:srgbClr val="D29922"/>
+          </a:solidFill>
+          <a:ln>
+            <a:noFill/>
+          </a:ln>
+          <a:effectLst/>
+        </p:spPr>
+        <p:style>
+          <a:lnRef idx="1">
+            <a:schemeClr val="accent1"/>
+          </a:lnRef>
+          <a:fillRef idx="3">
+            <a:schemeClr val="accent1"/>
+          </a:fillRef>
+          <a:effectRef idx="2">
+            <a:schemeClr val="accent1"/>
+          </a:effectRef>
+          <a:fontRef idx="minor">
+            <a:schemeClr val="lt1"/>
+          </a:fontRef>
+        </p:style>
+        <p:txBody>
+          <a:bodyPr rtlCol="0" anchor="ctr"/>
+          <a:lstStyle/>
+          <a:p>
+            <a:pPr algn="ctr"/>
+          </a:p>
+        </p:txBody>
+      </p:sp>
+      <p:sp>
+        <p:nvSpPr>
+          <p:cNvPr id="7" name="kick"/>
+          <p:cNvSpPr txBox="1"/>
+          <p:nvPr/>
+        </p:nvSpPr>
+        <p:spPr>
+          <a:xfrm>
+            <a:off x="685800" y="457200"/>
+            <a:ext cx="10789920" cy="457200"/>
+          </a:xfrm>
+          <a:prstGeom prst="rect">
             <a:avLst/>
           </a:prstGeom>
           <a:noFill/>
-          <a:ln w="44450">
+        </p:spPr>
+        <p:txBody>
+          <a:bodyPr wrap="square" anchor="t">
+            <a:spAutoFit/>
+          </a:bodyPr>
+          <a:lstStyle/>
+          <a:p>
+            <a:pPr algn="l">
+              <a:spcAft>
+                <a:spcPts val="600"/>
+              </a:spcAft>
+            </a:pPr>
+            <a:r>
+              <a:rPr sz="1300" b="1">
+                <a:solidFill>
+                  <a:srgbClr val="58A6FF"/>
+                </a:solidFill>
+                <a:latin typeface="Segoe UI"/>
+              </a:rPr>
+              <a:t>QUÉ TAN BIEN FUNCIONÓ</a:t>
+            </a:r>
+          </a:p>
+        </p:txBody>
+      </p:sp>
+      <p:sp>
+        <p:nvSpPr>
+          <p:cNvPr id="8" name="title"/>
+          <p:cNvSpPr txBox="1"/>
+          <p:nvPr/>
+        </p:nvSpPr>
+        <p:spPr>
+          <a:xfrm>
+            <a:off x="685800" y="932688"/>
+            <a:ext cx="10789920" cy="1554480"/>
+          </a:xfrm>
+          <a:prstGeom prst="rect">
+            <a:avLst/>
+          </a:prstGeom>
+          <a:noFill/>
+        </p:spPr>
+        <p:txBody>
+          <a:bodyPr wrap="square" anchor="t">
+            <a:spAutoFit/>
+          </a:bodyPr>
+          <a:lstStyle/>
+          <a:p>
+            <a:pPr algn="l">
+              <a:spcAft>
+                <a:spcPts val="600"/>
+              </a:spcAft>
+            </a:pPr>
+            <a:r>
+              <a:rPr sz="3000" b="1">
+                <a:solidFill>
+                  <a:srgbClr val="E6EDF3"/>
+                </a:solidFill>
+                <a:latin typeface="Segoe UI"/>
+              </a:rPr>
+              <a:t>Resultados medidos en los teléfonos</a:t>
+            </a:r>
+          </a:p>
+        </p:txBody>
+      </p:sp>
+      <p:sp>
+        <p:nvSpPr>
+          <p:cNvPr id="9" name="card"/>
+          <p:cNvSpPr/>
+          <p:nvPr/>
+        </p:nvSpPr>
+        <p:spPr>
+          <a:xfrm>
+            <a:off x="685800" y="2286000"/>
+            <a:ext cx="5349240" cy="1554480"/>
+          </a:xfrm>
+          <a:prstGeom prst="roundRect">
+            <a:avLst/>
+          </a:prstGeom>
+          <a:solidFill>
+            <a:srgbClr val="161B22"/>
+          </a:solidFill>
+          <a:ln w="15875">
+            <a:solidFill>
+              <a:srgbClr val="3FB950"/>
+            </a:solidFill>
+          </a:ln>
+          <a:effectLst/>
+        </p:spPr>
+        <p:style>
+          <a:lnRef idx="1">
+            <a:schemeClr val="accent1"/>
+          </a:lnRef>
+          <a:fillRef idx="3">
+            <a:schemeClr val="accent1"/>
+          </a:fillRef>
+          <a:effectRef idx="2">
+            <a:schemeClr val="accent1"/>
+          </a:effectRef>
+          <a:fontRef idx="minor">
+            <a:schemeClr val="lt1"/>
+          </a:fontRef>
+        </p:style>
+        <p:txBody>
+          <a:bodyPr rtlCol="0" anchor="ctr" wrap="square" lIns="182880" rIns="182880" tIns="146304"/>
+          <a:lstStyle/>
+          <a:p>
+            <a:pPr algn="ctr"/>
+            <a:r>
+              <a:rPr sz="1600" b="1">
+                <a:solidFill>
+                  <a:srgbClr val="3FB950"/>
+                </a:solidFill>
+                <a:latin typeface="Segoe UI"/>
+              </a:rPr>
+              <a:t>Retraso: entre 0,5 y 1 segundo, estable</a:t>
+            </a:r>
+          </a:p>
+          <a:p>
+            <a:pPr>
+              <a:spcBef>
+                <a:spcPts val="400"/>
+              </a:spcBef>
+            </a:pPr>
+            <a:r>
+              <a:rPr sz="1250">
+                <a:solidFill>
+                  <a:srgbClr val="E6EDF3"/>
+                </a:solidFill>
+                <a:latin typeface="Segoe UI"/>
+              </a:rPr>
+              <a:t>Antes crecía sin parar hasta 11 s. Ahora tiene un tope fijo.</a:t>
+            </a:r>
+          </a:p>
+        </p:txBody>
+      </p:sp>
+      <p:sp>
+        <p:nvSpPr>
+          <p:cNvPr id="10" name="card"/>
+          <p:cNvSpPr/>
+          <p:nvPr/>
+        </p:nvSpPr>
+        <p:spPr>
+          <a:xfrm>
+            <a:off x="6217920" y="2286000"/>
+            <a:ext cx="5349240" cy="1554480"/>
+          </a:xfrm>
+          <a:prstGeom prst="roundRect">
+            <a:avLst/>
+          </a:prstGeom>
+          <a:solidFill>
+            <a:srgbClr val="161B22"/>
+          </a:solidFill>
+          <a:ln w="15875">
             <a:solidFill>
               <a:srgbClr val="58A6FF"/>
             </a:solidFill>
@@ -7527,229 +7873,176 @@
           </a:fontRef>
         </p:style>
         <p:txBody>
-          <a:bodyPr rtlCol="0" anchor="ctr"/>
+          <a:bodyPr rtlCol="0" anchor="ctr" wrap="square" lIns="182880" rIns="182880" tIns="146304"/>
           <a:lstStyle/>
           <a:p>
             <a:pPr algn="ctr"/>
-          </a:p>
-        </p:txBody>
-      </p:sp>
-      <p:sp>
-        <p:nvSpPr>
-          <p:cNvPr id="4" name="kicker"/>
-          <p:cNvSpPr txBox="1"/>
-          <p:nvPr/>
-        </p:nvSpPr>
-        <p:spPr>
-          <a:xfrm>
-            <a:off x="640080" y="411480"/>
-            <a:ext cx="10881360" cy="457200"/>
-          </a:xfrm>
-          <a:prstGeom prst="rect">
-            <a:avLst/>
-          </a:prstGeom>
-          <a:noFill/>
-        </p:spPr>
-        <p:txBody>
-          <a:bodyPr wrap="square" anchor="t">
-            <a:spAutoFit/>
-          </a:bodyPr>
-          <a:lstStyle/>
-          <a:p>
-            <a:pPr algn="l">
-              <a:spcAft>
-                <a:spcPts val="600"/>
-              </a:spcAft>
-            </a:pPr>
-            <a:r>
-              <a:rPr sz="1300" b="1">
+            <a:r>
+              <a:rPr sz="1600" b="1">
                 <a:solidFill>
                   <a:srgbClr val="58A6FF"/>
                 </a:solidFill>
                 <a:latin typeface="Segoe UI"/>
               </a:rPr>
-              <a:t>PARA LLEVAR</a:t>
-            </a:r>
-          </a:p>
-        </p:txBody>
-      </p:sp>
-      <p:sp>
-        <p:nvSpPr>
-          <p:cNvPr id="5" name="title"/>
-          <p:cNvSpPr txBox="1"/>
-          <p:nvPr/>
-        </p:nvSpPr>
-        <p:spPr>
-          <a:xfrm>
-            <a:off x="640080" y="914400"/>
-            <a:ext cx="10881360" cy="1463040"/>
-          </a:xfrm>
-          <a:prstGeom prst="rect">
-            <a:avLst/>
-          </a:prstGeom>
-          <a:noFill/>
-        </p:spPr>
-        <p:txBody>
-          <a:bodyPr wrap="square" anchor="t">
-            <a:spAutoFit/>
-          </a:bodyPr>
-          <a:lstStyle/>
-          <a:p>
-            <a:pPr algn="l">
-              <a:spcAft>
-                <a:spcPts val="600"/>
-              </a:spcAft>
+              <a:t>Pérdida: 0% con buena señal</a:t>
+            </a:r>
+          </a:p>
+          <a:p>
+            <a:pPr>
+              <a:spcBef>
+                <a:spcPts val="400"/>
+              </a:spcBef>
             </a:pPr>
             <a:r>
-              <a:rPr sz="4000" b="1">
+              <a:rPr sz="1250">
                 <a:solidFill>
                   <a:srgbClr val="E6EDF3"/>
                 </a:solidFill>
                 <a:latin typeface="Segoe UI"/>
               </a:rPr>
-              <a:t>Cinco frases</a:t>
-            </a:r>
-          </a:p>
-        </p:txBody>
-      </p:sp>
-      <p:sp>
-        <p:nvSpPr>
-          <p:cNvPr id="6" name="body"/>
-          <p:cNvSpPr txBox="1"/>
-          <p:nvPr/>
-        </p:nvSpPr>
-        <p:spPr>
-          <a:xfrm>
-            <a:off x="640080" y="2148840"/>
-            <a:ext cx="10424160" cy="3931920"/>
-          </a:xfrm>
-          <a:prstGeom prst="rect">
-            <a:avLst/>
-          </a:prstGeom>
-          <a:noFill/>
-        </p:spPr>
-        <p:txBody>
-          <a:bodyPr wrap="square" anchor="t">
-            <a:spAutoFit/>
-          </a:bodyPr>
-          <a:lstStyle/>
-          <a:p>
-            <a:pPr algn="l">
-              <a:spcAft>
-                <a:spcPts val="600"/>
-              </a:spcAft>
-            </a:pPr>
-            <a:r>
-              <a:rPr sz="1900" b="0">
-                <a:solidFill>
-                  <a:srgbClr val="E6EDF3"/>
+              <a:t>Y sabemos por qué: Bluetooth reenvía solo lo dañado. La pérdida aparece al alejarse.</a:t>
+            </a:r>
+          </a:p>
+        </p:txBody>
+      </p:sp>
+      <p:sp>
+        <p:nvSpPr>
+          <p:cNvPr id="11" name="card"/>
+          <p:cNvSpPr/>
+          <p:nvPr/>
+        </p:nvSpPr>
+        <p:spPr>
+          <a:xfrm>
+            <a:off x="685800" y="4023360"/>
+            <a:ext cx="5349240" cy="1554480"/>
+          </a:xfrm>
+          <a:prstGeom prst="roundRect">
+            <a:avLst/>
+          </a:prstGeom>
+          <a:solidFill>
+            <a:srgbClr val="161B22"/>
+          </a:solidFill>
+          <a:ln w="15875">
+            <a:solidFill>
+              <a:srgbClr val="D29922"/>
+            </a:solidFill>
+          </a:ln>
+          <a:effectLst/>
+        </p:spPr>
+        <p:style>
+          <a:lnRef idx="1">
+            <a:schemeClr val="accent1"/>
+          </a:lnRef>
+          <a:fillRef idx="3">
+            <a:schemeClr val="accent1"/>
+          </a:fillRef>
+          <a:effectRef idx="2">
+            <a:schemeClr val="accent1"/>
+          </a:effectRef>
+          <a:fontRef idx="minor">
+            <a:schemeClr val="lt1"/>
+          </a:fontRef>
+        </p:style>
+        <p:txBody>
+          <a:bodyPr rtlCol="0" anchor="ctr" wrap="square" lIns="182880" rIns="182880" tIns="146304"/>
+          <a:lstStyle/>
+          <a:p>
+            <a:pPr algn="ctr"/>
+            <a:r>
+              <a:rPr sz="1600" b="1">
+                <a:solidFill>
+                  <a:srgbClr val="D29922"/>
                 </a:solidFill>
                 <a:latin typeface="Segoe UI"/>
               </a:rPr>
-              <a:t>1 · El canal ruidoso no se simula: se mide.</a:t>
-            </a:r>
-          </a:p>
-          <a:p>
-            <a:pPr algn="l">
-              <a:spcAft>
-                <a:spcPts val="600"/>
-              </a:spcAft>
+              <a:t>8 kB por segundo, por lado</a:t>
+            </a:r>
+          </a:p>
+          <a:p>
+            <a:pPr>
+              <a:spcBef>
+                <a:spcPts val="400"/>
+              </a:spcBef>
             </a:pPr>
             <a:r>
-              <a:rPr sz="1900" b="0">
+              <a:rPr sz="1250">
                 <a:solidFill>
                   <a:srgbClr val="E6EDF3"/>
                 </a:solidFill>
                 <a:latin typeface="Segoe UI"/>
               </a:rPr>
-              <a:t>2 · Comprimir la fuente y proteger el canal — la separación de Shannon — es la arquitectura de la app.</a:t>
-            </a:r>
-          </a:p>
-          <a:p>
-            <a:pPr algn="l">
-              <a:spcAft>
-                <a:spcPts val="600"/>
-              </a:spcAft>
-            </a:pPr>
-            <a:r>
-              <a:rPr sz="1900" b="0">
-                <a:solidFill>
-                  <a:srgbClr val="E6EDF3"/>
+              <a:t>4 veces menos que al principio. Y en silencio: nada, gracias al detector de voz.</a:t>
+            </a:r>
+          </a:p>
+        </p:txBody>
+      </p:sp>
+      <p:sp>
+        <p:nvSpPr>
+          <p:cNvPr id="12" name="card"/>
+          <p:cNvSpPr/>
+          <p:nvPr/>
+        </p:nvSpPr>
+        <p:spPr>
+          <a:xfrm>
+            <a:off x="6217920" y="4023360"/>
+            <a:ext cx="5349240" cy="1554480"/>
+          </a:xfrm>
+          <a:prstGeom prst="roundRect">
+            <a:avLst/>
+          </a:prstGeom>
+          <a:solidFill>
+            <a:srgbClr val="161B22"/>
+          </a:solidFill>
+          <a:ln w="15875">
+            <a:solidFill>
+              <a:srgbClr val="3FB950"/>
+            </a:solidFill>
+          </a:ln>
+          <a:effectLst/>
+        </p:spPr>
+        <p:style>
+          <a:lnRef idx="1">
+            <a:schemeClr val="accent1"/>
+          </a:lnRef>
+          <a:fillRef idx="3">
+            <a:schemeClr val="accent1"/>
+          </a:fillRef>
+          <a:effectRef idx="2">
+            <a:schemeClr val="accent1"/>
+          </a:effectRef>
+          <a:fontRef idx="minor">
+            <a:schemeClr val="lt1"/>
+          </a:fontRef>
+        </p:style>
+        <p:txBody>
+          <a:bodyPr rtlCol="0" anchor="ctr" wrap="square" lIns="182880" rIns="182880" tIns="146304"/>
+          <a:lstStyle/>
+          <a:p>
+            <a:pPr algn="ctr"/>
+            <a:r>
+              <a:rPr sz="1600" b="1">
+                <a:solidFill>
+                  <a:srgbClr val="3FB950"/>
                 </a:solidFill>
                 <a:latin typeface="Segoe UI"/>
               </a:rPr>
-              <a:t>3 · En tiempo real, el consumidor debe ser al menos tan rápido como el productor. Lo demás se negocia.</a:t>
-            </a:r>
-          </a:p>
-          <a:p>
-            <a:pPr algn="l">
-              <a:spcAft>
-                <a:spcPts val="600"/>
-              </a:spcAft>
+              <a:t>Eco: eliminado hablando de corrido</a:t>
+            </a:r>
+          </a:p>
+          <a:p>
+            <a:pPr>
+              <a:spcBef>
+                <a:spcPts val="400"/>
+              </a:spcBef>
             </a:pPr>
             <a:r>
-              <a:rPr sz="1900" b="0">
+              <a:rPr sz="1250">
                 <a:solidFill>
                   <a:srgbClr val="E6EDF3"/>
                 </a:solidFill>
                 <a:latin typeface="Segoe UI"/>
               </a:rPr>
-              <a:t>4 · El eco se resolvió con la infraestructura correcta, no con más matemática.</a:t>
-            </a:r>
-          </a:p>
-          <a:p>
-            <a:pPr algn="l">
-              <a:spcAft>
-                <a:spcPts val="600"/>
-              </a:spcAft>
-            </a:pPr>
-            <a:r>
-              <a:rPr sz="1900" b="1">
-                <a:solidFill>
-                  <a:srgbClr val="58A6FF"/>
-                </a:solidFill>
-                <a:latin typeface="Segoe UI"/>
-              </a:rPr>
-              <a:t>5 · Retiramos tres técnicas con evidencia. Saber quitar también es ingeniería.</a:t>
-            </a:r>
-          </a:p>
-        </p:txBody>
-      </p:sp>
-      <p:sp>
-        <p:nvSpPr>
-          <p:cNvPr id="7" name="foot"/>
-          <p:cNvSpPr txBox="1"/>
-          <p:nvPr/>
-        </p:nvSpPr>
-        <p:spPr>
-          <a:xfrm>
-            <a:off x="640080" y="6419088"/>
-            <a:ext cx="10881360" cy="365760"/>
-          </a:xfrm>
-          <a:prstGeom prst="rect">
-            <a:avLst/>
-          </a:prstGeom>
-          <a:noFill/>
-        </p:spPr>
-        <p:txBody>
-          <a:bodyPr wrap="square" anchor="t">
-            <a:spAutoFit/>
-          </a:bodyPr>
-          <a:lstStyle/>
-          <a:p>
-            <a:pPr algn="l">
-              <a:spcAft>
-                <a:spcPts val="600"/>
-              </a:spcAft>
-            </a:pPr>
-            <a:r>
-              <a:rPr sz="1000" b="0">
-                <a:solidFill>
-                  <a:srgbClr val="8B949E"/>
-                </a:solidFill>
-                <a:latin typeface="Segoe UI"/>
-              </a:rPr>
-              <a:t>DSP · BT Analyzer  —  Teoría de la Información y Sistemas de Comunicación · UNAL</a:t>
+              <a:t>Usando el cancelador del propio teléfono, como una llamada normal.</a:t>
             </a:r>
           </a:p>
         </p:txBody>
@@ -7830,20 +8123,46 @@
       </p:sp>
       <p:sp>
         <p:nvSpPr>
-          <p:cNvPr id="3" name="orb"/>
+          <p:cNvPr id="3" name="ic"/>
           <p:cNvSpPr/>
           <p:nvPr/>
         </p:nvSpPr>
         <p:spPr>
           <a:xfrm>
-            <a:off x="4297680" y="1371600"/>
-            <a:ext cx="3657600" cy="3657600"/>
-          </a:xfrm>
-          <a:prstGeom prst="ellipse">
-            <a:avLst/>
-          </a:prstGeom>
+            <a:off x="6099048" y="1097280"/>
+            <a:ext cx="221284" cy="1828800"/>
+          </a:xfrm>
+          <a:custGeom>
+            <a:avLst/>
+            <a:gdLst/>
+            <a:ahLst/>
+            <a:cxnLst/>
+            <a:rect l="l" t="t" r="r" b="b"/>
+            <a:pathLst>
+              <a:path w="221284" h="1828800">
+                <a:moveTo>
+                  <a:pt x="0" y="0"/>
+                </a:moveTo>
+                <a:lnTo>
+                  <a:pt x="221284" y="457200"/>
+                </a:lnTo>
+                <a:lnTo>
+                  <a:pt x="0" y="1828800"/>
+                </a:lnTo>
+                <a:lnTo>
+                  <a:pt x="221284" y="1371600"/>
+                </a:lnTo>
+                <a:lnTo>
+                  <a:pt x="0" y="0"/>
+                </a:lnTo>
+                <a:lnTo>
+                  <a:pt x="0" y="1828800"/>
+                </a:lnTo>
+              </a:path>
+            </a:pathLst>
+          </a:custGeom>
           <a:noFill/>
-          <a:ln w="44450">
+          <a:ln w="63500">
             <a:solidFill>
               <a:srgbClr val="58A6FF"/>
             </a:solidFill>
@@ -7874,58 +8193,14 @@
       </p:sp>
       <p:sp>
         <p:nvSpPr>
-          <p:cNvPr id="4" name="orb2"/>
-          <p:cNvSpPr/>
-          <p:nvPr/>
-        </p:nvSpPr>
-        <p:spPr>
-          <a:xfrm>
-            <a:off x="5120640" y="2194560"/>
-            <a:ext cx="2011680" cy="2011680"/>
-          </a:xfrm>
-          <a:prstGeom prst="ellipse">
-            <a:avLst/>
-          </a:prstGeom>
-          <a:solidFill>
-            <a:srgbClr val="1B2638"/>
-          </a:solidFill>
-          <a:ln>
-            <a:noFill/>
-          </a:ln>
-          <a:effectLst/>
-        </p:spPr>
-        <p:style>
-          <a:lnRef idx="1">
-            <a:schemeClr val="accent1"/>
-          </a:lnRef>
-          <a:fillRef idx="3">
-            <a:schemeClr val="accent1"/>
-          </a:fillRef>
-          <a:effectRef idx="2">
-            <a:schemeClr val="accent1"/>
-          </a:effectRef>
-          <a:fontRef idx="minor">
-            <a:schemeClr val="lt1"/>
-          </a:fontRef>
-        </p:style>
-        <p:txBody>
-          <a:bodyPr rtlCol="0" anchor="ctr"/>
-          <a:lstStyle/>
-          <a:p>
-            <a:pPr algn="ctr"/>
-          </a:p>
-        </p:txBody>
-      </p:sp>
-      <p:sp>
-        <p:nvSpPr>
-          <p:cNvPr id="5" name="title"/>
+          <p:cNvPr id="4" name="tx"/>
           <p:cNvSpPr txBox="1"/>
           <p:nvPr/>
         </p:nvSpPr>
         <p:spPr>
           <a:xfrm>
-            <a:off x="640080" y="2834640"/>
-            <a:ext cx="10881360" cy="1188720"/>
+            <a:off x="685800" y="3200400"/>
+            <a:ext cx="10789920" cy="1097280"/>
           </a:xfrm>
           <a:prstGeom prst="rect">
             <a:avLst/>
@@ -7944,7 +8219,7 @@
               </a:spcAft>
             </a:pPr>
             <a:r>
-              <a:rPr sz="5400" b="1">
+              <a:rPr sz="4800" b="1">
                 <a:solidFill>
                   <a:srgbClr val="E6EDF3"/>
                 </a:solidFill>
@@ -7957,14 +8232,14 @@
       </p:sp>
       <p:sp>
         <p:nvSpPr>
-          <p:cNvPr id="6" name="body"/>
+          <p:cNvPr id="5" name="tx"/>
           <p:cNvSpPr txBox="1"/>
           <p:nvPr/>
         </p:nvSpPr>
         <p:spPr>
           <a:xfrm>
-            <a:off x="640080" y="4206240"/>
-            <a:ext cx="10881360" cy="731520"/>
+            <a:off x="685800" y="4480560"/>
+            <a:ext cx="10789920" cy="914400"/>
           </a:xfrm>
           <a:prstGeom prst="rect">
             <a:avLst/>
@@ -7976,6 +8251,22 @@
             <a:spAutoFit/>
           </a:bodyPr>
           <a:lstStyle/>
+          <a:p>
+            <a:pPr algn="ctr">
+              <a:spcAft>
+                <a:spcPts val="300"/>
+              </a:spcAft>
+            </a:pPr>
+            <a:r>
+              <a:rPr sz="1500" b="0">
+                <a:solidFill>
+                  <a:srgbClr val="8B949E"/>
+                </a:solidFill>
+                <a:latin typeface="Segoe UI"/>
+              </a:rPr>
+              <a:t>Oscar Javier Saavedra Montero</a:t>
+            </a:r>
+          </a:p>
           <a:p>
             <a:pPr algn="ctr">
               <a:spcAft>
@@ -7983,52 +8274,13 @@
               </a:spcAft>
             </a:pPr>
             <a:r>
-              <a:rPr sz="1600" b="0">
+              <a:rPr sz="1500" b="0">
                 <a:solidFill>
                   <a:srgbClr val="58A6FF"/>
                 </a:solidFill>
                 <a:latin typeface="Segoe UI"/>
               </a:rPr>
               <a:t>github.com/OscarSapiensunal/TeoInfo-Proyect</a:t>
-            </a:r>
-          </a:p>
-        </p:txBody>
-      </p:sp>
-      <p:sp>
-        <p:nvSpPr>
-          <p:cNvPr id="7" name="foot"/>
-          <p:cNvSpPr txBox="1"/>
-          <p:nvPr/>
-        </p:nvSpPr>
-        <p:spPr>
-          <a:xfrm>
-            <a:off x="640080" y="6419088"/>
-            <a:ext cx="10881360" cy="365760"/>
-          </a:xfrm>
-          <a:prstGeom prst="rect">
-            <a:avLst/>
-          </a:prstGeom>
-          <a:noFill/>
-        </p:spPr>
-        <p:txBody>
-          <a:bodyPr wrap="square" anchor="t">
-            <a:spAutoFit/>
-          </a:bodyPr>
-          <a:lstStyle/>
-          <a:p>
-            <a:pPr algn="l">
-              <a:spcAft>
-                <a:spcPts val="600"/>
-              </a:spcAft>
-            </a:pPr>
-            <a:r>
-              <a:rPr sz="1000" b="0">
-                <a:solidFill>
-                  <a:srgbClr val="8B949E"/>
-                </a:solidFill>
-                <a:latin typeface="Segoe UI"/>
-              </a:rPr>
-              <a:t>DSP · BT Analyzer  —  Teoría de la Información y Sistemas de Comunicación · UNAL</a:t>
             </a:r>
           </a:p>
         </p:txBody>
@@ -8109,20 +8361,61 @@
       </p:sp>
       <p:sp>
         <p:nvSpPr>
-          <p:cNvPr id="3" name="orb"/>
+          <p:cNvPr id="3" name="kick"/>
+          <p:cNvSpPr txBox="1"/>
+          <p:nvPr/>
+        </p:nvSpPr>
+        <p:spPr>
+          <a:xfrm>
+            <a:off x="685800" y="457200"/>
+            <a:ext cx="10789920" cy="457200"/>
+          </a:xfrm>
+          <a:prstGeom prst="rect">
+            <a:avLst/>
+          </a:prstGeom>
+          <a:noFill/>
+        </p:spPr>
+        <p:txBody>
+          <a:bodyPr wrap="square" anchor="t">
+            <a:spAutoFit/>
+          </a:bodyPr>
+          <a:lstStyle/>
+          <a:p>
+            <a:pPr algn="l">
+              <a:spcAft>
+                <a:spcPts val="600"/>
+              </a:spcAft>
+            </a:pPr>
+            <a:r>
+              <a:rPr sz="1300" b="1">
+                <a:solidFill>
+                  <a:srgbClr val="58A6FF"/>
+                </a:solidFill>
+                <a:latin typeface="Segoe UI"/>
+              </a:rPr>
+              <a:t>LA APLICACIÓN EN FUNCIONAMIENTO</a:t>
+            </a:r>
+          </a:p>
+        </p:txBody>
+      </p:sp>
+      <p:sp>
+        <p:nvSpPr>
+          <p:cNvPr id="4" name="videoframe"/>
           <p:cNvSpPr/>
           <p:nvPr/>
         </p:nvSpPr>
         <p:spPr>
           <a:xfrm>
-            <a:off x="-2011680" y="-2194560"/>
-            <a:ext cx="7315200" cy="7315200"/>
-          </a:xfrm>
-          <a:prstGeom prst="ellipse">
-            <a:avLst/>
-          </a:prstGeom>
-          <a:noFill/>
-          <a:ln w="44450">
+            <a:off x="2194560" y="1371600"/>
+            <a:ext cx="7772400" cy="4206240"/>
+          </a:xfrm>
+          <a:prstGeom prst="roundRect">
+            <a:avLst/>
+          </a:prstGeom>
+          <a:solidFill>
+            <a:srgbClr val="161B22"/>
+          </a:solidFill>
+          <a:ln w="19050">
             <a:solidFill>
               <a:srgbClr val="58A6FF"/>
             </a:solidFill>
@@ -8153,20 +8446,38 @@
       </p:sp>
       <p:sp>
         <p:nvSpPr>
-          <p:cNvPr id="4" name="orb2"/>
+          <p:cNvPr id="5" name="ic"/>
           <p:cNvSpPr/>
           <p:nvPr/>
         </p:nvSpPr>
         <p:spPr>
           <a:xfrm>
-            <a:off x="365760" y="182880"/>
-            <a:ext cx="2377440" cy="2377440"/>
-          </a:xfrm>
-          <a:prstGeom prst="ellipse">
-            <a:avLst/>
-          </a:prstGeom>
+            <a:off x="5738774" y="2697480"/>
+            <a:ext cx="854964" cy="1005840"/>
+          </a:xfrm>
+          <a:custGeom>
+            <a:avLst/>
+            <a:gdLst/>
+            <a:ahLst/>
+            <a:cxnLst/>
+            <a:rect l="l" t="t" r="r" b="b"/>
+            <a:pathLst>
+              <a:path w="854964" h="1005840">
+                <a:moveTo>
+                  <a:pt x="0" y="0"/>
+                </a:moveTo>
+                <a:lnTo>
+                  <a:pt x="854964" y="502920"/>
+                </a:lnTo>
+                <a:lnTo>
+                  <a:pt x="0" y="1005840"/>
+                </a:lnTo>
+                <a:close/>
+              </a:path>
+            </a:pathLst>
+          </a:custGeom>
           <a:solidFill>
-            <a:srgbClr val="1B2638"/>
+            <a:srgbClr val="58A6FF"/>
           </a:solidFill>
           <a:ln>
             <a:noFill/>
@@ -8197,14 +8508,14 @@
       </p:sp>
       <p:sp>
         <p:nvSpPr>
-          <p:cNvPr id="5" name="kicker"/>
+          <p:cNvPr id="6" name="tx"/>
           <p:cNvSpPr txBox="1"/>
           <p:nvPr/>
         </p:nvSpPr>
         <p:spPr>
           <a:xfrm>
-            <a:off x="640080" y="411480"/>
-            <a:ext cx="10881360" cy="457200"/>
+            <a:off x="2194560" y="4892040"/>
+            <a:ext cx="7772400" cy="548640"/>
           </a:xfrm>
           <a:prstGeom prst="rect">
             <a:avLst/>
@@ -8217,207 +8528,19 @@
           </a:bodyPr>
           <a:lstStyle/>
           <a:p>
-            <a:pPr algn="l">
+            <a:pPr algn="ctr">
               <a:spcAft>
                 <a:spcPts val="600"/>
               </a:spcAft>
             </a:pPr>
             <a:r>
-              <a:rPr sz="1300" b="1">
-                <a:solidFill>
-                  <a:srgbClr val="58A6FF"/>
+              <a:rPr sz="1300" b="0">
+                <a:solidFill>
+                  <a:srgbClr val="8B949E"/>
                 </a:solidFill>
                 <a:latin typeface="Segoe UI"/>
               </a:rPr>
-              <a:t>EL CANAL</a:t>
-            </a:r>
-          </a:p>
-        </p:txBody>
-      </p:sp>
-      <p:sp>
-        <p:nvSpPr>
-          <p:cNvPr id="6" name="title"/>
-          <p:cNvSpPr txBox="1"/>
-          <p:nvPr/>
-        </p:nvSpPr>
-        <p:spPr>
-          <a:xfrm>
-            <a:off x="640080" y="914400"/>
-            <a:ext cx="10881360" cy="1463040"/>
-          </a:xfrm>
-          <a:prstGeom prst="rect">
-            <a:avLst/>
-          </a:prstGeom>
-          <a:noFill/>
-        </p:spPr>
-        <p:txBody>
-          <a:bodyPr wrap="square" anchor="t">
-            <a:spAutoFit/>
-          </a:bodyPr>
-          <a:lstStyle/>
-          <a:p>
-            <a:pPr algn="l">
-              <a:spcAft>
-                <a:spcPts val="600"/>
-              </a:spcAft>
-            </a:pPr>
-            <a:r>
-              <a:rPr sz="3600" b="1">
-                <a:solidFill>
-                  <a:srgbClr val="E6EDF3"/>
-                </a:solidFill>
-                <a:latin typeface="Segoe UI"/>
-              </a:rPr>
-              <a:t>Bluetooth: la tecnología que damos por sentada</a:t>
-            </a:r>
-          </a:p>
-        </p:txBody>
-      </p:sp>
-      <p:sp>
-        <p:nvSpPr>
-          <p:cNvPr id="7" name="big"/>
-          <p:cNvSpPr txBox="1"/>
-          <p:nvPr/>
-        </p:nvSpPr>
-        <p:spPr>
-          <a:xfrm>
-            <a:off x="640080" y="2103120"/>
-            <a:ext cx="5943600" cy="2011680"/>
-          </a:xfrm>
-          <a:prstGeom prst="rect">
-            <a:avLst/>
-          </a:prstGeom>
-          <a:noFill/>
-        </p:spPr>
-        <p:txBody>
-          <a:bodyPr wrap="square" anchor="t">
-            <a:spAutoFit/>
-          </a:bodyPr>
-          <a:lstStyle/>
-          <a:p>
-            <a:pPr algn="l">
-              <a:spcAft>
-                <a:spcPts val="600"/>
-              </a:spcAft>
-            </a:pPr>
-            <a:r>
-              <a:rPr sz="8800" b="1">
-                <a:solidFill>
-                  <a:srgbClr val="58A6FF"/>
-                </a:solidFill>
-                <a:latin typeface="Segoe UI Black"/>
-              </a:rPr>
-              <a:t>2.4 GHz</a:t>
-            </a:r>
-          </a:p>
-        </p:txBody>
-      </p:sp>
-      <p:sp>
-        <p:nvSpPr>
-          <p:cNvPr id="8" name="body"/>
-          <p:cNvSpPr txBox="1"/>
-          <p:nvPr/>
-        </p:nvSpPr>
-        <p:spPr>
-          <a:xfrm>
-            <a:off x="6675120" y="2286000"/>
-            <a:ext cx="4846320" cy="3108960"/>
-          </a:xfrm>
-          <a:prstGeom prst="rect">
-            <a:avLst/>
-          </a:prstGeom>
-          <a:noFill/>
-        </p:spPr>
-        <p:txBody>
-          <a:bodyPr wrap="square" anchor="t">
-            <a:spAutoFit/>
-          </a:bodyPr>
-          <a:lstStyle/>
-          <a:p>
-            <a:pPr algn="l">
-              <a:spcAft>
-                <a:spcPts val="600"/>
-              </a:spcAft>
-            </a:pPr>
-            <a:r>
-              <a:rPr sz="1700" b="0">
-                <a:solidFill>
-                  <a:srgbClr val="E6EDF3"/>
-                </a:solidFill>
-                <a:latin typeface="Segoe UI"/>
-              </a:rPr>
-              <a:t>La misma banda del Wi-Fi y del microondas: interferencia real, desvanecimiento real.</a:t>
-            </a:r>
-          </a:p>
-          <a:p>
-            <a:pPr algn="l">
-              <a:spcAft>
-                <a:spcPts val="600"/>
-              </a:spcAft>
-            </a:pPr>
-            <a:r>
-              <a:rPr sz="1700" b="0">
-                <a:solidFill>
-                  <a:srgbClr val="E6EDF3"/>
-                </a:solidFill>
-                <a:latin typeface="Segoe UI"/>
-              </a:rPr>
-              <a:t>RFCOMM: un cable serial invisible entre dos teléfonos — bytes en orden, ida y vuelta.</a:t>
-            </a:r>
-          </a:p>
-          <a:p>
-            <a:pPr algn="l">
-              <a:spcAft>
-                <a:spcPts val="600"/>
-              </a:spcAft>
-            </a:pPr>
-            <a:r>
-              <a:rPr sz="1700" b="0">
-                <a:solidFill>
-                  <a:srgbClr val="8B949E"/>
-                </a:solidFill>
-                <a:latin typeface="Segoe UI"/>
-              </a:rPr>
-              <a:t>El chip se defiende solo: salta de frecuencia 1 600 veces por segundo (AFH).</a:t>
-            </a:r>
-          </a:p>
-        </p:txBody>
-      </p:sp>
-      <p:sp>
-        <p:nvSpPr>
-          <p:cNvPr id="9" name="foot"/>
-          <p:cNvSpPr txBox="1"/>
-          <p:nvPr/>
-        </p:nvSpPr>
-        <p:spPr>
-          <a:xfrm>
-            <a:off x="640080" y="6419088"/>
-            <a:ext cx="10881360" cy="365760"/>
-          </a:xfrm>
-          <a:prstGeom prst="rect">
-            <a:avLst/>
-          </a:prstGeom>
-          <a:noFill/>
-        </p:spPr>
-        <p:txBody>
-          <a:bodyPr wrap="square" anchor="t">
-            <a:spAutoFit/>
-          </a:bodyPr>
-          <a:lstStyle/>
-          <a:p>
-            <a:pPr algn="l">
-              <a:spcAft>
-                <a:spcPts val="600"/>
-              </a:spcAft>
-            </a:pPr>
-            <a:r>
-              <a:rPr sz="1000" b="0">
-                <a:solidFill>
-                  <a:srgbClr val="8B949E"/>
-                </a:solidFill>
-                <a:latin typeface="Segoe UI"/>
-              </a:rPr>
-              <a:t>DSP · BT Analyzer  —  Teoría de la Información y Sistemas de Comunicación · UNAL</a:t>
+              <a:t>Reemplazar por el video corto de la demostración (o hacer la demo en vivo aquí)</a:t>
             </a:r>
           </a:p>
         </p:txBody>
@@ -8498,22 +8621,48 @@
       </p:sp>
       <p:sp>
         <p:nvSpPr>
-          <p:cNvPr id="3" name="orb"/>
+          <p:cNvPr id="3" name="ic"/>
           <p:cNvSpPr/>
           <p:nvPr/>
         </p:nvSpPr>
         <p:spPr>
           <a:xfrm>
-            <a:off x="9326880" y="4206240"/>
-            <a:ext cx="3108960" cy="3108960"/>
-          </a:xfrm>
-          <a:prstGeom prst="ellipse">
-            <a:avLst/>
-          </a:prstGeom>
+            <a:off x="10424160" y="914399"/>
+            <a:ext cx="287670" cy="2377440"/>
+          </a:xfrm>
+          <a:custGeom>
+            <a:avLst/>
+            <a:gdLst/>
+            <a:ahLst/>
+            <a:cxnLst/>
+            <a:rect l="l" t="t" r="r" b="b"/>
+            <a:pathLst>
+              <a:path w="287670" h="2377440">
+                <a:moveTo>
+                  <a:pt x="0" y="0"/>
+                </a:moveTo>
+                <a:lnTo>
+                  <a:pt x="287670" y="594361"/>
+                </a:lnTo>
+                <a:lnTo>
+                  <a:pt x="0" y="2377440"/>
+                </a:lnTo>
+                <a:lnTo>
+                  <a:pt x="287670" y="1783081"/>
+                </a:lnTo>
+                <a:lnTo>
+                  <a:pt x="0" y="0"/>
+                </a:lnTo>
+                <a:lnTo>
+                  <a:pt x="0" y="2377440"/>
+                </a:lnTo>
+              </a:path>
+            </a:pathLst>
+          </a:custGeom>
           <a:noFill/>
-          <a:ln w="44450">
+          <a:ln w="63500">
             <a:solidFill>
-              <a:srgbClr val="D29922"/>
+              <a:srgbClr val="58A6FF"/>
             </a:solidFill>
           </a:ln>
           <a:effectLst/>
@@ -8542,58 +8691,14 @@
       </p:sp>
       <p:sp>
         <p:nvSpPr>
-          <p:cNvPr id="4" name="orb2"/>
-          <p:cNvSpPr/>
-          <p:nvPr/>
-        </p:nvSpPr>
-        <p:spPr>
-          <a:xfrm>
-            <a:off x="10241280" y="5120640"/>
-            <a:ext cx="1280160" cy="1280160"/>
-          </a:xfrm>
-          <a:prstGeom prst="ellipse">
-            <a:avLst/>
-          </a:prstGeom>
-          <a:solidFill>
-            <a:srgbClr val="1B2638"/>
-          </a:solidFill>
-          <a:ln>
-            <a:noFill/>
-          </a:ln>
-          <a:effectLst/>
-        </p:spPr>
-        <p:style>
-          <a:lnRef idx="1">
-            <a:schemeClr val="accent1"/>
-          </a:lnRef>
-          <a:fillRef idx="3">
-            <a:schemeClr val="accent1"/>
-          </a:fillRef>
-          <a:effectRef idx="2">
-            <a:schemeClr val="accent1"/>
-          </a:effectRef>
-          <a:fontRef idx="minor">
-            <a:schemeClr val="lt1"/>
-          </a:fontRef>
-        </p:style>
-        <p:txBody>
-          <a:bodyPr rtlCol="0" anchor="ctr"/>
-          <a:lstStyle/>
-          <a:p>
-            <a:pPr algn="ctr"/>
-          </a:p>
-        </p:txBody>
-      </p:sp>
-      <p:sp>
-        <p:nvSpPr>
-          <p:cNvPr id="5" name="kicker"/>
+          <p:cNvPr id="4" name="kick"/>
           <p:cNvSpPr txBox="1"/>
           <p:nvPr/>
         </p:nvSpPr>
         <p:spPr>
           <a:xfrm>
-            <a:off x="640080" y="411480"/>
-            <a:ext cx="10881360" cy="457200"/>
+            <a:off x="685800" y="457200"/>
+            <a:ext cx="10789920" cy="457200"/>
           </a:xfrm>
           <a:prstGeom prst="rect">
             <a:avLst/>
@@ -8618,21 +8723,21 @@
                 </a:solidFill>
                 <a:latin typeface="Segoe UI"/>
               </a:rPr>
-              <a:t>¿POR QUÉ EXISTE ESTA APP?</a:t>
-            </a:r>
-          </a:p>
-        </p:txBody>
-      </p:sp>
-      <p:sp>
-        <p:nvSpPr>
-          <p:cNvPr id="6" name="title"/>
+              <a:t>LA TECNOLOGÍA DETRÁS</a:t>
+            </a:r>
+          </a:p>
+        </p:txBody>
+      </p:sp>
+      <p:sp>
+        <p:nvSpPr>
+          <p:cNvPr id="5" name="tx"/>
           <p:cNvSpPr txBox="1"/>
           <p:nvPr/>
         </p:nvSpPr>
         <p:spPr>
           <a:xfrm>
-            <a:off x="640080" y="914400"/>
-            <a:ext cx="10881360" cy="1463040"/>
+            <a:off x="685800" y="1280160"/>
+            <a:ext cx="7772400" cy="2103120"/>
           </a:xfrm>
           <a:prstGeom prst="rect">
             <a:avLst/>
@@ -8651,39 +8756,15 @@
               </a:spcAft>
             </a:pPr>
             <a:r>
-              <a:rPr sz="3800" b="1">
+              <a:rPr sz="6000" b="1">
                 <a:solidFill>
                   <a:srgbClr val="E6EDF3"/>
                 </a:solidFill>
                 <a:latin typeface="Segoe UI"/>
               </a:rPr>
-              <a:t>Los cursos simulan el canal ruidoso.
-Nosotros lo medimos.</a:t>
-            </a:r>
-          </a:p>
-        </p:txBody>
-      </p:sp>
-      <p:sp>
-        <p:nvSpPr>
-          <p:cNvPr id="7" name="body"/>
-          <p:cNvSpPr txBox="1"/>
-          <p:nvPr/>
-        </p:nvSpPr>
-        <p:spPr>
-          <a:xfrm>
-            <a:off x="640080" y="3017520"/>
-            <a:ext cx="8229600" cy="2377440"/>
-          </a:xfrm>
-          <a:prstGeom prst="rect">
-            <a:avLst/>
-          </a:prstGeom>
-          <a:noFill/>
-        </p:spPr>
-        <p:txBody>
-          <a:bodyPr wrap="square" anchor="t">
-            <a:spAutoFit/>
-          </a:bodyPr>
-          <a:lstStyle/>
+              <a:t>Bluetooth.</a:t>
+            </a:r>
+          </a:p>
           <a:p>
             <a:pPr algn="l">
               <a:spcAft>
@@ -8691,13 +8772,52 @@
               </a:spcAft>
             </a:pPr>
             <a:r>
-              <a:rPr sz="2000" b="0">
-                <a:solidFill>
-                  <a:srgbClr val="E6EDF3"/>
+              <a:rPr sz="3400" b="1">
+                <a:solidFill>
+                  <a:srgbClr val="58A6FF"/>
                 </a:solidFill>
                 <a:latin typeface="Segoe UI"/>
               </a:rPr>
-              <a:t>El ruido no se genera con una función de MATLAB: se recoge del aire.</a:t>
+              <a:t>Banda de 2.4 GHz.</a:t>
+            </a:r>
+          </a:p>
+        </p:txBody>
+      </p:sp>
+      <p:sp>
+        <p:nvSpPr>
+          <p:cNvPr id="6" name="tx"/>
+          <p:cNvSpPr txBox="1"/>
+          <p:nvPr/>
+        </p:nvSpPr>
+        <p:spPr>
+          <a:xfrm>
+            <a:off x="685800" y="3840480"/>
+            <a:ext cx="9601200" cy="2377440"/>
+          </a:xfrm>
+          <a:prstGeom prst="rect">
+            <a:avLst/>
+          </a:prstGeom>
+          <a:noFill/>
+        </p:spPr>
+        <p:txBody>
+          <a:bodyPr wrap="square" anchor="t">
+            <a:spAutoFit/>
+          </a:bodyPr>
+          <a:lstStyle/>
+          <a:p>
+            <a:pPr algn="l">
+              <a:spcAft>
+                <a:spcPts val="1000"/>
+              </a:spcAft>
+            </a:pPr>
+            <a:r>
+              <a:rPr sz="1900" b="0">
+                <a:solidFill>
+                  <a:srgbClr val="E6EDF3"/>
+                </a:solidFill>
+                <a:latin typeface="Segoe UI"/>
+              </a:rPr>
+              <a:t>Casi siempre lo usamos solo para los audífonos y olvidamos que es un canal de comunicación completo.</a:t>
             </a:r>
           </a:p>
           <a:p>
@@ -8707,68 +8827,13 @@
               </a:spcAft>
             </a:pPr>
             <a:r>
-              <a:rPr sz="2000" b="0">
-                <a:solidFill>
-                  <a:srgbClr val="E6EDF3"/>
+              <a:rPr sz="1900" b="0">
+                <a:solidFill>
+                  <a:srgbClr val="8B949E"/>
                 </a:solidFill>
                 <a:latin typeface="Segoe UI"/>
               </a:rPr>
-              <a:t>Dos celulares cualquiera se convierten en un laboratorio de comunicaciones portátil,</a:t>
-            </a:r>
-          </a:p>
-          <a:p>
-            <a:pPr algn="l">
-              <a:spcAft>
-                <a:spcPts val="600"/>
-              </a:spcAft>
-            </a:pPr>
-            <a:r>
-              <a:rPr sz="2000" b="0">
-                <a:solidFill>
-                  <a:srgbClr val="58A6FF"/>
-                </a:solidFill>
-                <a:latin typeface="Segoe UI"/>
-              </a:rPr>
-              <a:t>que transmite voz de verdad y grafica RSSI, pérdida, latencia, entropía y capacidad en vivo.</a:t>
-            </a:r>
-          </a:p>
-        </p:txBody>
-      </p:sp>
-      <p:sp>
-        <p:nvSpPr>
-          <p:cNvPr id="8" name="foot"/>
-          <p:cNvSpPr txBox="1"/>
-          <p:nvPr/>
-        </p:nvSpPr>
-        <p:spPr>
-          <a:xfrm>
-            <a:off x="640080" y="6419088"/>
-            <a:ext cx="10881360" cy="365760"/>
-          </a:xfrm>
-          <a:prstGeom prst="rect">
-            <a:avLst/>
-          </a:prstGeom>
-          <a:noFill/>
-        </p:spPr>
-        <p:txBody>
-          <a:bodyPr wrap="square" anchor="t">
-            <a:spAutoFit/>
-          </a:bodyPr>
-          <a:lstStyle/>
-          <a:p>
-            <a:pPr algn="l">
-              <a:spcAft>
-                <a:spcPts val="600"/>
-              </a:spcAft>
-            </a:pPr>
-            <a:r>
-              <a:rPr sz="1000" b="0">
-                <a:solidFill>
-                  <a:srgbClr val="8B949E"/>
-                </a:solidFill>
-                <a:latin typeface="Segoe UI"/>
-              </a:rPr>
-              <a:t>DSP · BT Analyzer  —  Teoría de la Información y Sistemas de Comunicación · UNAL</a:t>
+              <a:t>Es la misma banda del Wi-Fi y del microondas: hay interferencia real y la señal se debilita con la distancia y las paredes. Un canal de verdad, no uno de laboratorio.</a:t>
             </a:r>
           </a:p>
         </p:txBody>
@@ -8849,23 +8914,23 @@
       </p:sp>
       <p:sp>
         <p:nvSpPr>
-          <p:cNvPr id="3" name="orb"/>
+          <p:cNvPr id="3" name="ic"/>
           <p:cNvSpPr/>
           <p:nvPr/>
         </p:nvSpPr>
         <p:spPr>
           <a:xfrm>
-            <a:off x="5029200" y="4846320"/>
-            <a:ext cx="2011680" cy="2011680"/>
-          </a:xfrm>
-          <a:prstGeom prst="ellipse">
-            <a:avLst/>
-          </a:prstGeom>
-          <a:noFill/>
-          <a:ln w="44450">
-            <a:solidFill>
-              <a:srgbClr val="3FB950"/>
-            </a:solidFill>
+            <a:off x="9165945" y="2404872"/>
+            <a:ext cx="402336" cy="704088"/>
+          </a:xfrm>
+          <a:prstGeom prst="roundRect">
+            <a:avLst/>
+          </a:prstGeom>
+          <a:solidFill>
+            <a:srgbClr val="3FB950"/>
+          </a:solidFill>
+          <a:ln>
+            <a:noFill/>
           </a:ln>
           <a:effectLst/>
         </p:spPr>
@@ -8893,14 +8958,146 @@
       </p:sp>
       <p:sp>
         <p:nvSpPr>
-          <p:cNvPr id="4" name="kicker"/>
+          <p:cNvPr id="4" name="ic"/>
+          <p:cNvSpPr/>
+          <p:nvPr/>
+        </p:nvSpPr>
+        <p:spPr>
+          <a:xfrm>
+            <a:off x="9809683" y="1962302"/>
+            <a:ext cx="402336" cy="1146657"/>
+          </a:xfrm>
+          <a:prstGeom prst="roundRect">
+            <a:avLst/>
+          </a:prstGeom>
+          <a:solidFill>
+            <a:srgbClr val="3FB950"/>
+          </a:solidFill>
+          <a:ln>
+            <a:noFill/>
+          </a:ln>
+          <a:effectLst/>
+        </p:spPr>
+        <p:style>
+          <a:lnRef idx="1">
+            <a:schemeClr val="accent1"/>
+          </a:lnRef>
+          <a:fillRef idx="3">
+            <a:schemeClr val="accent1"/>
+          </a:fillRef>
+          <a:effectRef idx="2">
+            <a:schemeClr val="accent1"/>
+          </a:effectRef>
+          <a:fontRef idx="minor">
+            <a:schemeClr val="lt1"/>
+          </a:fontRef>
+        </p:style>
+        <p:txBody>
+          <a:bodyPr rtlCol="0" anchor="ctr"/>
+          <a:lstStyle/>
+          <a:p>
+            <a:pPr algn="ctr"/>
+          </a:p>
+        </p:txBody>
+      </p:sp>
+      <p:sp>
+        <p:nvSpPr>
+          <p:cNvPr id="5" name="ic"/>
+          <p:cNvSpPr/>
+          <p:nvPr/>
+        </p:nvSpPr>
+        <p:spPr>
+          <a:xfrm>
+            <a:off x="10453420" y="1519732"/>
+            <a:ext cx="402336" cy="1589227"/>
+          </a:xfrm>
+          <a:prstGeom prst="roundRect">
+            <a:avLst/>
+          </a:prstGeom>
+          <a:solidFill>
+            <a:srgbClr val="3FB950"/>
+          </a:solidFill>
+          <a:ln>
+            <a:noFill/>
+          </a:ln>
+          <a:effectLst/>
+        </p:spPr>
+        <p:style>
+          <a:lnRef idx="1">
+            <a:schemeClr val="accent1"/>
+          </a:lnRef>
+          <a:fillRef idx="3">
+            <a:schemeClr val="accent1"/>
+          </a:fillRef>
+          <a:effectRef idx="2">
+            <a:schemeClr val="accent1"/>
+          </a:effectRef>
+          <a:fontRef idx="minor">
+            <a:schemeClr val="lt1"/>
+          </a:fontRef>
+        </p:style>
+        <p:txBody>
+          <a:bodyPr rtlCol="0" anchor="ctr"/>
+          <a:lstStyle/>
+          <a:p>
+            <a:pPr algn="ctr"/>
+          </a:p>
+        </p:txBody>
+      </p:sp>
+      <p:sp>
+        <p:nvSpPr>
+          <p:cNvPr id="6" name="ic"/>
+          <p:cNvSpPr/>
+          <p:nvPr/>
+        </p:nvSpPr>
+        <p:spPr>
+          <a:xfrm>
+            <a:off x="11097158" y="1077163"/>
+            <a:ext cx="402336" cy="2031796"/>
+          </a:xfrm>
+          <a:prstGeom prst="roundRect">
+            <a:avLst/>
+          </a:prstGeom>
+          <a:solidFill>
+            <a:srgbClr val="3FB950"/>
+          </a:solidFill>
+          <a:ln>
+            <a:noFill/>
+          </a:ln>
+          <a:effectLst/>
+        </p:spPr>
+        <p:style>
+          <a:lnRef idx="1">
+            <a:schemeClr val="accent1"/>
+          </a:lnRef>
+          <a:fillRef idx="3">
+            <a:schemeClr val="accent1"/>
+          </a:fillRef>
+          <a:effectRef idx="2">
+            <a:schemeClr val="accent1"/>
+          </a:effectRef>
+          <a:fontRef idx="minor">
+            <a:schemeClr val="lt1"/>
+          </a:fontRef>
+        </p:style>
+        <p:txBody>
+          <a:bodyPr rtlCol="0" anchor="ctr"/>
+          <a:lstStyle/>
+          <a:p>
+            <a:pPr algn="ctr"/>
+          </a:p>
+        </p:txBody>
+      </p:sp>
+      <p:sp>
+        <p:nvSpPr>
+          <p:cNvPr id="7" name="kick"/>
           <p:cNvSpPr txBox="1"/>
           <p:nvPr/>
         </p:nvSpPr>
         <p:spPr>
           <a:xfrm>
-            <a:off x="640080" y="411480"/>
-            <a:ext cx="10881360" cy="457200"/>
+            <a:off x="685800" y="457200"/>
+            <a:ext cx="10789920" cy="457200"/>
           </a:xfrm>
           <a:prstGeom prst="rect">
             <a:avLst/>
@@ -8925,21 +9122,21 @@
                 </a:solidFill>
                 <a:latin typeface="Segoe UI"/>
               </a:rPr>
-              <a:t>LA IDEA GRANDE</a:t>
-            </a:r>
-          </a:p>
-        </p:txBody>
-      </p:sp>
-      <p:sp>
-        <p:nvSpPr>
-          <p:cNvPr id="5" name="title"/>
+              <a:t>POR QUÉ ESTE PROYECTO</a:t>
+            </a:r>
+          </a:p>
+        </p:txBody>
+      </p:sp>
+      <p:sp>
+        <p:nvSpPr>
+          <p:cNvPr id="8" name="title"/>
           <p:cNvSpPr txBox="1"/>
           <p:nvPr/>
         </p:nvSpPr>
         <p:spPr>
           <a:xfrm>
-            <a:off x="640080" y="914400"/>
-            <a:ext cx="10881360" cy="1463040"/>
+            <a:off x="685800" y="932688"/>
+            <a:ext cx="10789920" cy="1554480"/>
           </a:xfrm>
           <a:prstGeom prst="rect">
             <a:avLst/>
@@ -8958,362 +9155,28 @@
               </a:spcAft>
             </a:pPr>
             <a:r>
-              <a:rPr sz="3600" b="1">
+              <a:rPr sz="3400" b="1">
                 <a:solidFill>
                   <a:srgbClr val="E6EDF3"/>
                 </a:solidFill>
                 <a:latin typeface="Segoe UI"/>
               </a:rPr>
-              <a:t>El diagrama de Shannon, vuelto aplicación</a:t>
-            </a:r>
-          </a:p>
-        </p:txBody>
-      </p:sp>
-      <p:sp>
-        <p:nvSpPr>
-          <p:cNvPr id="6" name="box1"/>
-          <p:cNvSpPr/>
-          <p:nvPr/>
-        </p:nvSpPr>
-        <p:spPr>
-          <a:xfrm>
-            <a:off x="502920" y="2331720"/>
-            <a:ext cx="2084831" cy="1371600"/>
-          </a:xfrm>
-          <a:prstGeom prst="roundRect">
-            <a:avLst/>
-          </a:prstGeom>
-          <a:solidFill>
-            <a:srgbClr val="161B22"/>
-          </a:solidFill>
-          <a:ln w="19050">
-            <a:solidFill>
-              <a:srgbClr val="58A6FF"/>
-            </a:solidFill>
-          </a:ln>
-          <a:effectLst/>
-        </p:spPr>
-        <p:style>
-          <a:lnRef idx="1">
-            <a:schemeClr val="accent1"/>
-          </a:lnRef>
-          <a:fillRef idx="3">
-            <a:schemeClr val="accent1"/>
-          </a:fillRef>
-          <a:effectRef idx="2">
-            <a:schemeClr val="accent1"/>
-          </a:effectRef>
-          <a:fontRef idx="minor">
-            <a:schemeClr val="lt1"/>
-          </a:fontRef>
-        </p:style>
-        <p:txBody>
-          <a:bodyPr rtlCol="0" anchor="ctr" wrap="square"/>
-          <a:lstStyle/>
-          <a:p>
-            <a:pPr algn="ctr"/>
-            <a:r>
-              <a:rPr sz="1500" b="1">
-                <a:solidFill>
-                  <a:srgbClr val="58A6FF"/>
-                </a:solidFill>
-                <a:latin typeface="Segoe UI"/>
-              </a:rPr>
-              <a:t>FUENTE</a:t>
-            </a:r>
-          </a:p>
-          <a:p>
-            <a:pPr algn="ctr"/>
-            <a:r>
-              <a:rPr sz="1200">
-                <a:solidFill>
-                  <a:srgbClr val="E6EDF3"/>
-                </a:solidFill>
-                <a:latin typeface="Segoe UI"/>
-              </a:rPr>
-              <a:t>tu voz</a:t>
-            </a:r>
-          </a:p>
-        </p:txBody>
-      </p:sp>
-      <p:sp>
-        <p:nvSpPr>
-          <p:cNvPr id="7" name="box2"/>
-          <p:cNvSpPr/>
-          <p:nvPr/>
-        </p:nvSpPr>
-        <p:spPr>
-          <a:xfrm>
-            <a:off x="2807208" y="2331720"/>
-            <a:ext cx="2084831" cy="1371600"/>
-          </a:xfrm>
-          <a:prstGeom prst="roundRect">
-            <a:avLst/>
-          </a:prstGeom>
-          <a:solidFill>
-            <a:srgbClr val="161B22"/>
-          </a:solidFill>
-          <a:ln w="19050">
-            <a:solidFill>
-              <a:srgbClr val="3FB950"/>
-            </a:solidFill>
-          </a:ln>
-          <a:effectLst/>
-        </p:spPr>
-        <p:style>
-          <a:lnRef idx="1">
-            <a:schemeClr val="accent1"/>
-          </a:lnRef>
-          <a:fillRef idx="3">
-            <a:schemeClr val="accent1"/>
-          </a:fillRef>
-          <a:effectRef idx="2">
-            <a:schemeClr val="accent1"/>
-          </a:effectRef>
-          <a:fontRef idx="minor">
-            <a:schemeClr val="lt1"/>
-          </a:fontRef>
-        </p:style>
-        <p:txBody>
-          <a:bodyPr rtlCol="0" anchor="ctr" wrap="square"/>
-          <a:lstStyle/>
-          <a:p>
-            <a:pPr algn="ctr"/>
-            <a:r>
-              <a:rPr sz="1500" b="1">
-                <a:solidFill>
-                  <a:srgbClr val="3FB950"/>
-                </a:solidFill>
-                <a:latin typeface="Segoe UI"/>
-              </a:rPr>
-              <a:t>TRANSMISOR</a:t>
-            </a:r>
-          </a:p>
-          <a:p>
-            <a:pPr algn="ctr"/>
-            <a:r>
-              <a:rPr sz="1200">
-                <a:solidFill>
-                  <a:srgbClr val="E6EDF3"/>
-                </a:solidFill>
-                <a:latin typeface="Segoe UI"/>
-              </a:rPr>
-              <a:t>8 kHz · μ-law · SEQ</a:t>
-            </a:r>
-          </a:p>
-        </p:txBody>
-      </p:sp>
-      <p:sp>
-        <p:nvSpPr>
-          <p:cNvPr id="8" name="box3"/>
-          <p:cNvSpPr/>
-          <p:nvPr/>
-        </p:nvSpPr>
-        <p:spPr>
-          <a:xfrm>
-            <a:off x="5111496" y="2331720"/>
-            <a:ext cx="2084831" cy="1371600"/>
-          </a:xfrm>
-          <a:prstGeom prst="roundRect">
-            <a:avLst/>
-          </a:prstGeom>
-          <a:solidFill>
-            <a:srgbClr val="161B22"/>
-          </a:solidFill>
-          <a:ln w="19050">
-            <a:solidFill>
-              <a:srgbClr val="D29922"/>
-            </a:solidFill>
-          </a:ln>
-          <a:effectLst/>
-        </p:spPr>
-        <p:style>
-          <a:lnRef idx="1">
-            <a:schemeClr val="accent1"/>
-          </a:lnRef>
-          <a:fillRef idx="3">
-            <a:schemeClr val="accent1"/>
-          </a:fillRef>
-          <a:effectRef idx="2">
-            <a:schemeClr val="accent1"/>
-          </a:effectRef>
-          <a:fontRef idx="minor">
-            <a:schemeClr val="lt1"/>
-          </a:fontRef>
-        </p:style>
-        <p:txBody>
-          <a:bodyPr rtlCol="0" anchor="ctr" wrap="square"/>
-          <a:lstStyle/>
-          <a:p>
-            <a:pPr algn="ctr"/>
-            <a:r>
-              <a:rPr sz="1500" b="1">
-                <a:solidFill>
-                  <a:srgbClr val="D29922"/>
-                </a:solidFill>
-                <a:latin typeface="Segoe UI"/>
-              </a:rPr>
-              <a:t>CANAL</a:t>
-            </a:r>
-          </a:p>
-          <a:p>
-            <a:pPr algn="ctr"/>
-            <a:r>
-              <a:rPr sz="1200">
-                <a:solidFill>
-                  <a:srgbClr val="E6EDF3"/>
-                </a:solidFill>
-                <a:latin typeface="Segoe UI"/>
-              </a:rPr>
-              <a:t>Bluetooth 2.4 GHz</a:t>
-            </a:r>
-          </a:p>
-        </p:txBody>
-      </p:sp>
-      <p:sp>
-        <p:nvSpPr>
-          <p:cNvPr id="9" name="box4"/>
-          <p:cNvSpPr/>
-          <p:nvPr/>
-        </p:nvSpPr>
-        <p:spPr>
-          <a:xfrm>
-            <a:off x="7415784" y="2331720"/>
-            <a:ext cx="2084831" cy="1371600"/>
-          </a:xfrm>
-          <a:prstGeom prst="roundRect">
-            <a:avLst/>
-          </a:prstGeom>
-          <a:solidFill>
-            <a:srgbClr val="161B22"/>
-          </a:solidFill>
-          <a:ln w="19050">
-            <a:solidFill>
-              <a:srgbClr val="3FB950"/>
-            </a:solidFill>
-          </a:ln>
-          <a:effectLst/>
-        </p:spPr>
-        <p:style>
-          <a:lnRef idx="1">
-            <a:schemeClr val="accent1"/>
-          </a:lnRef>
-          <a:fillRef idx="3">
-            <a:schemeClr val="accent1"/>
-          </a:fillRef>
-          <a:effectRef idx="2">
-            <a:schemeClr val="accent1"/>
-          </a:effectRef>
-          <a:fontRef idx="minor">
-            <a:schemeClr val="lt1"/>
-          </a:fontRef>
-        </p:style>
-        <p:txBody>
-          <a:bodyPr rtlCol="0" anchor="ctr" wrap="square"/>
-          <a:lstStyle/>
-          <a:p>
-            <a:pPr algn="ctr"/>
-            <a:r>
-              <a:rPr sz="1500" b="1">
-                <a:solidFill>
-                  <a:srgbClr val="3FB950"/>
-                </a:solidFill>
-                <a:latin typeface="Segoe UI"/>
-              </a:rPr>
-              <a:t>RECEPTOR</a:t>
-            </a:r>
-          </a:p>
-          <a:p>
-            <a:pPr algn="ctr"/>
-            <a:r>
-              <a:rPr sz="1200">
-                <a:solidFill>
-                  <a:srgbClr val="E6EDF3"/>
-                </a:solidFill>
-                <a:latin typeface="Segoe UI"/>
-              </a:rPr>
-              <a:t>PLC · filtros · Hamming</a:t>
-            </a:r>
-          </a:p>
-        </p:txBody>
-      </p:sp>
-      <p:sp>
-        <p:nvSpPr>
-          <p:cNvPr id="10" name="box5"/>
-          <p:cNvSpPr/>
-          <p:nvPr/>
-        </p:nvSpPr>
-        <p:spPr>
-          <a:xfrm>
-            <a:off x="9720072" y="2331720"/>
-            <a:ext cx="2084831" cy="1371600"/>
-          </a:xfrm>
-          <a:prstGeom prst="roundRect">
-            <a:avLst/>
-          </a:prstGeom>
-          <a:solidFill>
-            <a:srgbClr val="161B22"/>
-          </a:solidFill>
-          <a:ln w="19050">
-            <a:solidFill>
-              <a:srgbClr val="58A6FF"/>
-            </a:solidFill>
-          </a:ln>
-          <a:effectLst/>
-        </p:spPr>
-        <p:style>
-          <a:lnRef idx="1">
-            <a:schemeClr val="accent1"/>
-          </a:lnRef>
-          <a:fillRef idx="3">
-            <a:schemeClr val="accent1"/>
-          </a:fillRef>
-          <a:effectRef idx="2">
-            <a:schemeClr val="accent1"/>
-          </a:effectRef>
-          <a:fontRef idx="minor">
-            <a:schemeClr val="lt1"/>
-          </a:fontRef>
-        </p:style>
-        <p:txBody>
-          <a:bodyPr rtlCol="0" anchor="ctr" wrap="square"/>
-          <a:lstStyle/>
-          <a:p>
-            <a:pPr algn="ctr"/>
-            <a:r>
-              <a:rPr sz="1500" b="1">
-                <a:solidFill>
-                  <a:srgbClr val="58A6FF"/>
-                </a:solidFill>
-                <a:latin typeface="Segoe UI"/>
-              </a:rPr>
-              <a:t>DESTINO</a:t>
-            </a:r>
-          </a:p>
-          <a:p>
-            <a:pPr algn="ctr"/>
-            <a:r>
-              <a:rPr sz="1200">
-                <a:solidFill>
-                  <a:srgbClr val="E6EDF3"/>
-                </a:solidFill>
-                <a:latin typeface="Segoe UI"/>
-              </a:rPr>
-              <a:t>el oído del otro</a:t>
-            </a:r>
-          </a:p>
-        </p:txBody>
-      </p:sp>
-      <p:sp>
-        <p:nvSpPr>
-          <p:cNvPr id="11" name="body"/>
+              <a:t>En clase el canal con ruido se simula.
+Aquí se mide uno real.</a:t>
+            </a:r>
+          </a:p>
+        </p:txBody>
+      </p:sp>
+      <p:sp>
+        <p:nvSpPr>
+          <p:cNvPr id="9" name="tx"/>
           <p:cNvSpPr txBox="1"/>
           <p:nvPr/>
         </p:nvSpPr>
         <p:spPr>
           <a:xfrm>
-            <a:off x="640080" y="4206240"/>
-            <a:ext cx="10881360" cy="1097280"/>
+            <a:off x="685800" y="3291840"/>
+            <a:ext cx="9692640" cy="2377440"/>
           </a:xfrm>
           <a:prstGeom prst="rect">
             <a:avLst/>
@@ -9325,6 +9188,22 @@
             <a:spAutoFit/>
           </a:bodyPr>
           <a:lstStyle/>
+          <a:p>
+            <a:pPr algn="l">
+              <a:spcAft>
+                <a:spcPts val="1000"/>
+              </a:spcAft>
+            </a:pPr>
+            <a:r>
+              <a:rPr sz="1900" b="0">
+                <a:solidFill>
+                  <a:srgbClr val="E6EDF3"/>
+                </a:solidFill>
+                <a:latin typeface="Segoe UI"/>
+              </a:rPr>
+              <a:t>El ruido no sale de una fórmula en el computador: sale del aire, con la distancia y los obstáculos reales.</a:t>
+            </a:r>
+          </a:p>
           <a:p>
             <a:pPr algn="l">
               <a:spcAft>
@@ -9332,52 +9211,13 @@
               </a:spcAft>
             </a:pPr>
             <a:r>
-              <a:rPr sz="1800" b="0">
+              <a:rPr sz="1900" b="0">
                 <a:solidFill>
                   <a:srgbClr val="8B949E"/>
                 </a:solidFill>
                 <a:latin typeface="Segoe UI"/>
               </a:rPr>
-              <a:t>La fuente se comprime. El canal se protege. Esa separación —de Shannon, 1948— es literalmente la arquitectura del código.</a:t>
-            </a:r>
-          </a:p>
-        </p:txBody>
-      </p:sp>
-      <p:sp>
-        <p:nvSpPr>
-          <p:cNvPr id="12" name="foot"/>
-          <p:cNvSpPr txBox="1"/>
-          <p:nvPr/>
-        </p:nvSpPr>
-        <p:spPr>
-          <a:xfrm>
-            <a:off x="640080" y="6419088"/>
-            <a:ext cx="10881360" cy="365760"/>
-          </a:xfrm>
-          <a:prstGeom prst="rect">
-            <a:avLst/>
-          </a:prstGeom>
-          <a:noFill/>
-        </p:spPr>
-        <p:txBody>
-          <a:bodyPr wrap="square" anchor="t">
-            <a:spAutoFit/>
-          </a:bodyPr>
-          <a:lstStyle/>
-          <a:p>
-            <a:pPr algn="l">
-              <a:spcAft>
-                <a:spcPts val="600"/>
-              </a:spcAft>
-            </a:pPr>
-            <a:r>
-              <a:rPr sz="1000" b="0">
-                <a:solidFill>
-                  <a:srgbClr val="8B949E"/>
-                </a:solidFill>
-                <a:latin typeface="Segoe UI"/>
-              </a:rPr>
-              <a:t>DSP · BT Analyzer  —  Teoría de la Información y Sistemas de Comunicación · UNAL</a:t>
+              <a:t>Dos teléfonos cualquiera se vuelven un instrumento que transmite voz y, al mismo tiempo, mide la calidad del canal: intensidad de señal, pérdidas, retraso, y las medidas del curso.</a:t>
             </a:r>
           </a:p>
         </p:txBody>
@@ -9458,20 +9298,199 @@
       </p:sp>
       <p:sp>
         <p:nvSpPr>
-          <p:cNvPr id="3" name="orb"/>
+          <p:cNvPr id="3" name="kick"/>
+          <p:cNvSpPr txBox="1"/>
+          <p:nvPr/>
+        </p:nvSpPr>
+        <p:spPr>
+          <a:xfrm>
+            <a:off x="685800" y="457200"/>
+            <a:ext cx="10789920" cy="457200"/>
+          </a:xfrm>
+          <a:prstGeom prst="rect">
+            <a:avLst/>
+          </a:prstGeom>
+          <a:noFill/>
+        </p:spPr>
+        <p:txBody>
+          <a:bodyPr wrap="square" anchor="t">
+            <a:spAutoFit/>
+          </a:bodyPr>
+          <a:lstStyle/>
+          <a:p>
+            <a:pPr algn="l">
+              <a:spcAft>
+                <a:spcPts val="600"/>
+              </a:spcAft>
+            </a:pPr>
+            <a:r>
+              <a:rPr sz="1300" b="1">
+                <a:solidFill>
+                  <a:srgbClr val="58A6FF"/>
+                </a:solidFill>
+                <a:latin typeface="Segoe UI"/>
+              </a:rPr>
+              <a:t>EL RECORRIDO DE LA VOZ</a:t>
+            </a:r>
+          </a:p>
+        </p:txBody>
+      </p:sp>
+      <p:sp>
+        <p:nvSpPr>
+          <p:cNvPr id="4" name="title"/>
+          <p:cNvSpPr txBox="1"/>
+          <p:nvPr/>
+        </p:nvSpPr>
+        <p:spPr>
+          <a:xfrm>
+            <a:off x="685800" y="932688"/>
+            <a:ext cx="10789920" cy="1554480"/>
+          </a:xfrm>
+          <a:prstGeom prst="rect">
+            <a:avLst/>
+          </a:prstGeom>
+          <a:noFill/>
+        </p:spPr>
+        <p:txBody>
+          <a:bodyPr wrap="square" anchor="t">
+            <a:spAutoFit/>
+          </a:bodyPr>
+          <a:lstStyle/>
+          <a:p>
+            <a:pPr algn="l">
+              <a:spcAft>
+                <a:spcPts val="600"/>
+              </a:spcAft>
+            </a:pPr>
+            <a:r>
+              <a:rPr sz="3200" b="1">
+                <a:solidFill>
+                  <a:srgbClr val="E6EDF3"/>
+                </a:solidFill>
+                <a:latin typeface="Segoe UI"/>
+              </a:rPr>
+              <a:t>De un micrófono al parlante del otro teléfono</a:t>
+            </a:r>
+          </a:p>
+        </p:txBody>
+      </p:sp>
+      <p:sp>
+        <p:nvSpPr>
+          <p:cNvPr id="5" name="et0"/>
           <p:cNvSpPr/>
           <p:nvPr/>
         </p:nvSpPr>
         <p:spPr>
           <a:xfrm>
-            <a:off x="-1463040" y="4023360"/>
-            <a:ext cx="4023360" cy="4023360"/>
-          </a:xfrm>
-          <a:prstGeom prst="ellipse">
-            <a:avLst/>
-          </a:prstGeom>
-          <a:noFill/>
-          <a:ln w="44450">
+            <a:off x="502920" y="2468880"/>
+            <a:ext cx="2084831" cy="1371600"/>
+          </a:xfrm>
+          <a:prstGeom prst="roundRect">
+            <a:avLst/>
+          </a:prstGeom>
+          <a:solidFill>
+            <a:srgbClr val="161B22"/>
+          </a:solidFill>
+          <a:ln w="19050">
+            <a:solidFill>
+              <a:srgbClr val="58A6FF"/>
+            </a:solidFill>
+          </a:ln>
+          <a:effectLst/>
+        </p:spPr>
+        <p:style>
+          <a:lnRef idx="1">
+            <a:schemeClr val="accent1"/>
+          </a:lnRef>
+          <a:fillRef idx="3">
+            <a:schemeClr val="accent1"/>
+          </a:fillRef>
+          <a:effectRef idx="2">
+            <a:schemeClr val="accent1"/>
+          </a:effectRef>
+          <a:fontRef idx="minor">
+            <a:schemeClr val="lt1"/>
+          </a:fontRef>
+        </p:style>
+        <p:txBody>
+          <a:bodyPr rtlCol="0" anchor="ctr" wrap="square"/>
+          <a:lstStyle/>
+          <a:p>
+            <a:pPr algn="ctr"/>
+            <a:r>
+              <a:rPr sz="1500" b="1">
+                <a:solidFill>
+                  <a:srgbClr val="58A6FF"/>
+                </a:solidFill>
+                <a:latin typeface="Segoe UI"/>
+              </a:rPr>
+              <a:t>Voz</a:t>
+            </a:r>
+          </a:p>
+        </p:txBody>
+      </p:sp>
+      <p:sp>
+        <p:nvSpPr>
+          <p:cNvPr id="6" name="arr"/>
+          <p:cNvSpPr/>
+          <p:nvPr/>
+        </p:nvSpPr>
+        <p:spPr>
+          <a:xfrm>
+            <a:off x="2606039" y="2971800"/>
+            <a:ext cx="201168" cy="365760"/>
+          </a:xfrm>
+          <a:prstGeom prst="rightArrow">
+            <a:avLst/>
+          </a:prstGeom>
+          <a:solidFill>
+            <a:srgbClr val="8B949E"/>
+          </a:solidFill>
+          <a:ln>
+            <a:noFill/>
+          </a:ln>
+          <a:effectLst/>
+        </p:spPr>
+        <p:style>
+          <a:lnRef idx="1">
+            <a:schemeClr val="accent1"/>
+          </a:lnRef>
+          <a:fillRef idx="3">
+            <a:schemeClr val="accent1"/>
+          </a:fillRef>
+          <a:effectRef idx="2">
+            <a:schemeClr val="accent1"/>
+          </a:effectRef>
+          <a:fontRef idx="minor">
+            <a:schemeClr val="lt1"/>
+          </a:fontRef>
+        </p:style>
+        <p:txBody>
+          <a:bodyPr rtlCol="0" anchor="ctr"/>
+          <a:lstStyle/>
+          <a:p>
+            <a:pPr algn="ctr"/>
+          </a:p>
+        </p:txBody>
+      </p:sp>
+      <p:sp>
+        <p:nvSpPr>
+          <p:cNvPr id="7" name="et1"/>
+          <p:cNvSpPr/>
+          <p:nvPr/>
+        </p:nvSpPr>
+        <p:spPr>
+          <a:xfrm>
+            <a:off x="2807208" y="2468880"/>
+            <a:ext cx="2084831" cy="1371600"/>
+          </a:xfrm>
+          <a:prstGeom prst="roundRect">
+            <a:avLst/>
+          </a:prstGeom>
+          <a:solidFill>
+            <a:srgbClr val="161B22"/>
+          </a:solidFill>
+          <a:ln w="19050">
             <a:solidFill>
               <a:srgbClr val="3FB950"/>
             </a:solidFill>
@@ -9493,6 +9512,60 @@
           </a:fontRef>
         </p:style>
         <p:txBody>
+          <a:bodyPr rtlCol="0" anchor="ctr" wrap="square"/>
+          <a:lstStyle/>
+          <a:p>
+            <a:pPr algn="ctr"/>
+            <a:r>
+              <a:rPr sz="1500" b="1">
+                <a:solidFill>
+                  <a:srgbClr val="3FB950"/>
+                </a:solidFill>
+                <a:latin typeface="Segoe UI"/>
+              </a:rPr>
+              <a:t>Convertir
+en números</a:t>
+            </a:r>
+          </a:p>
+        </p:txBody>
+      </p:sp>
+      <p:sp>
+        <p:nvSpPr>
+          <p:cNvPr id="8" name="arr"/>
+          <p:cNvSpPr/>
+          <p:nvPr/>
+        </p:nvSpPr>
+        <p:spPr>
+          <a:xfrm>
+            <a:off x="4910328" y="2971800"/>
+            <a:ext cx="201168" cy="365760"/>
+          </a:xfrm>
+          <a:prstGeom prst="rightArrow">
+            <a:avLst/>
+          </a:prstGeom>
+          <a:solidFill>
+            <a:srgbClr val="8B949E"/>
+          </a:solidFill>
+          <a:ln>
+            <a:noFill/>
+          </a:ln>
+          <a:effectLst/>
+        </p:spPr>
+        <p:style>
+          <a:lnRef idx="1">
+            <a:schemeClr val="accent1"/>
+          </a:lnRef>
+          <a:fillRef idx="3">
+            <a:schemeClr val="accent1"/>
+          </a:fillRef>
+          <a:effectRef idx="2">
+            <a:schemeClr val="accent1"/>
+          </a:effectRef>
+          <a:fontRef idx="minor">
+            <a:schemeClr val="lt1"/>
+          </a:fontRef>
+        </p:style>
+        <p:txBody>
           <a:bodyPr rtlCol="0" anchor="ctr"/>
           <a:lstStyle/>
           <a:p>
@@ -9502,14 +9575,269 @@
       </p:sp>
       <p:sp>
         <p:nvSpPr>
-          <p:cNvPr id="4" name="kicker"/>
+          <p:cNvPr id="9" name="et2"/>
+          <p:cNvSpPr/>
+          <p:nvPr/>
+        </p:nvSpPr>
+        <p:spPr>
+          <a:xfrm>
+            <a:off x="5111496" y="2468880"/>
+            <a:ext cx="2084831" cy="1371600"/>
+          </a:xfrm>
+          <a:prstGeom prst="roundRect">
+            <a:avLst/>
+          </a:prstGeom>
+          <a:solidFill>
+            <a:srgbClr val="161B22"/>
+          </a:solidFill>
+          <a:ln w="19050">
+            <a:solidFill>
+              <a:srgbClr val="D29922"/>
+            </a:solidFill>
+          </a:ln>
+          <a:effectLst/>
+        </p:spPr>
+        <p:style>
+          <a:lnRef idx="1">
+            <a:schemeClr val="accent1"/>
+          </a:lnRef>
+          <a:fillRef idx="3">
+            <a:schemeClr val="accent1"/>
+          </a:fillRef>
+          <a:effectRef idx="2">
+            <a:schemeClr val="accent1"/>
+          </a:effectRef>
+          <a:fontRef idx="minor">
+            <a:schemeClr val="lt1"/>
+          </a:fontRef>
+        </p:style>
+        <p:txBody>
+          <a:bodyPr rtlCol="0" anchor="ctr" wrap="square"/>
+          <a:lstStyle/>
+          <a:p>
+            <a:pPr algn="ctr"/>
+            <a:r>
+              <a:rPr sz="1500" b="1">
+                <a:solidFill>
+                  <a:srgbClr val="D29922"/>
+                </a:solidFill>
+                <a:latin typeface="Segoe UI"/>
+              </a:rPr>
+              <a:t>Enviar por
+el aire</a:t>
+            </a:r>
+          </a:p>
+        </p:txBody>
+      </p:sp>
+      <p:sp>
+        <p:nvSpPr>
+          <p:cNvPr id="10" name="arr"/>
+          <p:cNvSpPr/>
+          <p:nvPr/>
+        </p:nvSpPr>
+        <p:spPr>
+          <a:xfrm>
+            <a:off x="7214616" y="2971800"/>
+            <a:ext cx="201168" cy="365760"/>
+          </a:xfrm>
+          <a:prstGeom prst="rightArrow">
+            <a:avLst/>
+          </a:prstGeom>
+          <a:solidFill>
+            <a:srgbClr val="8B949E"/>
+          </a:solidFill>
+          <a:ln>
+            <a:noFill/>
+          </a:ln>
+          <a:effectLst/>
+        </p:spPr>
+        <p:style>
+          <a:lnRef idx="1">
+            <a:schemeClr val="accent1"/>
+          </a:lnRef>
+          <a:fillRef idx="3">
+            <a:schemeClr val="accent1"/>
+          </a:fillRef>
+          <a:effectRef idx="2">
+            <a:schemeClr val="accent1"/>
+          </a:effectRef>
+          <a:fontRef idx="minor">
+            <a:schemeClr val="lt1"/>
+          </a:fontRef>
+        </p:style>
+        <p:txBody>
+          <a:bodyPr rtlCol="0" anchor="ctr"/>
+          <a:lstStyle/>
+          <a:p>
+            <a:pPr algn="ctr"/>
+          </a:p>
+        </p:txBody>
+      </p:sp>
+      <p:sp>
+        <p:nvSpPr>
+          <p:cNvPr id="11" name="et3"/>
+          <p:cNvSpPr/>
+          <p:nvPr/>
+        </p:nvSpPr>
+        <p:spPr>
+          <a:xfrm>
+            <a:off x="7415784" y="2468880"/>
+            <a:ext cx="2084831" cy="1371600"/>
+          </a:xfrm>
+          <a:prstGeom prst="roundRect">
+            <a:avLst/>
+          </a:prstGeom>
+          <a:solidFill>
+            <a:srgbClr val="161B22"/>
+          </a:solidFill>
+          <a:ln w="19050">
+            <a:solidFill>
+              <a:srgbClr val="3FB950"/>
+            </a:solidFill>
+          </a:ln>
+          <a:effectLst/>
+        </p:spPr>
+        <p:style>
+          <a:lnRef idx="1">
+            <a:schemeClr val="accent1"/>
+          </a:lnRef>
+          <a:fillRef idx="3">
+            <a:schemeClr val="accent1"/>
+          </a:fillRef>
+          <a:effectRef idx="2">
+            <a:schemeClr val="accent1"/>
+          </a:effectRef>
+          <a:fontRef idx="minor">
+            <a:schemeClr val="lt1"/>
+          </a:fontRef>
+        </p:style>
+        <p:txBody>
+          <a:bodyPr rtlCol="0" anchor="ctr" wrap="square"/>
+          <a:lstStyle/>
+          <a:p>
+            <a:pPr algn="ctr"/>
+            <a:r>
+              <a:rPr sz="1500" b="1">
+                <a:solidFill>
+                  <a:srgbClr val="3FB950"/>
+                </a:solidFill>
+                <a:latin typeface="Segoe UI"/>
+              </a:rPr>
+              <a:t>Reconstruir
+al llegar</a:t>
+            </a:r>
+          </a:p>
+        </p:txBody>
+      </p:sp>
+      <p:sp>
+        <p:nvSpPr>
+          <p:cNvPr id="12" name="arr"/>
+          <p:cNvSpPr/>
+          <p:nvPr/>
+        </p:nvSpPr>
+        <p:spPr>
+          <a:xfrm>
+            <a:off x="9518904" y="2971800"/>
+            <a:ext cx="201168" cy="365760"/>
+          </a:xfrm>
+          <a:prstGeom prst="rightArrow">
+            <a:avLst/>
+          </a:prstGeom>
+          <a:solidFill>
+            <a:srgbClr val="8B949E"/>
+          </a:solidFill>
+          <a:ln>
+            <a:noFill/>
+          </a:ln>
+          <a:effectLst/>
+        </p:spPr>
+        <p:style>
+          <a:lnRef idx="1">
+            <a:schemeClr val="accent1"/>
+          </a:lnRef>
+          <a:fillRef idx="3">
+            <a:schemeClr val="accent1"/>
+          </a:fillRef>
+          <a:effectRef idx="2">
+            <a:schemeClr val="accent1"/>
+          </a:effectRef>
+          <a:fontRef idx="minor">
+            <a:schemeClr val="lt1"/>
+          </a:fontRef>
+        </p:style>
+        <p:txBody>
+          <a:bodyPr rtlCol="0" anchor="ctr"/>
+          <a:lstStyle/>
+          <a:p>
+            <a:pPr algn="ctr"/>
+          </a:p>
+        </p:txBody>
+      </p:sp>
+      <p:sp>
+        <p:nvSpPr>
+          <p:cNvPr id="13" name="et4"/>
+          <p:cNvSpPr/>
+          <p:nvPr/>
+        </p:nvSpPr>
+        <p:spPr>
+          <a:xfrm>
+            <a:off x="9720072" y="2468880"/>
+            <a:ext cx="2084831" cy="1371600"/>
+          </a:xfrm>
+          <a:prstGeom prst="roundRect">
+            <a:avLst/>
+          </a:prstGeom>
+          <a:solidFill>
+            <a:srgbClr val="161B22"/>
+          </a:solidFill>
+          <a:ln w="19050">
+            <a:solidFill>
+              <a:srgbClr val="58A6FF"/>
+            </a:solidFill>
+          </a:ln>
+          <a:effectLst/>
+        </p:spPr>
+        <p:style>
+          <a:lnRef idx="1">
+            <a:schemeClr val="accent1"/>
+          </a:lnRef>
+          <a:fillRef idx="3">
+            <a:schemeClr val="accent1"/>
+          </a:fillRef>
+          <a:effectRef idx="2">
+            <a:schemeClr val="accent1"/>
+          </a:effectRef>
+          <a:fontRef idx="minor">
+            <a:schemeClr val="lt1"/>
+          </a:fontRef>
+        </p:style>
+        <p:txBody>
+          <a:bodyPr rtlCol="0" anchor="ctr" wrap="square"/>
+          <a:lstStyle/>
+          <a:p>
+            <a:pPr algn="ctr"/>
+            <a:r>
+              <a:rPr sz="1500" b="1">
+                <a:solidFill>
+                  <a:srgbClr val="58A6FF"/>
+                </a:solidFill>
+                <a:latin typeface="Segoe UI"/>
+              </a:rPr>
+              <a:t>Sonido</a:t>
+            </a:r>
+          </a:p>
+        </p:txBody>
+      </p:sp>
+      <p:sp>
+        <p:nvSpPr>
+          <p:cNvPr id="14" name="tx"/>
           <p:cNvSpPr txBox="1"/>
           <p:nvPr/>
         </p:nvSpPr>
         <p:spPr>
           <a:xfrm>
-            <a:off x="640080" y="411480"/>
-            <a:ext cx="10881360" cy="457200"/>
+            <a:off x="685800" y="4297680"/>
+            <a:ext cx="10789920" cy="1188720"/>
           </a:xfrm>
           <a:prstGeom prst="rect">
             <a:avLst/>
@@ -9528,391 +9856,13 @@
               </a:spcAft>
             </a:pPr>
             <a:r>
-              <a:rPr sz="1300" b="1">
-                <a:solidFill>
-                  <a:srgbClr val="58A6FF"/>
+              <a:rPr sz="1800" b="0">
+                <a:solidFill>
+                  <a:srgbClr val="8B949E"/>
                 </a:solidFill>
                 <a:latin typeface="Segoe UI"/>
               </a:rPr>
-              <a:t>CODIFICACIÓN DE FUENTE</a:t>
-            </a:r>
-          </a:p>
-        </p:txBody>
-      </p:sp>
-      <p:sp>
-        <p:nvSpPr>
-          <p:cNvPr id="5" name="title"/>
-          <p:cNvSpPr txBox="1"/>
-          <p:nvPr/>
-        </p:nvSpPr>
-        <p:spPr>
-          <a:xfrm>
-            <a:off x="640080" y="914400"/>
-            <a:ext cx="10881360" cy="1463040"/>
-          </a:xfrm>
-          <a:prstGeom prst="rect">
-            <a:avLst/>
-          </a:prstGeom>
-          <a:noFill/>
-        </p:spPr>
-        <p:txBody>
-          <a:bodyPr wrap="square" anchor="t">
-            <a:spAutoFit/>
-          </a:bodyPr>
-          <a:lstStyle/>
-          <a:p>
-            <a:pPr algn="l">
-              <a:spcAft>
-                <a:spcPts val="600"/>
-              </a:spcAft>
-            </a:pPr>
-            <a:r>
-              <a:rPr sz="3600" b="1">
-                <a:solidFill>
-                  <a:srgbClr val="E6EDF3"/>
-                </a:solidFill>
-                <a:latin typeface="Segoe UI"/>
-              </a:rPr>
-              <a:t>La voz, convertida en números</a:t>
-            </a:r>
-          </a:p>
-        </p:txBody>
-      </p:sp>
-      <p:sp>
-        <p:nvSpPr>
-          <p:cNvPr id="6" name="cardA"/>
-          <p:cNvSpPr/>
-          <p:nvPr/>
-        </p:nvSpPr>
-        <p:spPr>
-          <a:xfrm>
-            <a:off x="640080" y="2194560"/>
-            <a:ext cx="3566160" cy="2286000"/>
-          </a:xfrm>
-          <a:prstGeom prst="roundRect">
-            <a:avLst/>
-          </a:prstGeom>
-          <a:solidFill>
-            <a:srgbClr val="161B22"/>
-          </a:solidFill>
-          <a:ln w="15875">
-            <a:solidFill>
-              <a:srgbClr val="58A6FF"/>
-            </a:solidFill>
-          </a:ln>
-          <a:effectLst/>
-        </p:spPr>
-        <p:style>
-          <a:lnRef idx="1">
-            <a:schemeClr val="accent1"/>
-          </a:lnRef>
-          <a:fillRef idx="3">
-            <a:schemeClr val="accent1"/>
-          </a:fillRef>
-          <a:effectRef idx="2">
-            <a:schemeClr val="accent1"/>
-          </a:effectRef>
-          <a:fontRef idx="minor">
-            <a:schemeClr val="lt1"/>
-          </a:fontRef>
-        </p:style>
-        <p:txBody>
-          <a:bodyPr rtlCol="0" anchor="ctr" wrap="square" lIns="201168" rIns="201168" tIns="146304"/>
-          <a:lstStyle/>
-          <a:p>
-            <a:pPr algn="l"/>
-            <a:r>
-              <a:rPr sz="1700" b="1">
-                <a:solidFill>
-                  <a:srgbClr val="58A6FF"/>
-                </a:solidFill>
-                <a:latin typeface="Segoe UI"/>
-              </a:rPr>
-              <a:t>8 000 Hz</a:t>
-            </a:r>
-          </a:p>
-          <a:p>
-            <a:pPr algn="l">
-              <a:spcBef>
-                <a:spcPts val="400"/>
-              </a:spcBef>
-            </a:pPr>
-            <a:r>
-              <a:rPr sz="1300">
-                <a:solidFill>
-                  <a:srgbClr val="E6EDF3"/>
-                </a:solidFill>
-                <a:latin typeface="Segoe UI"/>
-              </a:rPr>
-              <a:t>Nyquist: la voz telefónica vive entre 300 y 3 400 Hz.</a:t>
-            </a:r>
-          </a:p>
-          <a:p>
-            <a:pPr algn="l">
-              <a:spcBef>
-                <a:spcPts val="400"/>
-              </a:spcBef>
-            </a:pPr>
-            <a:r>
-              <a:rPr sz="1300">
-                <a:solidFill>
-                  <a:srgbClr val="E6EDF3"/>
-                </a:solidFill>
-                <a:latin typeface="Segoe UI"/>
-              </a:rPr>
-              <a:t>Muestrear al doble basta. Igual que la telefonía clásica.</a:t>
-            </a:r>
-          </a:p>
-        </p:txBody>
-      </p:sp>
-      <p:sp>
-        <p:nvSpPr>
-          <p:cNvPr id="7" name="cardB"/>
-          <p:cNvSpPr/>
-          <p:nvPr/>
-        </p:nvSpPr>
-        <p:spPr>
-          <a:xfrm>
-            <a:off x="4343400" y="2194560"/>
-            <a:ext cx="3566160" cy="2286000"/>
-          </a:xfrm>
-          <a:prstGeom prst="roundRect">
-            <a:avLst/>
-          </a:prstGeom>
-          <a:solidFill>
-            <a:srgbClr val="161B22"/>
-          </a:solidFill>
-          <a:ln w="15875">
-            <a:solidFill>
-              <a:srgbClr val="3FB950"/>
-            </a:solidFill>
-          </a:ln>
-          <a:effectLst/>
-        </p:spPr>
-        <p:style>
-          <a:lnRef idx="1">
-            <a:schemeClr val="accent1"/>
-          </a:lnRef>
-          <a:fillRef idx="3">
-            <a:schemeClr val="accent1"/>
-          </a:fillRef>
-          <a:effectRef idx="2">
-            <a:schemeClr val="accent1"/>
-          </a:effectRef>
-          <a:fontRef idx="minor">
-            <a:schemeClr val="lt1"/>
-          </a:fontRef>
-        </p:style>
-        <p:txBody>
-          <a:bodyPr rtlCol="0" anchor="ctr" wrap="square" lIns="201168" rIns="201168" tIns="146304"/>
-          <a:lstStyle/>
-          <a:p>
-            <a:pPr algn="l"/>
-            <a:r>
-              <a:rPr sz="1700" b="1">
-                <a:solidFill>
-                  <a:srgbClr val="3FB950"/>
-                </a:solidFill>
-                <a:latin typeface="Segoe UI"/>
-              </a:rPr>
-              <a:t>16 bits · PCM</a:t>
-            </a:r>
-          </a:p>
-          <a:p>
-            <a:pPr algn="l">
-              <a:spcBef>
-                <a:spcPts val="400"/>
-              </a:spcBef>
-            </a:pPr>
-            <a:r>
-              <a:rPr sz="1300">
-                <a:solidFill>
-                  <a:srgbClr val="E6EDF3"/>
-                </a:solidFill>
-                <a:latin typeface="Segoe UI"/>
-              </a:rPr>
-              <a:t>Cada muestra, un entero con signo.</a:t>
-            </a:r>
-          </a:p>
-          <a:p>
-            <a:pPr algn="l">
-              <a:spcBef>
-                <a:spcPts val="400"/>
-              </a:spcBef>
-            </a:pPr>
-            <a:r>
-              <a:rPr sz="1300">
-                <a:solidFill>
-                  <a:srgbClr val="E6EDF3"/>
-                </a:solidFill>
-                <a:latin typeface="Segoe UI"/>
-              </a:rPr>
-              <a:t>16 000 bytes por segundo, crudos.</a:t>
-            </a:r>
-          </a:p>
-        </p:txBody>
-      </p:sp>
-      <p:sp>
-        <p:nvSpPr>
-          <p:cNvPr id="8" name="cardC"/>
-          <p:cNvSpPr/>
-          <p:nvPr/>
-        </p:nvSpPr>
-        <p:spPr>
-          <a:xfrm>
-            <a:off x="8046720" y="2194560"/>
-            <a:ext cx="3566160" cy="2286000"/>
-          </a:xfrm>
-          <a:prstGeom prst="roundRect">
-            <a:avLst/>
-          </a:prstGeom>
-          <a:solidFill>
-            <a:srgbClr val="161B22"/>
-          </a:solidFill>
-          <a:ln w="15875">
-            <a:solidFill>
-              <a:srgbClr val="D29922"/>
-            </a:solidFill>
-          </a:ln>
-          <a:effectLst/>
-        </p:spPr>
-        <p:style>
-          <a:lnRef idx="1">
-            <a:schemeClr val="accent1"/>
-          </a:lnRef>
-          <a:fillRef idx="3">
-            <a:schemeClr val="accent1"/>
-          </a:fillRef>
-          <a:effectRef idx="2">
-            <a:schemeClr val="accent1"/>
-          </a:effectRef>
-          <a:fontRef idx="minor">
-            <a:schemeClr val="lt1"/>
-          </a:fontRef>
-        </p:style>
-        <p:txBody>
-          <a:bodyPr rtlCol="0" anchor="ctr" wrap="square" lIns="201168" rIns="201168" tIns="146304"/>
-          <a:lstStyle/>
-          <a:p>
-            <a:pPr algn="l"/>
-            <a:r>
-              <a:rPr sz="1700" b="1">
-                <a:solidFill>
-                  <a:srgbClr val="D29922"/>
-                </a:solidFill>
-                <a:latin typeface="Segoe UI"/>
-              </a:rPr>
-              <a:t>→ 8 bits · μ-law</a:t>
-            </a:r>
-          </a:p>
-          <a:p>
-            <a:pPr algn="l">
-              <a:spcBef>
-                <a:spcPts val="400"/>
-              </a:spcBef>
-            </a:pPr>
-            <a:r>
-              <a:rPr sz="1300">
-                <a:solidFill>
-                  <a:srgbClr val="E6EDF3"/>
-                </a:solidFill>
-                <a:latin typeface="Segoe UI"/>
-              </a:rPr>
-              <a:t>El oído es logarítmico: precisión fina cerca del cero, gruesa arriba.</a:t>
-            </a:r>
-          </a:p>
-          <a:p>
-            <a:pPr algn="l">
-              <a:spcBef>
-                <a:spcPts val="400"/>
-              </a:spcBef>
-            </a:pPr>
-            <a:r>
-              <a:rPr sz="1300">
-                <a:solidFill>
-                  <a:srgbClr val="E6EDF3"/>
-                </a:solidFill>
-                <a:latin typeface="Segoe UI"/>
-              </a:rPr>
-              <a:t>G.711, el códec de la telefonía. Mitad de datos.</a:t>
-            </a:r>
-          </a:p>
-        </p:txBody>
-      </p:sp>
-      <p:sp>
-        <p:nvSpPr>
-          <p:cNvPr id="9" name="body"/>
-          <p:cNvSpPr txBox="1"/>
-          <p:nvPr/>
-        </p:nvSpPr>
-        <p:spPr>
-          <a:xfrm>
-            <a:off x="640080" y="4800600"/>
-            <a:ext cx="10881360" cy="914400"/>
-          </a:xfrm>
-          <a:prstGeom prst="rect">
-            <a:avLst/>
-          </a:prstGeom>
-          <a:noFill/>
-        </p:spPr>
-        <p:txBody>
-          <a:bodyPr wrap="square" anchor="t">
-            <a:spAutoFit/>
-          </a:bodyPr>
-          <a:lstStyle/>
-          <a:p>
-            <a:pPr algn="l">
-              <a:spcAft>
-                <a:spcPts val="600"/>
-              </a:spcAft>
-            </a:pPr>
-            <a:r>
-              <a:rPr sz="1500" b="0">
-                <a:solidFill>
-                  <a:srgbClr val="8B949E"/>
-                </a:solidFill>
-                <a:latin typeface="Segoe UI"/>
-              </a:rPr>
-              <a:t>Detalle que delata el dominio del formato: el silencio en μ-law es 0xFF, no 0x00 — ese decodifica a casi fondo de escala.</a:t>
-            </a:r>
-          </a:p>
-        </p:txBody>
-      </p:sp>
-      <p:sp>
-        <p:nvSpPr>
-          <p:cNvPr id="10" name="foot"/>
-          <p:cNvSpPr txBox="1"/>
-          <p:nvPr/>
-        </p:nvSpPr>
-        <p:spPr>
-          <a:xfrm>
-            <a:off x="640080" y="6419088"/>
-            <a:ext cx="10881360" cy="365760"/>
-          </a:xfrm>
-          <a:prstGeom prst="rect">
-            <a:avLst/>
-          </a:prstGeom>
-          <a:noFill/>
-        </p:spPr>
-        <p:txBody>
-          <a:bodyPr wrap="square" anchor="t">
-            <a:spAutoFit/>
-          </a:bodyPr>
-          <a:lstStyle/>
-          <a:p>
-            <a:pPr algn="l">
-              <a:spcAft>
-                <a:spcPts val="600"/>
-              </a:spcAft>
-            </a:pPr>
-            <a:r>
-              <a:rPr sz="1000" b="0">
-                <a:solidFill>
-                  <a:srgbClr val="8B949E"/>
-                </a:solidFill>
-                <a:latin typeface="Segoe UI"/>
-              </a:rPr>
-              <a:t>DSP · BT Analyzer  —  Teoría de la Información y Sistemas de Comunicación · UNAL</a:t>
+              <a:t>Todo el proyecto son dos ideas: comprimir bien la voz para que quepa en el canal, y protegerla del ruido cuando llega. El resto son detalles de esas dos.</a:t>
             </a:r>
           </a:p>
         </p:txBody>
@@ -9993,20 +9943,276 @@
       </p:sp>
       <p:sp>
         <p:nvSpPr>
-          <p:cNvPr id="3" name="orb"/>
+          <p:cNvPr id="3" name="ic"/>
           <p:cNvSpPr/>
           <p:nvPr/>
         </p:nvSpPr>
         <p:spPr>
           <a:xfrm>
-            <a:off x="9692640" y="-1645920"/>
-            <a:ext cx="3840480" cy="3840480"/>
-          </a:xfrm>
-          <a:prstGeom prst="ellipse">
+            <a:off x="10059314" y="1143000"/>
+            <a:ext cx="729691" cy="1077163"/>
+          </a:xfrm>
+          <a:prstGeom prst="roundRect">
+            <a:avLst/>
+          </a:prstGeom>
+          <a:solidFill>
+            <a:srgbClr val="58A6FF"/>
+          </a:solidFill>
+          <a:ln>
+            <a:noFill/>
+          </a:ln>
+          <a:effectLst/>
+        </p:spPr>
+        <p:style>
+          <a:lnRef idx="1">
+            <a:schemeClr val="accent1"/>
+          </a:lnRef>
+          <a:fillRef idx="3">
+            <a:schemeClr val="accent1"/>
+          </a:fillRef>
+          <a:effectRef idx="2">
+            <a:schemeClr val="accent1"/>
+          </a:effectRef>
+          <a:fontRef idx="minor">
+            <a:schemeClr val="lt1"/>
+          </a:fontRef>
+        </p:style>
+        <p:txBody>
+          <a:bodyPr rtlCol="0" anchor="ctr"/>
+          <a:lstStyle/>
+          <a:p>
+            <a:pPr algn="ctr"/>
+          </a:p>
+        </p:txBody>
+      </p:sp>
+      <p:sp>
+        <p:nvSpPr>
+          <p:cNvPr id="4" name="ic"/>
+          <p:cNvSpPr/>
+          <p:nvPr/>
+        </p:nvSpPr>
+        <p:spPr>
+          <a:xfrm>
+            <a:off x="9876891" y="1903963"/>
+            <a:ext cx="1094536" cy="969446"/>
+          </a:xfrm>
+          <a:prstGeom prst="blockArc">
+            <a:avLst/>
+          </a:prstGeom>
+          <a:solidFill>
+            <a:srgbClr val="58A6FF"/>
+          </a:solidFill>
+          <a:ln>
+            <a:noFill/>
+          </a:ln>
+          <a:effectLst/>
+        </p:spPr>
+        <p:style>
+          <a:lnRef idx="1">
+            <a:schemeClr val="accent1"/>
+          </a:lnRef>
+          <a:fillRef idx="3">
+            <a:schemeClr val="accent1"/>
+          </a:fillRef>
+          <a:effectRef idx="2">
+            <a:schemeClr val="accent1"/>
+          </a:effectRef>
+          <a:fontRef idx="minor">
+            <a:schemeClr val="lt1"/>
+          </a:fontRef>
+        </p:style>
+        <p:txBody>
+          <a:bodyPr rtlCol="0" anchor="ctr"/>
+          <a:lstStyle/>
+          <a:p>
+            <a:pPr algn="ctr"/>
+          </a:p>
+        </p:txBody>
+      </p:sp>
+      <p:sp>
+        <p:nvSpPr>
+          <p:cNvPr id="5" name="ic"/>
+          <p:cNvSpPr/>
+          <p:nvPr/>
+        </p:nvSpPr>
+        <p:spPr>
+          <a:xfrm>
+            <a:off x="10372039" y="2464088"/>
+            <a:ext cx="104241" cy="382219"/>
+          </a:xfrm>
+          <a:prstGeom prst="rect">
+            <a:avLst/>
+          </a:prstGeom>
+          <a:solidFill>
+            <a:srgbClr val="58A6FF"/>
+          </a:solidFill>
+          <a:ln>
+            <a:noFill/>
+          </a:ln>
+          <a:effectLst/>
+        </p:spPr>
+        <p:style>
+          <a:lnRef idx="1">
+            <a:schemeClr val="accent1"/>
+          </a:lnRef>
+          <a:fillRef idx="3">
+            <a:schemeClr val="accent1"/>
+          </a:fillRef>
+          <a:effectRef idx="2">
+            <a:schemeClr val="accent1"/>
+          </a:effectRef>
+          <a:fontRef idx="minor">
+            <a:schemeClr val="lt1"/>
+          </a:fontRef>
+        </p:style>
+        <p:txBody>
+          <a:bodyPr rtlCol="0" anchor="ctr"/>
+          <a:lstStyle/>
+          <a:p>
+            <a:pPr algn="ctr"/>
+          </a:p>
+        </p:txBody>
+      </p:sp>
+      <p:sp>
+        <p:nvSpPr>
+          <p:cNvPr id="6" name="ic"/>
+          <p:cNvSpPr/>
+          <p:nvPr/>
+        </p:nvSpPr>
+        <p:spPr>
+          <a:xfrm>
+            <a:off x="10076688" y="2657977"/>
+            <a:ext cx="694944" cy="104241"/>
+          </a:xfrm>
+          <a:prstGeom prst="roundRect">
+            <a:avLst/>
+          </a:prstGeom>
+          <a:solidFill>
+            <a:srgbClr val="58A6FF"/>
+          </a:solidFill>
+          <a:ln>
+            <a:noFill/>
+          </a:ln>
+          <a:effectLst/>
+        </p:spPr>
+        <p:style>
+          <a:lnRef idx="1">
+            <a:schemeClr val="accent1"/>
+          </a:lnRef>
+          <a:fillRef idx="3">
+            <a:schemeClr val="accent1"/>
+          </a:fillRef>
+          <a:effectRef idx="2">
+            <a:schemeClr val="accent1"/>
+          </a:effectRef>
+          <a:fontRef idx="minor">
+            <a:schemeClr val="lt1"/>
+          </a:fontRef>
+        </p:style>
+        <p:txBody>
+          <a:bodyPr rtlCol="0" anchor="ctr"/>
+          <a:lstStyle/>
+          <a:p>
+            <a:pPr algn="ctr"/>
+          </a:p>
+        </p:txBody>
+      </p:sp>
+      <p:sp>
+        <p:nvSpPr>
+          <p:cNvPr id="7" name="kick"/>
+          <p:cNvSpPr txBox="1"/>
+          <p:nvPr/>
+        </p:nvSpPr>
+        <p:spPr>
+          <a:xfrm>
+            <a:off x="685800" y="457200"/>
+            <a:ext cx="10789920" cy="457200"/>
+          </a:xfrm>
+          <a:prstGeom prst="rect">
             <a:avLst/>
           </a:prstGeom>
           <a:noFill/>
-          <a:ln w="44450">
+        </p:spPr>
+        <p:txBody>
+          <a:bodyPr wrap="square" anchor="t">
+            <a:spAutoFit/>
+          </a:bodyPr>
+          <a:lstStyle/>
+          <a:p>
+            <a:pPr algn="l">
+              <a:spcAft>
+                <a:spcPts val="600"/>
+              </a:spcAft>
+            </a:pPr>
+            <a:r>
+              <a:rPr sz="1300" b="1">
+                <a:solidFill>
+                  <a:srgbClr val="58A6FF"/>
+                </a:solidFill>
+                <a:latin typeface="Segoe UI"/>
+              </a:rPr>
+              <a:t>PASO 1 · CONVERTIR LA VOZ EN NÚMEROS</a:t>
+            </a:r>
+          </a:p>
+        </p:txBody>
+      </p:sp>
+      <p:sp>
+        <p:nvSpPr>
+          <p:cNvPr id="8" name="title"/>
+          <p:cNvSpPr txBox="1"/>
+          <p:nvPr/>
+        </p:nvSpPr>
+        <p:spPr>
+          <a:xfrm>
+            <a:off x="685800" y="932688"/>
+            <a:ext cx="10789920" cy="1554480"/>
+          </a:xfrm>
+          <a:prstGeom prst="rect">
+            <a:avLst/>
+          </a:prstGeom>
+          <a:noFill/>
+        </p:spPr>
+        <p:txBody>
+          <a:bodyPr wrap="square" anchor="t">
+            <a:spAutoFit/>
+          </a:bodyPr>
+          <a:lstStyle/>
+          <a:p>
+            <a:pPr algn="l">
+              <a:spcAft>
+                <a:spcPts val="600"/>
+              </a:spcAft>
+            </a:pPr>
+            <a:r>
+              <a:rPr sz="3000" b="1">
+                <a:solidFill>
+                  <a:srgbClr val="E6EDF3"/>
+                </a:solidFill>
+                <a:latin typeface="Segoe UI"/>
+              </a:rPr>
+              <a:t>8 000 muestras por segundo, 8 bits cada una</a:t>
+            </a:r>
+          </a:p>
+        </p:txBody>
+      </p:sp>
+      <p:sp>
+        <p:nvSpPr>
+          <p:cNvPr id="9" name="card"/>
+          <p:cNvSpPr/>
+          <p:nvPr/>
+        </p:nvSpPr>
+        <p:spPr>
+          <a:xfrm>
+            <a:off x="685800" y="2331720"/>
+            <a:ext cx="3520440" cy="2834640"/>
+          </a:xfrm>
+          <a:prstGeom prst="roundRect">
+            <a:avLst/>
+          </a:prstGeom>
+          <a:solidFill>
+            <a:srgbClr val="161B22"/>
+          </a:solidFill>
+          <a:ln w="15875">
             <a:solidFill>
               <a:srgbClr val="58A6FF"/>
             </a:solidFill>
@@ -10028,213 +10234,224 @@
           </a:fontRef>
         </p:style>
         <p:txBody>
-          <a:bodyPr rtlCol="0" anchor="ctr"/>
+          <a:bodyPr rtlCol="0" anchor="ctr" wrap="square" lIns="182880" rIns="182880" tIns="146304"/>
           <a:lstStyle/>
           <a:p>
             <a:pPr algn="ctr"/>
-          </a:p>
-        </p:txBody>
-      </p:sp>
-      <p:sp>
-        <p:nvSpPr>
-          <p:cNvPr id="4" name="kicker"/>
-          <p:cNvSpPr txBox="1"/>
-          <p:nvPr/>
-        </p:nvSpPr>
-        <p:spPr>
-          <a:xfrm>
-            <a:off x="640080" y="411480"/>
-            <a:ext cx="10881360" cy="457200"/>
-          </a:xfrm>
-          <a:prstGeom prst="rect">
-            <a:avLst/>
-          </a:prstGeom>
-          <a:noFill/>
-        </p:spPr>
-        <p:txBody>
-          <a:bodyPr wrap="square" anchor="t">
-            <a:spAutoFit/>
-          </a:bodyPr>
-          <a:lstStyle/>
-          <a:p>
-            <a:pPr algn="l">
-              <a:spcAft>
-                <a:spcPts val="600"/>
-              </a:spcAft>
-            </a:pPr>
-            <a:r>
-              <a:rPr sz="1300" b="1">
+            <a:r>
+              <a:rPr sz="1600" b="1">
                 <a:solidFill>
                   <a:srgbClr val="58A6FF"/>
                 </a:solidFill>
                 <a:latin typeface="Segoe UI"/>
               </a:rPr>
-              <a:t>NUESTRO PROTOCOLO</a:t>
-            </a:r>
-          </a:p>
-        </p:txBody>
-      </p:sp>
-      <p:sp>
-        <p:nvSpPr>
-          <p:cNvPr id="5" name="title"/>
-          <p:cNvSpPr txBox="1"/>
-          <p:nvPr/>
-        </p:nvSpPr>
-        <p:spPr>
-          <a:xfrm>
-            <a:off x="640080" y="914400"/>
-            <a:ext cx="10881360" cy="1463040"/>
-          </a:xfrm>
-          <a:prstGeom prst="rect">
-            <a:avLst/>
-          </a:prstGeom>
-          <a:noFill/>
-        </p:spPr>
-        <p:txBody>
-          <a:bodyPr wrap="square" anchor="t">
-            <a:spAutoFit/>
-          </a:bodyPr>
-          <a:lstStyle/>
-          <a:p>
-            <a:pPr algn="l">
-              <a:spcAft>
-                <a:spcPts val="600"/>
-              </a:spcAft>
+              <a:t>8 000 por segundo</a:t>
+            </a:r>
+          </a:p>
+          <a:p>
+            <a:pPr>
+              <a:spcBef>
+                <a:spcPts val="400"/>
+              </a:spcBef>
             </a:pPr>
             <a:r>
-              <a:rPr sz="3800" b="1">
+              <a:rPr sz="1250">
                 <a:solidFill>
                   <a:srgbClr val="E6EDF3"/>
                 </a:solidFill>
                 <a:latin typeface="Segoe UI"/>
               </a:rPr>
-              <a:t>Frames de 128 ms, tipo radio</a:t>
-            </a:r>
-          </a:p>
-        </p:txBody>
-      </p:sp>
-      <p:sp>
-        <p:nvSpPr>
-          <p:cNvPr id="6" name="body"/>
-          <p:cNvSpPr txBox="1"/>
-          <p:nvPr/>
-        </p:nvSpPr>
-        <p:spPr>
-          <a:xfrm>
-            <a:off x="640080" y="2148840"/>
-            <a:ext cx="10424160" cy="3657600"/>
-          </a:xfrm>
-          <a:prstGeom prst="rect">
-            <a:avLst/>
-          </a:prstGeom>
-          <a:noFill/>
-        </p:spPr>
-        <p:txBody>
-          <a:bodyPr wrap="square" anchor="t">
-            <a:spAutoFit/>
-          </a:bodyPr>
-          <a:lstStyle/>
-          <a:p>
-            <a:pPr algn="l">
-              <a:spcAft>
-                <a:spcPts val="600"/>
-              </a:spcAft>
+              <a:t>Tomarle una foto a la onda 8 000 veces por segundo.</a:t>
+            </a:r>
+          </a:p>
+          <a:p>
+            <a:pPr>
+              <a:spcBef>
+                <a:spcPts val="400"/>
+              </a:spcBef>
             </a:pPr>
             <a:r>
-              <a:rPr sz="1900" b="0">
+              <a:rPr sz="1250">
                 <a:solidFill>
                   <a:srgbClr val="E6EDF3"/>
                 </a:solidFill>
                 <a:latin typeface="Segoe UI"/>
               </a:rPr>
-              <a:t>1 frame = 1 paquete de 1 024 bytes: 2 de sincronización + 2 de secuencia (SEQ) + 1 020 de voz.</a:t>
-            </a:r>
-          </a:p>
-          <a:p>
-            <a:pPr algn="l">
-              <a:spcAft>
-                <a:spcPts val="600"/>
-              </a:spcAft>
-            </a:pPr>
-            <a:r>
-              <a:rPr sz="1900" b="0">
-                <a:solidFill>
-                  <a:srgbClr val="E6EDF3"/>
+              <a:t>Alcanza para la voz, que llega hasta 3 400 Hz. Más rápido gastaría el doble sin sonar mejor.</a:t>
+            </a:r>
+          </a:p>
+        </p:txBody>
+      </p:sp>
+      <p:sp>
+        <p:nvSpPr>
+          <p:cNvPr id="10" name="card"/>
+          <p:cNvSpPr/>
+          <p:nvPr/>
+        </p:nvSpPr>
+        <p:spPr>
+          <a:xfrm>
+            <a:off x="4343400" y="2331720"/>
+            <a:ext cx="3520440" cy="2834640"/>
+          </a:xfrm>
+          <a:prstGeom prst="roundRect">
+            <a:avLst/>
+          </a:prstGeom>
+          <a:solidFill>
+            <a:srgbClr val="161B22"/>
+          </a:solidFill>
+          <a:ln w="15875">
+            <a:solidFill>
+              <a:srgbClr val="3FB950"/>
+            </a:solidFill>
+          </a:ln>
+          <a:effectLst/>
+        </p:spPr>
+        <p:style>
+          <a:lnRef idx="1">
+            <a:schemeClr val="accent1"/>
+          </a:lnRef>
+          <a:fillRef idx="3">
+            <a:schemeClr val="accent1"/>
+          </a:fillRef>
+          <a:effectRef idx="2">
+            <a:schemeClr val="accent1"/>
+          </a:effectRef>
+          <a:fontRef idx="minor">
+            <a:schemeClr val="lt1"/>
+          </a:fontRef>
+        </p:style>
+        <p:txBody>
+          <a:bodyPr rtlCol="0" anchor="ctr" wrap="square" lIns="182880" rIns="182880" tIns="146304"/>
+          <a:lstStyle/>
+          <a:p>
+            <a:pPr algn="ctr"/>
+            <a:r>
+              <a:rPr sz="1600" b="1">
+                <a:solidFill>
+                  <a:srgbClr val="3FB950"/>
                 </a:solidFill>
                 <a:latin typeface="Segoe UI"/>
               </a:rPr>
-              <a:t>El SEQ delata pérdidas: llega el 41, llega el 44… faltaron dos. Sin preguntar nada.</a:t>
-            </a:r>
-          </a:p>
-          <a:p>
-            <a:pPr algn="l">
-              <a:spcAft>
-                <a:spcPts val="600"/>
-              </a:spcAft>
+              <a:t>16 → 8 bits</a:t>
+            </a:r>
+          </a:p>
+          <a:p>
+            <a:pPr>
+              <a:spcBef>
+                <a:spcPts val="400"/>
+              </a:spcBef>
             </a:pPr>
             <a:r>
-              <a:rPr sz="1900" b="0">
-                <a:solidFill>
-                  <a:srgbClr val="3FB950"/>
+              <a:rPr sz="1250">
+                <a:solidFill>
+                  <a:srgbClr val="E6EDF3"/>
                 </a:solidFill>
                 <a:latin typeface="Segoe UI"/>
               </a:rPr>
-              <a:t>VAD: si el frame no tiene voz (energía RMS bajo umbral), no viaja. El silencio no gasta canal.</a:t>
-            </a:r>
-          </a:p>
-          <a:p>
-            <a:pPr algn="l">
-              <a:spcAft>
-                <a:spcPts val="600"/>
-              </a:spcAft>
+              <a:t>Cada muestra es la altura de la onda, medida con precisión.</a:t>
+            </a:r>
+          </a:p>
+          <a:p>
+            <a:pPr>
+              <a:spcBef>
+                <a:spcPts val="400"/>
+              </a:spcBef>
             </a:pPr>
             <a:r>
-              <a:rPr sz="1900" b="0">
-                <a:solidFill>
-                  <a:srgbClr val="58A6FF"/>
+              <a:rPr sz="1250">
+                <a:solidFill>
+                  <a:srgbClr val="E6EDF3"/>
                 </a:solidFill>
                 <a:latin typeface="Segoe UI"/>
               </a:rPr>
-              <a:t>PING/PONG cada 2 s: latencia de ida y vuelta medida con UN solo reloj — los relojes de dos teléfonos jamás coinciden.</a:t>
-            </a:r>
-          </a:p>
-        </p:txBody>
-      </p:sp>
-      <p:sp>
-        <p:nvSpPr>
-          <p:cNvPr id="7" name="foot"/>
-          <p:cNvSpPr txBox="1"/>
-          <p:nvPr/>
-        </p:nvSpPr>
-        <p:spPr>
-          <a:xfrm>
-            <a:off x="640080" y="6419088"/>
-            <a:ext cx="10881360" cy="365760"/>
-          </a:xfrm>
-          <a:prstGeom prst="rect">
-            <a:avLst/>
-          </a:prstGeom>
-          <a:noFill/>
-        </p:spPr>
-        <p:txBody>
-          <a:bodyPr wrap="square" anchor="t">
-            <a:spAutoFit/>
-          </a:bodyPr>
-          <a:lstStyle/>
-          <a:p>
-            <a:pPr algn="l">
-              <a:spcAft>
-                <a:spcPts val="600"/>
-              </a:spcAft>
-            </a:pPr>
-            <a:r>
-              <a:rPr sz="1000" b="0">
-                <a:solidFill>
-                  <a:srgbClr val="8B949E"/>
+              <a:t>La comprimimos a la mitad con μ-law, aprovechando que el oído nota más los sonidos suaves que los fuertes.</a:t>
+            </a:r>
+          </a:p>
+        </p:txBody>
+      </p:sp>
+      <p:sp>
+        <p:nvSpPr>
+          <p:cNvPr id="11" name="card"/>
+          <p:cNvSpPr/>
+          <p:nvPr/>
+        </p:nvSpPr>
+        <p:spPr>
+          <a:xfrm>
+            <a:off x="8001000" y="2331720"/>
+            <a:ext cx="3520440" cy="2834640"/>
+          </a:xfrm>
+          <a:prstGeom prst="roundRect">
+            <a:avLst/>
+          </a:prstGeom>
+          <a:solidFill>
+            <a:srgbClr val="161B22"/>
+          </a:solidFill>
+          <a:ln w="15875">
+            <a:solidFill>
+              <a:srgbClr val="D29922"/>
+            </a:solidFill>
+          </a:ln>
+          <a:effectLst/>
+        </p:spPr>
+        <p:style>
+          <a:lnRef idx="1">
+            <a:schemeClr val="accent1"/>
+          </a:lnRef>
+          <a:fillRef idx="3">
+            <a:schemeClr val="accent1"/>
+          </a:fillRef>
+          <a:effectRef idx="2">
+            <a:schemeClr val="accent1"/>
+          </a:effectRef>
+          <a:fontRef idx="minor">
+            <a:schemeClr val="lt1"/>
+          </a:fontRef>
+        </p:style>
+        <p:txBody>
+          <a:bodyPr rtlCol="0" anchor="ctr" wrap="square" lIns="182880" rIns="182880" tIns="146304"/>
+          <a:lstStyle/>
+          <a:p>
+            <a:pPr algn="ctr"/>
+            <a:r>
+              <a:rPr sz="1600" b="1">
+                <a:solidFill>
+                  <a:srgbClr val="D29922"/>
                 </a:solidFill>
                 <a:latin typeface="Segoe UI"/>
               </a:rPr>
-              <a:t>DSP · BT Analyzer  —  Teoría de la Información y Sistemas de Comunicación · UNAL</a:t>
+              <a:t>Como un teléfono</a:t>
+            </a:r>
+          </a:p>
+          <a:p>
+            <a:pPr>
+              <a:spcBef>
+                <a:spcPts val="400"/>
+              </a:spcBef>
+            </a:pPr>
+            <a:r>
+              <a:rPr sz="1250">
+                <a:solidFill>
+                  <a:srgbClr val="E6EDF3"/>
+                </a:solidFill>
+                <a:latin typeface="Segoe UI"/>
+              </a:rPr>
+              <a:t>μ-law es el estándar de la telefonía (G.711), de 1972.</a:t>
+            </a:r>
+          </a:p>
+          <a:p>
+            <a:pPr>
+              <a:spcBef>
+                <a:spcPts val="400"/>
+              </a:spcBef>
+            </a:pPr>
+            <a:r>
+              <a:rPr sz="1250">
+                <a:solidFill>
+                  <a:srgbClr val="E6EDF3"/>
+                </a:solidFill>
+                <a:latin typeface="Segoe UI"/>
+              </a:rPr>
+              <a:t>El resultado: calidad de llamada, con 4 veces menos datos que al principio.</a:t>
             </a:r>
           </a:p>
         </p:txBody>
@@ -10315,23 +10532,23 @@
       </p:sp>
       <p:sp>
         <p:nvSpPr>
-          <p:cNvPr id="3" name="orb"/>
+          <p:cNvPr id="3" name="ic"/>
           <p:cNvSpPr/>
           <p:nvPr/>
         </p:nvSpPr>
         <p:spPr>
           <a:xfrm>
-            <a:off x="4937760" y="1737360"/>
-            <a:ext cx="2377440" cy="2377440"/>
-          </a:xfrm>
-          <a:prstGeom prst="ellipse">
-            <a:avLst/>
-          </a:prstGeom>
-          <a:noFill/>
-          <a:ln w="44450">
-            <a:solidFill>
-              <a:srgbClr val="F85149"/>
-            </a:solidFill>
+            <a:off x="9106509" y="1739646"/>
+            <a:ext cx="155448" cy="544068"/>
+          </a:xfrm>
+          <a:prstGeom prst="roundRect">
+            <a:avLst/>
+          </a:prstGeom>
+          <a:solidFill>
+            <a:srgbClr val="3FB950"/>
+          </a:solidFill>
+          <a:ln>
+            <a:noFill/>
           </a:ln>
           <a:effectLst/>
         </p:spPr>
@@ -10359,14 +10576,366 @@
       </p:sp>
       <p:sp>
         <p:nvSpPr>
-          <p:cNvPr id="4" name="kicker"/>
+          <p:cNvPr id="4" name="ic"/>
+          <p:cNvSpPr/>
+          <p:nvPr/>
+        </p:nvSpPr>
+        <p:spPr>
+          <a:xfrm>
+            <a:off x="9370771" y="1545336"/>
+            <a:ext cx="155448" cy="932688"/>
+          </a:xfrm>
+          <a:prstGeom prst="roundRect">
+            <a:avLst/>
+          </a:prstGeom>
+          <a:solidFill>
+            <a:srgbClr val="3FB950"/>
+          </a:solidFill>
+          <a:ln>
+            <a:noFill/>
+          </a:ln>
+          <a:effectLst/>
+        </p:spPr>
+        <p:style>
+          <a:lnRef idx="1">
+            <a:schemeClr val="accent1"/>
+          </a:lnRef>
+          <a:fillRef idx="3">
+            <a:schemeClr val="accent1"/>
+          </a:fillRef>
+          <a:effectRef idx="2">
+            <a:schemeClr val="accent1"/>
+          </a:effectRef>
+          <a:fontRef idx="minor">
+            <a:schemeClr val="lt1"/>
+          </a:fontRef>
+        </p:style>
+        <p:txBody>
+          <a:bodyPr rtlCol="0" anchor="ctr"/>
+          <a:lstStyle/>
+          <a:p>
+            <a:pPr algn="ctr"/>
+          </a:p>
+        </p:txBody>
+      </p:sp>
+      <p:sp>
+        <p:nvSpPr>
+          <p:cNvPr id="5" name="ic"/>
+          <p:cNvSpPr/>
+          <p:nvPr/>
+        </p:nvSpPr>
+        <p:spPr>
+          <a:xfrm>
+            <a:off x="9635032" y="1312164"/>
+            <a:ext cx="155448" cy="1399032"/>
+          </a:xfrm>
+          <a:prstGeom prst="roundRect">
+            <a:avLst/>
+          </a:prstGeom>
+          <a:solidFill>
+            <a:srgbClr val="3FB950"/>
+          </a:solidFill>
+          <a:ln>
+            <a:noFill/>
+          </a:ln>
+          <a:effectLst/>
+        </p:spPr>
+        <p:style>
+          <a:lnRef idx="1">
+            <a:schemeClr val="accent1"/>
+          </a:lnRef>
+          <a:fillRef idx="3">
+            <a:schemeClr val="accent1"/>
+          </a:fillRef>
+          <a:effectRef idx="2">
+            <a:schemeClr val="accent1"/>
+          </a:effectRef>
+          <a:fontRef idx="minor">
+            <a:schemeClr val="lt1"/>
+          </a:fontRef>
+        </p:style>
+        <p:txBody>
+          <a:bodyPr rtlCol="0" anchor="ctr"/>
+          <a:lstStyle/>
+          <a:p>
+            <a:pPr algn="ctr"/>
+          </a:p>
+        </p:txBody>
+      </p:sp>
+      <p:sp>
+        <p:nvSpPr>
+          <p:cNvPr id="6" name="ic"/>
+          <p:cNvSpPr/>
+          <p:nvPr/>
+        </p:nvSpPr>
+        <p:spPr>
+          <a:xfrm>
+            <a:off x="9899294" y="1623060"/>
+            <a:ext cx="155448" cy="777240"/>
+          </a:xfrm>
+          <a:prstGeom prst="roundRect">
+            <a:avLst/>
+          </a:prstGeom>
+          <a:solidFill>
+            <a:srgbClr val="3FB950"/>
+          </a:solidFill>
+          <a:ln>
+            <a:noFill/>
+          </a:ln>
+          <a:effectLst/>
+        </p:spPr>
+        <p:style>
+          <a:lnRef idx="1">
+            <a:schemeClr val="accent1"/>
+          </a:lnRef>
+          <a:fillRef idx="3">
+            <a:schemeClr val="accent1"/>
+          </a:fillRef>
+          <a:effectRef idx="2">
+            <a:schemeClr val="accent1"/>
+          </a:effectRef>
+          <a:fontRef idx="minor">
+            <a:schemeClr val="lt1"/>
+          </a:fontRef>
+        </p:style>
+        <p:txBody>
+          <a:bodyPr rtlCol="0" anchor="ctr"/>
+          <a:lstStyle/>
+          <a:p>
+            <a:pPr algn="ctr"/>
+          </a:p>
+        </p:txBody>
+      </p:sp>
+      <p:sp>
+        <p:nvSpPr>
+          <p:cNvPr id="7" name="ic"/>
+          <p:cNvSpPr/>
+          <p:nvPr/>
+        </p:nvSpPr>
+        <p:spPr>
+          <a:xfrm>
+            <a:off x="10163556" y="1234440"/>
+            <a:ext cx="155448" cy="1554480"/>
+          </a:xfrm>
+          <a:prstGeom prst="roundRect">
+            <a:avLst/>
+          </a:prstGeom>
+          <a:solidFill>
+            <a:srgbClr val="3FB950"/>
+          </a:solidFill>
+          <a:ln>
+            <a:noFill/>
+          </a:ln>
+          <a:effectLst/>
+        </p:spPr>
+        <p:style>
+          <a:lnRef idx="1">
+            <a:schemeClr val="accent1"/>
+          </a:lnRef>
+          <a:fillRef idx="3">
+            <a:schemeClr val="accent1"/>
+          </a:fillRef>
+          <a:effectRef idx="2">
+            <a:schemeClr val="accent1"/>
+          </a:effectRef>
+          <a:fontRef idx="minor">
+            <a:schemeClr val="lt1"/>
+          </a:fontRef>
+        </p:style>
+        <p:txBody>
+          <a:bodyPr rtlCol="0" anchor="ctr"/>
+          <a:lstStyle/>
+          <a:p>
+            <a:pPr algn="ctr"/>
+          </a:p>
+        </p:txBody>
+      </p:sp>
+      <p:sp>
+        <p:nvSpPr>
+          <p:cNvPr id="8" name="ic"/>
+          <p:cNvSpPr/>
+          <p:nvPr/>
+        </p:nvSpPr>
+        <p:spPr>
+          <a:xfrm>
+            <a:off x="10427817" y="1661922"/>
+            <a:ext cx="155448" cy="699516"/>
+          </a:xfrm>
+          <a:prstGeom prst="roundRect">
+            <a:avLst/>
+          </a:prstGeom>
+          <a:solidFill>
+            <a:srgbClr val="3FB950"/>
+          </a:solidFill>
+          <a:ln>
+            <a:noFill/>
+          </a:ln>
+          <a:effectLst/>
+        </p:spPr>
+        <p:style>
+          <a:lnRef idx="1">
+            <a:schemeClr val="accent1"/>
+          </a:lnRef>
+          <a:fillRef idx="3">
+            <a:schemeClr val="accent1"/>
+          </a:fillRef>
+          <a:effectRef idx="2">
+            <a:schemeClr val="accent1"/>
+          </a:effectRef>
+          <a:fontRef idx="minor">
+            <a:schemeClr val="lt1"/>
+          </a:fontRef>
+        </p:style>
+        <p:txBody>
+          <a:bodyPr rtlCol="0" anchor="ctr"/>
+          <a:lstStyle/>
+          <a:p>
+            <a:pPr algn="ctr"/>
+          </a:p>
+        </p:txBody>
+      </p:sp>
+      <p:sp>
+        <p:nvSpPr>
+          <p:cNvPr id="9" name="ic"/>
+          <p:cNvSpPr/>
+          <p:nvPr/>
+        </p:nvSpPr>
+        <p:spPr>
+          <a:xfrm>
+            <a:off x="10692079" y="1351026"/>
+            <a:ext cx="155448" cy="1321307"/>
+          </a:xfrm>
+          <a:prstGeom prst="roundRect">
+            <a:avLst/>
+          </a:prstGeom>
+          <a:solidFill>
+            <a:srgbClr val="3FB950"/>
+          </a:solidFill>
+          <a:ln>
+            <a:noFill/>
+          </a:ln>
+          <a:effectLst/>
+        </p:spPr>
+        <p:style>
+          <a:lnRef idx="1">
+            <a:schemeClr val="accent1"/>
+          </a:lnRef>
+          <a:fillRef idx="3">
+            <a:schemeClr val="accent1"/>
+          </a:fillRef>
+          <a:effectRef idx="2">
+            <a:schemeClr val="accent1"/>
+          </a:effectRef>
+          <a:fontRef idx="minor">
+            <a:schemeClr val="lt1"/>
+          </a:fontRef>
+        </p:style>
+        <p:txBody>
+          <a:bodyPr rtlCol="0" anchor="ctr"/>
+          <a:lstStyle/>
+          <a:p>
+            <a:pPr algn="ctr"/>
+          </a:p>
+        </p:txBody>
+      </p:sp>
+      <p:sp>
+        <p:nvSpPr>
+          <p:cNvPr id="10" name="ic"/>
+          <p:cNvSpPr/>
+          <p:nvPr/>
+        </p:nvSpPr>
+        <p:spPr>
+          <a:xfrm>
+            <a:off x="10956340" y="1545336"/>
+            <a:ext cx="155448" cy="932688"/>
+          </a:xfrm>
+          <a:prstGeom prst="roundRect">
+            <a:avLst/>
+          </a:prstGeom>
+          <a:solidFill>
+            <a:srgbClr val="3FB950"/>
+          </a:solidFill>
+          <a:ln>
+            <a:noFill/>
+          </a:ln>
+          <a:effectLst/>
+        </p:spPr>
+        <p:style>
+          <a:lnRef idx="1">
+            <a:schemeClr val="accent1"/>
+          </a:lnRef>
+          <a:fillRef idx="3">
+            <a:schemeClr val="accent1"/>
+          </a:fillRef>
+          <a:effectRef idx="2">
+            <a:schemeClr val="accent1"/>
+          </a:effectRef>
+          <a:fontRef idx="minor">
+            <a:schemeClr val="lt1"/>
+          </a:fontRef>
+        </p:style>
+        <p:txBody>
+          <a:bodyPr rtlCol="0" anchor="ctr"/>
+          <a:lstStyle/>
+          <a:p>
+            <a:pPr algn="ctr"/>
+          </a:p>
+        </p:txBody>
+      </p:sp>
+      <p:sp>
+        <p:nvSpPr>
+          <p:cNvPr id="11" name="ic"/>
+          <p:cNvSpPr/>
+          <p:nvPr/>
+        </p:nvSpPr>
+        <p:spPr>
+          <a:xfrm>
+            <a:off x="11220602" y="1739646"/>
+            <a:ext cx="155448" cy="544068"/>
+          </a:xfrm>
+          <a:prstGeom prst="roundRect">
+            <a:avLst/>
+          </a:prstGeom>
+          <a:solidFill>
+            <a:srgbClr val="3FB950"/>
+          </a:solidFill>
+          <a:ln>
+            <a:noFill/>
+          </a:ln>
+          <a:effectLst/>
+        </p:spPr>
+        <p:style>
+          <a:lnRef idx="1">
+            <a:schemeClr val="accent1"/>
+          </a:lnRef>
+          <a:fillRef idx="3">
+            <a:schemeClr val="accent1"/>
+          </a:fillRef>
+          <a:effectRef idx="2">
+            <a:schemeClr val="accent1"/>
+          </a:effectRef>
+          <a:fontRef idx="minor">
+            <a:schemeClr val="lt1"/>
+          </a:fontRef>
+        </p:style>
+        <p:txBody>
+          <a:bodyPr rtlCol="0" anchor="ctr"/>
+          <a:lstStyle/>
+          <a:p>
+            <a:pPr algn="ctr"/>
+          </a:p>
+        </p:txBody>
+      </p:sp>
+      <p:sp>
+        <p:nvSpPr>
+          <p:cNvPr id="12" name="kick"/>
           <p:cNvSpPr txBox="1"/>
           <p:nvPr/>
         </p:nvSpPr>
         <p:spPr>
           <a:xfrm>
-            <a:off x="640080" y="411480"/>
-            <a:ext cx="10881360" cy="457200"/>
+            <a:off x="685800" y="457200"/>
+            <a:ext cx="10789920" cy="457200"/>
           </a:xfrm>
           <a:prstGeom prst="rect">
             <a:avLst/>
@@ -10387,25 +10956,25 @@
             <a:r>
               <a:rPr sz="1300" b="1">
                 <a:solidFill>
-                  <a:srgbClr val="F85149"/>
+                  <a:srgbClr val="58A6FF"/>
                 </a:solidFill>
                 <a:latin typeface="Segoe UI"/>
               </a:rPr>
-              <a:t>HISTORIA · VERSIÓN 1</a:t>
-            </a:r>
-          </a:p>
-        </p:txBody>
-      </p:sp>
-      <p:sp>
-        <p:nvSpPr>
-          <p:cNvPr id="5" name="title"/>
+              <a:t>PASO 2 · EMPAQUETAR Y ENVIAR</a:t>
+            </a:r>
+          </a:p>
+        </p:txBody>
+      </p:sp>
+      <p:sp>
+        <p:nvSpPr>
+          <p:cNvPr id="13" name="title"/>
           <p:cNvSpPr txBox="1"/>
           <p:nvPr/>
         </p:nvSpPr>
         <p:spPr>
           <a:xfrm>
-            <a:off x="640080" y="914400"/>
-            <a:ext cx="10881360" cy="1463040"/>
+            <a:off x="685800" y="932688"/>
+            <a:ext cx="10789920" cy="1554480"/>
           </a:xfrm>
           <a:prstGeom prst="rect">
             <a:avLst/>
@@ -10424,27 +10993,27 @@
               </a:spcAft>
             </a:pPr>
             <a:r>
-              <a:rPr sz="3800" b="1">
+              <a:rPr sz="3000" b="1">
                 <a:solidFill>
                   <a:srgbClr val="E6EDF3"/>
                 </a:solidFill>
                 <a:latin typeface="Segoe UI"/>
               </a:rPr>
-              <a:t>El día que la app moría sola</a:t>
-            </a:r>
-          </a:p>
-        </p:txBody>
-      </p:sp>
-      <p:sp>
-        <p:nvSpPr>
-          <p:cNvPr id="6" name="body"/>
+              <a:t>Pedacitos de 128 ms que salen apenas se llenan</a:t>
+            </a:r>
+          </a:p>
+        </p:txBody>
+      </p:sp>
+      <p:sp>
+        <p:nvSpPr>
+          <p:cNvPr id="14" name="tx"/>
           <p:cNvSpPr txBox="1"/>
           <p:nvPr/>
         </p:nvSpPr>
         <p:spPr>
           <a:xfrm>
-            <a:off x="640080" y="2377440"/>
-            <a:ext cx="10424160" cy="2194560"/>
+            <a:off x="685800" y="2468880"/>
+            <a:ext cx="9692640" cy="3108960"/>
           </a:xfrm>
           <a:prstGeom prst="rect">
             <a:avLst/>
@@ -10456,6 +11025,38 @@
             <a:spAutoFit/>
           </a:bodyPr>
           <a:lstStyle/>
+          <a:p>
+            <a:pPr algn="l">
+              <a:spcAft>
+                <a:spcPts val="1200"/>
+              </a:spcAft>
+            </a:pPr>
+            <a:r>
+              <a:rPr sz="1900" b="0">
+                <a:solidFill>
+                  <a:srgbClr val="E6EDF3"/>
+                </a:solidFill>
+                <a:latin typeface="Segoe UI"/>
+              </a:rPr>
+              <a:t>Cada paquete lleva un número de orden. Si llega el 5 y luego el 8, el receptor sabe que se perdieron el 6 y el 7 — sin preguntar nada.</a:t>
+            </a:r>
+          </a:p>
+          <a:p>
+            <a:pPr algn="l">
+              <a:spcAft>
+                <a:spcPts val="1200"/>
+              </a:spcAft>
+            </a:pPr>
+            <a:r>
+              <a:rPr sz="1900" b="0">
+                <a:solidFill>
+                  <a:srgbClr val="3FB950"/>
+                </a:solidFill>
+                <a:latin typeface="Segoe UI"/>
+              </a:rPr>
+              <a:t>Si un pedacito es silencio, no se envía. En una conversación normal cada persona calla más de la mitad del tiempo: ese ahorro es enorme.</a:t>
+            </a:r>
+          </a:p>
           <a:p>
             <a:pPr algn="l">
               <a:spcAft>
@@ -10465,105 +11066,11 @@
             <a:r>
               <a:rPr sz="1900" b="0">
                 <a:solidFill>
-                  <a:srgbClr val="E6EDF3"/>
+                  <a:srgbClr val="8B949E"/>
                 </a:solidFill>
                 <a:latin typeface="Segoe UI"/>
               </a:rPr>
-              <a:t>Cierre repentino, sin una sola excepción en nuestro código.</a:t>
-            </a:r>
-          </a:p>
-          <a:p>
-            <a:pPr algn="l">
-              <a:spcAft>
-                <a:spcPts val="600"/>
-              </a:spcAft>
-            </a:pPr>
-            <a:r>
-              <a:rPr sz="1900" b="0">
-                <a:solidFill>
-                  <a:srgbClr val="E6EDF3"/>
-                </a:solidFill>
-                <a:latin typeface="Segoe UI"/>
-              </a:rPr>
-              <a:t>Con adb logcat leímos el volcado nativo: el fallo estaba DENTRO de la librería de audio de Flutter (bug público #508), en tres teléfonos distintos.</a:t>
-            </a:r>
-          </a:p>
-        </p:txBody>
-      </p:sp>
-      <p:sp>
-        <p:nvSpPr>
-          <p:cNvPr id="7" name="accent"/>
-          <p:cNvSpPr txBox="1"/>
-          <p:nvPr/>
-        </p:nvSpPr>
-        <p:spPr>
-          <a:xfrm>
-            <a:off x="640080" y="4663440"/>
-            <a:ext cx="10424160" cy="822960"/>
-          </a:xfrm>
-          <a:prstGeom prst="rect">
-            <a:avLst/>
-          </a:prstGeom>
-          <a:noFill/>
-        </p:spPr>
-        <p:txBody>
-          <a:bodyPr wrap="square" anchor="t">
-            <a:spAutoFit/>
-          </a:bodyPr>
-          <a:lstStyle/>
-          <a:p>
-            <a:pPr algn="l">
-              <a:spcAft>
-                <a:spcPts val="600"/>
-              </a:spcAft>
-            </a:pPr>
-            <a:r>
-              <a:rPr sz="2000" b="1">
-                <a:solidFill>
-                  <a:srgbClr val="3FB950"/>
-                </a:solidFill>
-                <a:latin typeface="Segoe UI"/>
-              </a:rPr>
-              <a:t>Solución: escribir nuestro propio reproductor — AudioTrack, en Kotlin, un solo hilo escritor.</a:t>
-            </a:r>
-          </a:p>
-        </p:txBody>
-      </p:sp>
-      <p:sp>
-        <p:nvSpPr>
-          <p:cNvPr id="8" name="foot"/>
-          <p:cNvSpPr txBox="1"/>
-          <p:nvPr/>
-        </p:nvSpPr>
-        <p:spPr>
-          <a:xfrm>
-            <a:off x="640080" y="6419088"/>
-            <a:ext cx="10881360" cy="365760"/>
-          </a:xfrm>
-          <a:prstGeom prst="rect">
-            <a:avLst/>
-          </a:prstGeom>
-          <a:noFill/>
-        </p:spPr>
-        <p:txBody>
-          <a:bodyPr wrap="square" anchor="t">
-            <a:spAutoFit/>
-          </a:bodyPr>
-          <a:lstStyle/>
-          <a:p>
-            <a:pPr algn="l">
-              <a:spcAft>
-                <a:spcPts val="600"/>
-              </a:spcAft>
-            </a:pPr>
-            <a:r>
-              <a:rPr sz="1000" b="0">
-                <a:solidFill>
-                  <a:srgbClr val="8B949E"/>
-                </a:solidFill>
-                <a:latin typeface="Segoe UI"/>
-              </a:rPr>
-              <a:t>DSP · BT Analyzer  —  Teoría de la Información y Sistemas de Comunicación · UNAL</a:t>
+              <a:t>Y para medir el retraso mandamos aparte un mensajito diminuto de 12 bytes que rebota — no la voz completa.</a:t>
             </a:r>
           </a:p>
         </p:txBody>
@@ -10644,23 +11151,23 @@
       </p:sp>
       <p:sp>
         <p:nvSpPr>
-          <p:cNvPr id="3" name="orb"/>
+          <p:cNvPr id="3" name="ic"/>
           <p:cNvSpPr/>
           <p:nvPr/>
         </p:nvSpPr>
         <p:spPr>
           <a:xfrm>
-            <a:off x="8138160" y="1920240"/>
-            <a:ext cx="3291840" cy="3291840"/>
-          </a:xfrm>
-          <a:prstGeom prst="ellipse">
-            <a:avLst/>
-          </a:prstGeom>
-          <a:noFill/>
-          <a:ln w="44450">
-            <a:solidFill>
-              <a:srgbClr val="F85149"/>
-            </a:solidFill>
+            <a:off x="10078516" y="1188720"/>
+            <a:ext cx="691286" cy="1020470"/>
+          </a:xfrm>
+          <a:prstGeom prst="roundRect">
+            <a:avLst/>
+          </a:prstGeom>
+          <a:solidFill>
+            <a:srgbClr val="F85149"/>
+          </a:solidFill>
+          <a:ln>
+            <a:noFill/>
           </a:ln>
           <a:effectLst/>
         </p:spPr>
@@ -10688,14 +11195,146 @@
       </p:sp>
       <p:sp>
         <p:nvSpPr>
-          <p:cNvPr id="4" name="kicker"/>
+          <p:cNvPr id="4" name="ic"/>
+          <p:cNvSpPr/>
+          <p:nvPr/>
+        </p:nvSpPr>
+        <p:spPr>
+          <a:xfrm>
+            <a:off x="9905695" y="1909632"/>
+            <a:ext cx="1036929" cy="918423"/>
+          </a:xfrm>
+          <a:prstGeom prst="blockArc">
+            <a:avLst/>
+          </a:prstGeom>
+          <a:solidFill>
+            <a:srgbClr val="F85149"/>
+          </a:solidFill>
+          <a:ln>
+            <a:noFill/>
+          </a:ln>
+          <a:effectLst/>
+        </p:spPr>
+        <p:style>
+          <a:lnRef idx="1">
+            <a:schemeClr val="accent1"/>
+          </a:lnRef>
+          <a:fillRef idx="3">
+            <a:schemeClr val="accent1"/>
+          </a:fillRef>
+          <a:effectRef idx="2">
+            <a:schemeClr val="accent1"/>
+          </a:effectRef>
+          <a:fontRef idx="minor">
+            <a:schemeClr val="lt1"/>
+          </a:fontRef>
+        </p:style>
+        <p:txBody>
+          <a:bodyPr rtlCol="0" anchor="ctr"/>
+          <a:lstStyle/>
+          <a:p>
+            <a:pPr algn="ctr"/>
+          </a:p>
+        </p:txBody>
+      </p:sp>
+      <p:sp>
+        <p:nvSpPr>
+          <p:cNvPr id="5" name="ic"/>
+          <p:cNvSpPr/>
+          <p:nvPr/>
+        </p:nvSpPr>
+        <p:spPr>
+          <a:xfrm>
+            <a:off x="10374782" y="2440277"/>
+            <a:ext cx="98755" cy="362102"/>
+          </a:xfrm>
+          <a:prstGeom prst="rect">
+            <a:avLst/>
+          </a:prstGeom>
+          <a:solidFill>
+            <a:srgbClr val="F85149"/>
+          </a:solidFill>
+          <a:ln>
+            <a:noFill/>
+          </a:ln>
+          <a:effectLst/>
+        </p:spPr>
+        <p:style>
+          <a:lnRef idx="1">
+            <a:schemeClr val="accent1"/>
+          </a:lnRef>
+          <a:fillRef idx="3">
+            <a:schemeClr val="accent1"/>
+          </a:fillRef>
+          <a:effectRef idx="2">
+            <a:schemeClr val="accent1"/>
+          </a:effectRef>
+          <a:fontRef idx="minor">
+            <a:schemeClr val="lt1"/>
+          </a:fontRef>
+        </p:style>
+        <p:txBody>
+          <a:bodyPr rtlCol="0" anchor="ctr"/>
+          <a:lstStyle/>
+          <a:p>
+            <a:pPr algn="ctr"/>
+          </a:p>
+        </p:txBody>
+      </p:sp>
+      <p:sp>
+        <p:nvSpPr>
+          <p:cNvPr id="6" name="ic"/>
+          <p:cNvSpPr/>
+          <p:nvPr/>
+        </p:nvSpPr>
+        <p:spPr>
+          <a:xfrm>
+            <a:off x="10094976" y="2623962"/>
+            <a:ext cx="658368" cy="98755"/>
+          </a:xfrm>
+          <a:prstGeom prst="roundRect">
+            <a:avLst/>
+          </a:prstGeom>
+          <a:solidFill>
+            <a:srgbClr val="F85149"/>
+          </a:solidFill>
+          <a:ln>
+            <a:noFill/>
+          </a:ln>
+          <a:effectLst/>
+        </p:spPr>
+        <p:style>
+          <a:lnRef idx="1">
+            <a:schemeClr val="accent1"/>
+          </a:lnRef>
+          <a:fillRef idx="3">
+            <a:schemeClr val="accent1"/>
+          </a:fillRef>
+          <a:effectRef idx="2">
+            <a:schemeClr val="accent1"/>
+          </a:effectRef>
+          <a:fontRef idx="minor">
+            <a:schemeClr val="lt1"/>
+          </a:fontRef>
+        </p:style>
+        <p:txBody>
+          <a:bodyPr rtlCol="0" anchor="ctr"/>
+          <a:lstStyle/>
+          <a:p>
+            <a:pPr algn="ctr"/>
+          </a:p>
+        </p:txBody>
+      </p:sp>
+      <p:sp>
+        <p:nvSpPr>
+          <p:cNvPr id="7" name="kick"/>
           <p:cNvSpPr txBox="1"/>
           <p:nvPr/>
         </p:nvSpPr>
         <p:spPr>
           <a:xfrm>
-            <a:off x="640080" y="411480"/>
-            <a:ext cx="10881360" cy="457200"/>
+            <a:off x="685800" y="457200"/>
+            <a:ext cx="10789920" cy="457200"/>
           </a:xfrm>
           <a:prstGeom prst="rect">
             <a:avLst/>
@@ -10720,21 +11359,21 @@
                 </a:solidFill>
                 <a:latin typeface="Segoe UI"/>
               </a:rPr>
-              <a:t>HISTORIA · VERSIÓN 2</a:t>
-            </a:r>
-          </a:p>
-        </p:txBody>
-      </p:sp>
-      <p:sp>
-        <p:nvSpPr>
-          <p:cNvPr id="5" name="title"/>
+              <a:t>LO QUE SALIÓ MAL, Y CÓMO SE RESOLVIÓ</a:t>
+            </a:r>
+          </a:p>
+        </p:txBody>
+      </p:sp>
+      <p:sp>
+        <p:nvSpPr>
+          <p:cNvPr id="8" name="title"/>
           <p:cNvSpPr txBox="1"/>
           <p:nvPr/>
         </p:nvSpPr>
         <p:spPr>
           <a:xfrm>
-            <a:off x="640080" y="914400"/>
-            <a:ext cx="10881360" cy="1463040"/>
+            <a:off x="685800" y="932688"/>
+            <a:ext cx="10789920" cy="1554480"/>
           </a:xfrm>
           <a:prstGeom prst="rect">
             <a:avLst/>
@@ -10753,27 +11392,27 @@
               </a:spcAft>
             </a:pPr>
             <a:r>
-              <a:rPr sz="3800" b="1">
+              <a:rPr sz="3000" b="1">
                 <a:solidFill>
                   <a:srgbClr val="E6EDF3"/>
                 </a:solidFill>
                 <a:latin typeface="Segoe UI"/>
               </a:rPr>
-              <a:t>La latencia que solo sabía crecer</a:t>
-            </a:r>
-          </a:p>
-        </p:txBody>
-      </p:sp>
-      <p:sp>
-        <p:nvSpPr>
-          <p:cNvPr id="6" name="big"/>
+              <a:t>La aplicación se cerraba sola al reproducir</a:t>
+            </a:r>
+          </a:p>
+        </p:txBody>
+      </p:sp>
+      <p:sp>
+        <p:nvSpPr>
+          <p:cNvPr id="9" name="tx"/>
           <p:cNvSpPr txBox="1"/>
           <p:nvPr/>
         </p:nvSpPr>
         <p:spPr>
           <a:xfrm>
-            <a:off x="8183879" y="2514600"/>
-            <a:ext cx="3200400" cy="1828800"/>
+            <a:off x="685800" y="2423160"/>
+            <a:ext cx="9418320" cy="3291840"/>
           </a:xfrm>
           <a:prstGeom prst="rect">
             <a:avLst/>
@@ -10786,44 +11425,37 @@
           </a:bodyPr>
           <a:lstStyle/>
           <a:p>
-            <a:pPr algn="ctr">
+            <a:pPr algn="l">
               <a:spcAft>
-                <a:spcPts val="600"/>
+                <a:spcPts val="1000"/>
               </a:spcAft>
             </a:pPr>
             <a:r>
-              <a:rPr sz="7600" b="1">
-                <a:solidFill>
-                  <a:srgbClr val="F85149"/>
-                </a:solidFill>
-                <a:latin typeface="Segoe UI Black"/>
+              <a:rPr sz="1800" b="1">
+                <a:solidFill>
+                  <a:srgbClr val="E6EDF3"/>
+                </a:solidFill>
+                <a:latin typeface="Segoe UI"/>
               </a:rPr>
-              <a:t>11 s</a:t>
-            </a:r>
-          </a:p>
-        </p:txBody>
-      </p:sp>
-      <p:sp>
-        <p:nvSpPr>
-          <p:cNvPr id="7" name="body"/>
-          <p:cNvSpPr txBox="1"/>
-          <p:nvPr/>
-        </p:nvSpPr>
-        <p:spPr>
-          <a:xfrm>
-            <a:off x="640080" y="2377440"/>
-            <a:ext cx="6949440" cy="2743200"/>
-          </a:xfrm>
-          <a:prstGeom prst="rect">
-            <a:avLst/>
-          </a:prstGeom>
-          <a:noFill/>
-        </p:spPr>
-        <p:txBody>
-          <a:bodyPr wrap="square" anchor="t">
-            <a:spAutoFit/>
-          </a:bodyPr>
-          <a:lstStyle/>
+              <a:t>Qué pasaba:  se cerraba de golpe, sin mostrar ningún error en nuestro código.</a:t>
+            </a:r>
+          </a:p>
+          <a:p>
+            <a:pPr algn="l">
+              <a:spcAft>
+                <a:spcPts val="1000"/>
+              </a:spcAft>
+            </a:pPr>
+            <a:r>
+              <a:rPr sz="1800" b="0">
+                <a:solidFill>
+                  <a:srgbClr val="E6EDF3"/>
+                </a:solidFill>
+                <a:latin typeface="Segoe UI"/>
+              </a:rPr>
+              <a:t>Por qué:  el fallo estaba dentro de una librería de audio que usábamos (un error conocido), y se repetía en tres teléfonos distintos. Lo encontramos leyendo el registro interno de Android conectado por USB.</a:t>
+            </a:r>
+          </a:p>
           <a:p>
             <a:pPr algn="l">
               <a:spcAft>
@@ -10831,123 +11463,13 @@
               </a:spcAft>
             </a:pPr>
             <a:r>
-              <a:rPr sz="1900" b="0">
-                <a:solidFill>
-                  <a:srgbClr val="E6EDF3"/>
+              <a:rPr sz="1800" b="0">
+                <a:solidFill>
+                  <a:srgbClr val="3FB950"/>
                 </a:solidFill>
                 <a:latin typeface="Segoe UI"/>
               </a:rPr>
-              <a:t>Reproducir 2 segundos de audio costaba 2.2 segundos.</a:t>
-            </a:r>
-          </a:p>
-          <a:p>
-            <a:pPr algn="l">
-              <a:spcAft>
-                <a:spcPts val="600"/>
-              </a:spcAft>
-            </a:pPr>
-            <a:r>
-              <a:rPr sz="1900" b="0">
-                <a:solidFill>
-                  <a:srgbClr val="E6EDF3"/>
-                </a:solidFill>
-                <a:latin typeface="Segoe UI"/>
-              </a:rPr>
-              <a:t>Si el consumidor es más lento que el productor, la cola crece. Siempre. Sin importar cuánto ancho de banda ahorres.</a:t>
-            </a:r>
-          </a:p>
-          <a:p>
-            <a:pPr algn="l">
-              <a:spcAft>
-                <a:spcPts val="600"/>
-              </a:spcAft>
-            </a:pPr>
-            <a:r>
-              <a:rPr sz="1900" b="1">
-                <a:solidFill>
-                  <a:srgbClr val="3FB950"/>
-                </a:solidFill>
-                <a:latin typeface="Segoe UI"/>
-              </a:rPr>
-              <a:t>Rediseño total: streaming nativo + tope con descarte en cada etapa.</a:t>
-            </a:r>
-          </a:p>
-        </p:txBody>
-      </p:sp>
-      <p:sp>
-        <p:nvSpPr>
-          <p:cNvPr id="8" name="accent"/>
-          <p:cNvSpPr txBox="1"/>
-          <p:nvPr/>
-        </p:nvSpPr>
-        <p:spPr>
-          <a:xfrm>
-            <a:off x="640080" y="5212080"/>
-            <a:ext cx="10881360" cy="731520"/>
-          </a:xfrm>
-          <a:prstGeom prst="rect">
-            <a:avLst/>
-          </a:prstGeom>
-          <a:noFill/>
-        </p:spPr>
-        <p:txBody>
-          <a:bodyPr wrap="square" anchor="t">
-            <a:spAutoFit/>
-          </a:bodyPr>
-          <a:lstStyle/>
-          <a:p>
-            <a:pPr algn="l">
-              <a:spcAft>
-                <a:spcPts val="600"/>
-              </a:spcAft>
-            </a:pPr>
-            <a:r>
-              <a:rPr sz="1800" b="1">
-                <a:solidFill>
-                  <a:srgbClr val="D29922"/>
-                </a:solidFill>
-                <a:latin typeface="Segoe UI"/>
-              </a:rPr>
-              <a:t>La ley del tiempo real: fresco e incompleto vale más que completo y atrasado.</a:t>
-            </a:r>
-          </a:p>
-        </p:txBody>
-      </p:sp>
-      <p:sp>
-        <p:nvSpPr>
-          <p:cNvPr id="9" name="foot"/>
-          <p:cNvSpPr txBox="1"/>
-          <p:nvPr/>
-        </p:nvSpPr>
-        <p:spPr>
-          <a:xfrm>
-            <a:off x="640080" y="6419088"/>
-            <a:ext cx="10881360" cy="365760"/>
-          </a:xfrm>
-          <a:prstGeom prst="rect">
-            <a:avLst/>
-          </a:prstGeom>
-          <a:noFill/>
-        </p:spPr>
-        <p:txBody>
-          <a:bodyPr wrap="square" anchor="t">
-            <a:spAutoFit/>
-          </a:bodyPr>
-          <a:lstStyle/>
-          <a:p>
-            <a:pPr algn="l">
-              <a:spcAft>
-                <a:spcPts val="600"/>
-              </a:spcAft>
-            </a:pPr>
-            <a:r>
-              <a:rPr sz="1000" b="0">
-                <a:solidFill>
-                  <a:srgbClr val="8B949E"/>
-                </a:solidFill>
-                <a:latin typeface="Segoe UI"/>
-              </a:rPr>
-              <a:t>DSP · BT Analyzer  —  Teoría de la Información y Sistemas de Comunicación · UNAL</a:t>
+              <a:t>Cómo se resolvió:  dejar la librería y hablarle directo al sistema de sonido de Android, con una sola fila ordenada encargada de escribir el audio. Sin choques, sin cierres.</a:t>
             </a:r>
           </a:p>
         </p:txBody>
@@ -11028,58 +11550,53 @@
       </p:sp>
       <p:sp>
         <p:nvSpPr>
-          <p:cNvPr id="3" name="orb"/>
-          <p:cNvSpPr/>
-          <p:nvPr/>
-        </p:nvSpPr>
-        <p:spPr>
-          <a:xfrm>
-            <a:off x="548640" y="1828800"/>
-            <a:ext cx="2743200" cy="2743200"/>
-          </a:xfrm>
-          <a:prstGeom prst="ellipse">
+          <p:cNvPr id="3" name="tx"/>
+          <p:cNvSpPr txBox="1"/>
+          <p:nvPr/>
+        </p:nvSpPr>
+        <p:spPr>
+          <a:xfrm>
+            <a:off x="8869680" y="2011680"/>
+            <a:ext cx="2926080" cy="2011680"/>
+          </a:xfrm>
+          <a:prstGeom prst="rect">
             <a:avLst/>
           </a:prstGeom>
           <a:noFill/>
-          <a:ln w="44450">
-            <a:solidFill>
-              <a:srgbClr val="F85149"/>
-            </a:solidFill>
-          </a:ln>
-          <a:effectLst/>
-        </p:spPr>
-        <p:style>
-          <a:lnRef idx="1">
-            <a:schemeClr val="accent1"/>
-          </a:lnRef>
-          <a:fillRef idx="3">
-            <a:schemeClr val="accent1"/>
-          </a:fillRef>
-          <a:effectRef idx="2">
-            <a:schemeClr val="accent1"/>
-          </a:effectRef>
-          <a:fontRef idx="minor">
-            <a:schemeClr val="lt1"/>
-          </a:fontRef>
-        </p:style>
-        <p:txBody>
-          <a:bodyPr rtlCol="0" anchor="ctr"/>
-          <a:lstStyle/>
-          <a:p>
-            <a:pPr algn="ctr"/>
-          </a:p>
-        </p:txBody>
-      </p:sp>
-      <p:sp>
-        <p:nvSpPr>
-          <p:cNvPr id="4" name="kicker"/>
+        </p:spPr>
+        <p:txBody>
+          <a:bodyPr wrap="square" anchor="t">
+            <a:spAutoFit/>
+          </a:bodyPr>
+          <a:lstStyle/>
+          <a:p>
+            <a:pPr algn="ctr">
+              <a:spcAft>
+                <a:spcPts val="600"/>
+              </a:spcAft>
+            </a:pPr>
+            <a:r>
+              <a:rPr sz="8000" b="1">
+                <a:solidFill>
+                  <a:srgbClr val="F85149"/>
+                </a:solidFill>
+                <a:latin typeface="Segoe UI Black"/>
+              </a:rPr>
+              <a:t>11 s</a:t>
+            </a:r>
+          </a:p>
+        </p:txBody>
+      </p:sp>
+      <p:sp>
+        <p:nvSpPr>
+          <p:cNvPr id="4" name="kick"/>
           <p:cNvSpPr txBox="1"/>
           <p:nvPr/>
         </p:nvSpPr>
         <p:spPr>
           <a:xfrm>
-            <a:off x="640080" y="411480"/>
-            <a:ext cx="10881360" cy="457200"/>
+            <a:off x="685800" y="457200"/>
+            <a:ext cx="10789920" cy="457200"/>
           </a:xfrm>
           <a:prstGeom prst="rect">
             <a:avLst/>
@@ -11104,7 +11621,7 @@
                 </a:solidFill>
                 <a:latin typeface="Segoe UI"/>
               </a:rPr>
-              <a:t>HISTORIA · VERSIÓN 3</a:t>
+              <a:t>LO QUE SALIÓ MAL, Y CÓMO SE RESOLVIÓ</a:t>
             </a:r>
           </a:p>
         </p:txBody>
@@ -11117,8 +11634,8 @@
         </p:nvSpPr>
         <p:spPr>
           <a:xfrm>
-            <a:off x="640080" y="914400"/>
-            <a:ext cx="10881360" cy="1463040"/>
+            <a:off x="685800" y="932688"/>
+            <a:ext cx="10789920" cy="1554480"/>
           </a:xfrm>
           <a:prstGeom prst="rect">
             <a:avLst/>
@@ -11137,27 +11654,27 @@
               </a:spcAft>
             </a:pPr>
             <a:r>
-              <a:rPr sz="3800" b="1">
+              <a:rPr sz="3000" b="1">
                 <a:solidFill>
                   <a:srgbClr val="E6EDF3"/>
                 </a:solidFill>
                 <a:latin typeface="Segoe UI"/>
               </a:rPr>
-              <a:t>Transmitíamos silencio. Todo el tiempo.</a:t>
-            </a:r>
-          </a:p>
-        </p:txBody>
-      </p:sp>
-      <p:sp>
-        <p:nvSpPr>
-          <p:cNvPr id="6" name="body"/>
+              <a:t>El retraso crecía y no paraba</a:t>
+            </a:r>
+          </a:p>
+        </p:txBody>
+      </p:sp>
+      <p:sp>
+        <p:nvSpPr>
+          <p:cNvPr id="6" name="tx"/>
           <p:cNvSpPr txBox="1"/>
           <p:nvPr/>
         </p:nvSpPr>
         <p:spPr>
           <a:xfrm>
-            <a:off x="640080" y="2377440"/>
-            <a:ext cx="10424160" cy="2377440"/>
+            <a:off x="685800" y="2423160"/>
+            <a:ext cx="7863840" cy="3291840"/>
           </a:xfrm>
           <a:prstGeom prst="rect">
             <a:avLst/>
@@ -11169,6 +11686,38 @@
             <a:spAutoFit/>
           </a:bodyPr>
           <a:lstStyle/>
+          <a:p>
+            <a:pPr algn="l">
+              <a:spcAft>
+                <a:spcPts val="1000"/>
+              </a:spcAft>
+            </a:pPr>
+            <a:r>
+              <a:rPr sz="1800" b="1">
+                <a:solidFill>
+                  <a:srgbClr val="E6EDF3"/>
+                </a:solidFill>
+                <a:latin typeface="Segoe UI"/>
+              </a:rPr>
+              <a:t>Qué pasaba:  empezaba bien, y en un minuto ya iba en varios segundos, hasta cortarse.</a:t>
+            </a:r>
+          </a:p>
+          <a:p>
+            <a:pPr algn="l">
+              <a:spcAft>
+                <a:spcPts val="1000"/>
+              </a:spcAft>
+            </a:pPr>
+            <a:r>
+              <a:rPr sz="1800" b="0">
+                <a:solidFill>
+                  <a:srgbClr val="E6EDF3"/>
+                </a:solidFill>
+                <a:latin typeface="Segoe UI"/>
+              </a:rPr>
+              <a:t>Por qué:  reproducir 2 segundos de audio tardaba 2,2. Si el que reproduce es más lento que el que graba, la cola solo puede crecer.</a:t>
+            </a:r>
+          </a:p>
           <a:p>
             <a:pPr algn="l">
               <a:spcAft>
@@ -11176,123 +11725,13 @@
               </a:spcAft>
             </a:pPr>
             <a:r>
-              <a:rPr sz="1900" b="0">
-                <a:solidFill>
-                  <a:srgbClr val="E6EDF3"/>
+              <a:rPr sz="1800" b="0">
+                <a:solidFill>
+                  <a:srgbClr val="3FB950"/>
                 </a:solidFill>
                 <a:latin typeface="Segoe UI"/>
               </a:rPr>
-              <a:t>Sin detector de voz, cada micrófono enviaba su tasa completa 24/7 aunque nadie hablara.</a:t>
-            </a:r>
-          </a:p>
-          <a:p>
-            <a:pPr algn="l">
-              <a:spcAft>
-                <a:spcPts val="600"/>
-              </a:spcAft>
-            </a:pPr>
-            <a:r>
-              <a:rPr sz="1900" b="0">
-                <a:solidFill>
-                  <a:srgbClr val="E6EDF3"/>
-                </a:solidFill>
-                <a:latin typeface="Segoe UI"/>
-              </a:rPr>
-              <a:t>La pista que lo destapó: todo se recuperaba al silenciar el micrófono.</a:t>
-            </a:r>
-          </a:p>
-          <a:p>
-            <a:pPr algn="l">
-              <a:spcAft>
-                <a:spcPts val="600"/>
-              </a:spcAft>
-            </a:pPr>
-            <a:r>
-              <a:rPr sz="1900" b="0">
-                <a:solidFill>
-                  <a:srgbClr val="E6EDF3"/>
-                </a:solidFill>
-                <a:latin typeface="Segoe UI"/>
-              </a:rPr>
-              <a:t>Y de paso: el ARQ reenviaba sobre un canal ya saturado — más reenvíos, más pérdida, más reenvíos.</a:t>
-            </a:r>
-          </a:p>
-        </p:txBody>
-      </p:sp>
-      <p:sp>
-        <p:nvSpPr>
-          <p:cNvPr id="7" name="accent"/>
-          <p:cNvSpPr txBox="1"/>
-          <p:nvPr/>
-        </p:nvSpPr>
-        <p:spPr>
-          <a:xfrm>
-            <a:off x="640080" y="4846320"/>
-            <a:ext cx="10881360" cy="822960"/>
-          </a:xfrm>
-          <a:prstGeom prst="rect">
-            <a:avLst/>
-          </a:prstGeom>
-          <a:noFill/>
-        </p:spPr>
-        <p:txBody>
-          <a:bodyPr wrap="square" anchor="t">
-            <a:spAutoFit/>
-          </a:bodyPr>
-          <a:lstStyle/>
-          <a:p>
-            <a:pPr algn="l">
-              <a:spcAft>
-                <a:spcPts val="600"/>
-              </a:spcAft>
-            </a:pPr>
-            <a:r>
-              <a:rPr sz="2000" b="1">
-                <a:solidFill>
-                  <a:srgbClr val="3FB950"/>
-                </a:solidFill>
-                <a:latin typeface="Segoe UI"/>
-              </a:rPr>
-              <a:t>Salida: VAD (el silencio no viaja) + backpressure + 4× menos datos (8 kHz · μ-law).</a:t>
-            </a:r>
-          </a:p>
-        </p:txBody>
-      </p:sp>
-      <p:sp>
-        <p:nvSpPr>
-          <p:cNvPr id="8" name="foot"/>
-          <p:cNvSpPr txBox="1"/>
-          <p:nvPr/>
-        </p:nvSpPr>
-        <p:spPr>
-          <a:xfrm>
-            <a:off x="640080" y="6419088"/>
-            <a:ext cx="10881360" cy="365760"/>
-          </a:xfrm>
-          <a:prstGeom prst="rect">
-            <a:avLst/>
-          </a:prstGeom>
-          <a:noFill/>
-        </p:spPr>
-        <p:txBody>
-          <a:bodyPr wrap="square" anchor="t">
-            <a:spAutoFit/>
-          </a:bodyPr>
-          <a:lstStyle/>
-          <a:p>
-            <a:pPr algn="l">
-              <a:spcAft>
-                <a:spcPts val="600"/>
-              </a:spcAft>
-            </a:pPr>
-            <a:r>
-              <a:rPr sz="1000" b="0">
-                <a:solidFill>
-                  <a:srgbClr val="8B949E"/>
-                </a:solidFill>
-                <a:latin typeface="Segoe UI"/>
-              </a:rPr>
-              <a:t>DSP · BT Analyzer  —  Teoría de la Información y Sistemas de Comunicación · UNAL</a:t>
+              <a:t>Cómo se resolvió:  enviar en pedacitos pequeños y ponerle un límite a cada cola: si se llena, se descarta lo más viejo. El retraso quedó fijo, entre medio segundo y un segundo.</a:t>
             </a:r>
           </a:p>
         </p:txBody>
